--- a/Fitness_Planner_AI_Presentation.pptx
+++ b/Fitness_Planner_AI_Presentation.pptx
@@ -16,9 +16,10 @@
     <p:sldId id="264" r:id="rId10"/>
     <p:sldId id="265" r:id="rId11"/>
     <p:sldId id="266" r:id="rId12"/>
+    <p:sldId id="267" r:id="rId13"/>
   </p:sldIdLst>
   <p:notesMasterIdLst>
-    <p:notesMasterId r:id="rId13"/>
+    <p:notesMasterId r:id="rId14"/>
   </p:notesMasterIdLst>
   <p:sldSz cx="9144000" cy="5143500"/>
   <p:notesSz cx="5143500" cy="9144000"/>
@@ -730,6 +731,94 @@
 </p:notes>
 </file>
 
+<file path=ppt/notesSlides/notesSlide12.xml><?xml version="1.0" encoding="utf-8"?>
+<p:notes xmlns:a="http://schemas.openxmlformats.org/drawingml/2006/main" xmlns:r="http://schemas.openxmlformats.org/officeDocument/2006/relationships" xmlns:p="http://schemas.openxmlformats.org/presentationml/2006/main">
+  <p:cSld>
+    <p:spTree>
+      <p:nvGrpSpPr>
+        <p:cNvPr id="1" name=""/>
+        <p:cNvGrpSpPr/>
+        <p:nvPr/>
+      </p:nvGrpSpPr>
+      <p:grpSpPr>
+        <a:xfrm>
+          <a:off x="0" y="0"/>
+          <a:ext cx="0" cy="0"/>
+          <a:chOff x="0" y="0"/>
+          <a:chExt cx="0" cy="0"/>
+        </a:xfrm>
+      </p:grpSpPr>
+      <p:sp>
+        <p:nvSpPr>
+          <p:cNvPr id="2" name="Slide Image Placeholder 1"/>
+          <p:cNvSpPr>
+            <a:spLocks noGrp="1" noRot="1" noChangeAspect="1"/>
+          </p:cNvSpPr>
+          <p:nvPr>
+            <p:ph type="sldImg"/>
+          </p:nvPr>
+        </p:nvSpPr>
+        <p:spPr/>
+      </p:sp>
+      <p:sp>
+        <p:nvSpPr>
+          <p:cNvPr id="3" name="Notes Placeholder 2"/>
+          <p:cNvSpPr>
+            <a:spLocks noGrp="1"/>
+          </p:cNvSpPr>
+          <p:nvPr>
+            <p:ph type="body" idx="1"/>
+          </p:nvPr>
+        </p:nvSpPr>
+        <p:spPr/>
+        <p:txBody>
+          <a:bodyPr/>
+          <a:lstStyle/>
+          <a:p>
+            <a:r>
+              <a:rPr lang="en-US" dirty="0"/>
+              <a:t/>
+            </a:r>
+            <a:endParaRPr lang="en-US" dirty="0"/>
+          </a:p>
+        </p:txBody>
+      </p:sp>
+      <p:sp>
+        <p:nvSpPr>
+          <p:cNvPr id="4" name="Slide Number Placeholder 3"/>
+          <p:cNvSpPr>
+            <a:spLocks noGrp="1"/>
+          </p:cNvSpPr>
+          <p:nvPr>
+            <p:ph type="sldNum" sz="quarter" idx="10"/>
+          </p:nvPr>
+        </p:nvSpPr>
+        <p:spPr/>
+        <p:txBody>
+          <a:bodyPr/>
+          <a:lstStyle/>
+          <a:p>
+            <a:fld id="{F7021451-1387-4CA6-816F-3879F97B5CBC}" type="slidenum">
+              <a:rPr lang="en-US"/>
+              <a:t>12</a:t>
+            </a:fld>
+            <a:endParaRPr lang="en-US"/>
+          </a:p>
+        </p:txBody>
+      </p:sp>
+    </p:spTree>
+    <p:extLst>
+      <p:ext uri="{BB962C8B-B14F-4D97-AF65-F5344CB8AC3E}">
+        <p14:creationId xmlns:p14="http://schemas.microsoft.com/office/powerpoint/2010/main" val="1024086991"/>
+      </p:ext>
+    </p:extLst>
+  </p:cSld>
+  <p:clrMapOvr>
+    <a:masterClrMapping/>
+  </p:clrMapOvr>
+</p:notes>
+</file>
+
 <file path=ppt/notesSlides/notesSlide2.xml><?xml version="1.0" encoding="utf-8"?>
 <p:notes xmlns:a="http://schemas.openxmlformats.org/drawingml/2006/main" xmlns:r="http://schemas.openxmlformats.org/officeDocument/2006/relationships" xmlns:p="http://schemas.openxmlformats.org/presentationml/2006/main">
   <p:cSld>
@@ -1760,14 +1849,74 @@
       </p:grpSpPr>
       <p:sp>
         <p:nvSpPr>
-          <p:cNvPr id="2" name="Text 0"/>
-          <p:cNvSpPr/>
-          <p:nvPr/>
-        </p:nvSpPr>
-        <p:spPr>
-          <a:xfrm>
-            <a:off x="914400" y="914400"/>
-            <a:ext cx="7315200" cy="914400"/>
+          <p:cNvPr id="2" name="Shape 0"/>
+          <p:cNvSpPr/>
+          <p:nvPr/>
+        </p:nvSpPr>
+        <p:spPr>
+          <a:xfrm>
+            <a:off x="0" y="0"/>
+            <a:ext cx="9144000" cy="5143500"/>
+          </a:xfrm>
+          <a:prstGeom prst="rect">
+            <a:avLst/>
+          </a:prstGeom>
+          <a:solidFill>
+            <a:srgbClr val="0F172A"/>
+          </a:solidFill>
+          <a:ln/>
+        </p:spPr>
+      </p:sp>
+      <p:sp>
+        <p:nvSpPr>
+          <p:cNvPr id="3" name="Shape 1"/>
+          <p:cNvSpPr/>
+          <p:nvPr/>
+        </p:nvSpPr>
+        <p:spPr>
+          <a:xfrm>
+            <a:off x="0" y="0"/>
+            <a:ext cx="9144000" cy="164592"/>
+          </a:xfrm>
+          <a:prstGeom prst="rect">
+            <a:avLst/>
+          </a:prstGeom>
+          <a:solidFill>
+            <a:srgbClr val="34D399"/>
+          </a:solidFill>
+          <a:ln/>
+        </p:spPr>
+      </p:sp>
+      <p:sp>
+        <p:nvSpPr>
+          <p:cNvPr id="4" name="Shape 2"/>
+          <p:cNvSpPr/>
+          <p:nvPr/>
+        </p:nvSpPr>
+        <p:spPr>
+          <a:xfrm>
+            <a:off x="0" y="0"/>
+            <a:ext cx="164592" cy="5143500"/>
+          </a:xfrm>
+          <a:prstGeom prst="rect">
+            <a:avLst/>
+          </a:prstGeom>
+          <a:solidFill>
+            <a:srgbClr val="1A73E8"/>
+          </a:solidFill>
+          <a:ln/>
+        </p:spPr>
+      </p:sp>
+      <p:sp>
+        <p:nvSpPr>
+          <p:cNvPr id="5" name="Text 3"/>
+          <p:cNvSpPr/>
+          <p:nvPr/>
+        </p:nvSpPr>
+        <p:spPr>
+          <a:xfrm>
+            <a:off x="457200" y="822960"/>
+            <a:ext cx="8229600" cy="548640"/>
           </a:xfrm>
           <a:prstGeom prst="rect">
             <a:avLst/>
@@ -1783,27 +1932,30 @@
               <a:buNone/>
             </a:pPr>
             <a:r>
-              <a:rPr lang="en-US" sz="3600" b="1" dirty="0">
-                <a:solidFill>
-                  <a:srgbClr val="00A2D9"/>
-                </a:solidFill>
+              <a:rPr lang="en-US" sz="2000" dirty="0">
+                <a:solidFill>
+                  <a:srgbClr val="34D399"/>
+                </a:solidFill>
+                <a:latin typeface="Calibri" pitchFamily="34" charset="0"/>
+                <a:ea typeface="Calibri" pitchFamily="34" charset="-122"/>
+                <a:cs typeface="Calibri" pitchFamily="34" charset="-120"/>
               </a:rPr>
               <a:t>CAPSTONE PROJECT</a:t>
             </a:r>
-            <a:endParaRPr lang="en-US" sz="3600" dirty="0"/>
-          </a:p>
-        </p:txBody>
-      </p:sp>
-      <p:sp>
-        <p:nvSpPr>
-          <p:cNvPr id="3" name="Text 1"/>
-          <p:cNvSpPr/>
-          <p:nvPr/>
-        </p:nvSpPr>
-        <p:spPr>
-          <a:xfrm>
-            <a:off x="914400" y="1828800"/>
-            <a:ext cx="7315200" cy="914400"/>
+            <a:endParaRPr lang="en-US" sz="2000" dirty="0"/>
+          </a:p>
+        </p:txBody>
+      </p:sp>
+      <p:sp>
+        <p:nvSpPr>
+          <p:cNvPr id="6" name="Text 4"/>
+          <p:cNvSpPr/>
+          <p:nvPr/>
+        </p:nvSpPr>
+        <p:spPr>
+          <a:xfrm>
+            <a:off x="457200" y="1463040"/>
+            <a:ext cx="8229600" cy="914400"/>
           </a:xfrm>
           <a:prstGeom prst="rect">
             <a:avLst/>
@@ -1819,27 +1971,30 @@
               <a:buNone/>
             </a:pPr>
             <a:r>
-              <a:rPr lang="en-US" sz="2800" b="1" dirty="0">
-                <a:solidFill>
-                  <a:srgbClr val="00A2D9"/>
-                </a:solidFill>
+              <a:rPr lang="en-US" sz="4400" b="1" dirty="0">
+                <a:solidFill>
+                  <a:srgbClr val="FFFFFF"/>
+                </a:solidFill>
+                <a:latin typeface="Calibri" pitchFamily="34" charset="0"/>
+                <a:ea typeface="Calibri" pitchFamily="34" charset="-122"/>
+                <a:cs typeface="Calibri" pitchFamily="34" charset="-120"/>
               </a:rPr>
               <a:t>Fitness Planner AI</a:t>
             </a:r>
-            <a:endParaRPr lang="en-US" sz="2800" dirty="0"/>
-          </a:p>
-        </p:txBody>
-      </p:sp>
-      <p:sp>
-        <p:nvSpPr>
-          <p:cNvPr id="4" name="Text 2"/>
-          <p:cNvSpPr/>
-          <p:nvPr/>
-        </p:nvSpPr>
-        <p:spPr>
-          <a:xfrm>
-            <a:off x="914400" y="3200400"/>
-            <a:ext cx="7315200" cy="1371600"/>
+            <a:endParaRPr lang="en-US" sz="4400" dirty="0"/>
+          </a:p>
+        </p:txBody>
+      </p:sp>
+      <p:sp>
+        <p:nvSpPr>
+          <p:cNvPr id="7" name="Text 5"/>
+          <p:cNvSpPr/>
+          <p:nvPr/>
+        </p:nvSpPr>
+        <p:spPr>
+          <a:xfrm>
+            <a:off x="457200" y="2423160"/>
+            <a:ext cx="8229600" cy="457200"/>
           </a:xfrm>
           <a:prstGeom prst="rect">
             <a:avLst/>
@@ -1855,56 +2010,138 @@
               <a:buNone/>
             </a:pPr>
             <a:r>
-              <a:rPr lang="en-US" sz="1800" dirty="0">
-                <a:solidFill>
-                  <a:srgbClr val="00A2D9"/>
-                </a:solidFill>
+              <a:rPr lang="en-US" sz="1800" i="1" dirty="0">
+                <a:solidFill>
+                  <a:srgbClr val="94A3B8"/>
+                </a:solidFill>
+                <a:latin typeface="Calibri" pitchFamily="34" charset="0"/>
+                <a:ea typeface="Calibri" pitchFamily="34" charset="-122"/>
+                <a:cs typeface="Calibri" pitchFamily="34" charset="-120"/>
+              </a:rPr>
+              <a:t>Personalized Workout &amp; Diet Planner</a:t>
+            </a:r>
+            <a:endParaRPr lang="en-US" sz="1800" dirty="0"/>
+          </a:p>
+        </p:txBody>
+      </p:sp>
+      <p:sp>
+        <p:nvSpPr>
+          <p:cNvPr id="8" name="Shape 6"/>
+          <p:cNvSpPr/>
+          <p:nvPr/>
+        </p:nvSpPr>
+        <p:spPr>
+          <a:xfrm>
+            <a:off x="2103120" y="3108960"/>
+            <a:ext cx="4937760" cy="1645920"/>
+          </a:xfrm>
+          <a:prstGeom prst="rect">
+            <a:avLst/>
+          </a:prstGeom>
+          <a:solidFill>
+            <a:srgbClr val="1E293B"/>
+          </a:solidFill>
+          <a:ln w="12700">
+            <a:solidFill>
+              <a:srgbClr val="34D399"/>
+            </a:solidFill>
+            <a:prstDash val="solid"/>
+          </a:ln>
+        </p:spPr>
+      </p:sp>
+      <p:sp>
+        <p:nvSpPr>
+          <p:cNvPr id="9" name="Text 7"/>
+          <p:cNvSpPr/>
+          <p:nvPr/>
+        </p:nvSpPr>
+        <p:spPr>
+          <a:xfrm>
+            <a:off x="2286000" y="3200400"/>
+            <a:ext cx="4572000" cy="1508760"/>
+          </a:xfrm>
+          <a:prstGeom prst="rect">
+            <a:avLst/>
+          </a:prstGeom>
+          <a:noFill/>
+          <a:ln/>
+        </p:spPr>
+        <p:txBody>
+          <a:bodyPr wrap="square" rtlCol="0" anchor="ctr"/>
+          <a:lstStyle/>
+          <a:p>
+            <a:pPr indent="0" marL="0">
+              <a:buNone/>
+            </a:pPr>
+            <a:r>
+              <a:rPr lang="en-US" sz="1400" dirty="0">
+                <a:solidFill>
+                  <a:srgbClr val="FFFFFF"/>
+                </a:solidFill>
+                <a:latin typeface="Calibri" pitchFamily="34" charset="0"/>
+                <a:ea typeface="Calibri" pitchFamily="34" charset="-122"/>
+                <a:cs typeface="Calibri" pitchFamily="34" charset="-120"/>
               </a:rPr>
               <a:t>Presented By:</a:t>
             </a:r>
-            <a:endParaRPr lang="en-US" sz="1800" dirty="0"/>
-          </a:p>
-          <a:p>
-            <a:pPr algn="ctr" indent="0" marL="0">
-              <a:buNone/>
-            </a:pPr>
-            <a:r>
-              <a:rPr lang="en-US" sz="1800" dirty="0">
-                <a:solidFill>
-                  <a:srgbClr val="00A2D9"/>
-                </a:solidFill>
-              </a:rPr>
-              <a:t>1. Student Name- M NANTHINI</a:t>
-            </a:r>
-            <a:endParaRPr lang="en-US" sz="1800" dirty="0"/>
-          </a:p>
-          <a:p>
-            <a:pPr algn="ctr" indent="0" marL="0">
-              <a:buNone/>
-            </a:pPr>
-            <a:r>
-              <a:rPr lang="en-US" sz="1800" dirty="0">
-                <a:solidFill>
-                  <a:srgbClr val="00A2D9"/>
-                </a:solidFill>
-              </a:rPr>
-              <a:t>2. College Name- XYZ</a:t>
-            </a:r>
-            <a:endParaRPr lang="en-US" sz="1800" dirty="0"/>
-          </a:p>
-          <a:p>
-            <a:pPr algn="ctr" indent="0" marL="0">
-              <a:buNone/>
-            </a:pPr>
-            <a:r>
-              <a:rPr lang="en-US" sz="1800" dirty="0">
-                <a:solidFill>
-                  <a:srgbClr val="00A2D9"/>
-                </a:solidFill>
-              </a:rPr>
-              <a:t>3. Department- CSE</a:t>
-            </a:r>
-            <a:endParaRPr lang="en-US" sz="1800" dirty="0"/>
+            <a:endParaRPr lang="en-US" sz="1400" dirty="0"/>
+          </a:p>
+          <a:p>
+            <a:pPr indent="0" marL="0">
+              <a:buNone/>
+            </a:pPr>
+            <a:endParaRPr lang="en-US" sz="1400" dirty="0"/>
+          </a:p>
+          <a:p>
+            <a:pPr indent="0" marL="0">
+              <a:buNone/>
+            </a:pPr>
+            <a:r>
+              <a:rPr lang="en-US" sz="1400" dirty="0">
+                <a:solidFill>
+                  <a:srgbClr val="FFFFFF"/>
+                </a:solidFill>
+                <a:latin typeface="Calibri" pitchFamily="34" charset="0"/>
+                <a:ea typeface="Calibri" pitchFamily="34" charset="-122"/>
+                <a:cs typeface="Calibri" pitchFamily="34" charset="-120"/>
+              </a:rPr>
+              <a:t>Name   :  Aditya Dhanraj</a:t>
+            </a:r>
+            <a:endParaRPr lang="en-US" sz="1400" dirty="0"/>
+          </a:p>
+          <a:p>
+            <a:pPr indent="0" marL="0">
+              <a:buNone/>
+            </a:pPr>
+            <a:r>
+              <a:rPr lang="en-US" sz="1400" dirty="0">
+                <a:solidFill>
+                  <a:srgbClr val="FFFFFF"/>
+                </a:solidFill>
+                <a:latin typeface="Calibri" pitchFamily="34" charset="0"/>
+                <a:ea typeface="Calibri" pitchFamily="34" charset="-122"/>
+                <a:cs typeface="Calibri" pitchFamily="34" charset="-120"/>
+              </a:rPr>
+              <a:t>Dept    :  CSE</a:t>
+            </a:r>
+            <a:endParaRPr lang="en-US" sz="1400" dirty="0"/>
+          </a:p>
+          <a:p>
+            <a:pPr indent="0" marL="0">
+              <a:buNone/>
+            </a:pPr>
+            <a:r>
+              <a:rPr lang="en-US" sz="1400" dirty="0">
+                <a:solidFill>
+                  <a:srgbClr val="FFFFFF"/>
+                </a:solidFill>
+                <a:latin typeface="Calibri" pitchFamily="34" charset="0"/>
+                <a:ea typeface="Calibri" pitchFamily="34" charset="-122"/>
+                <a:cs typeface="Calibri" pitchFamily="34" charset="-120"/>
+              </a:rPr>
+              <a:t>Live App:  fitness-seven-sand.vercel.app</a:t>
+            </a:r>
+            <a:endParaRPr lang="en-US" sz="1400" dirty="0"/>
           </a:p>
         </p:txBody>
       </p:sp>
@@ -1919,6 +2156,13 @@
 <file path=ppt/slides/slide10.xml><?xml version="1.0" encoding="utf-8"?>
 <p:sld xmlns:a="http://schemas.openxmlformats.org/drawingml/2006/main" xmlns:r="http://schemas.openxmlformats.org/officeDocument/2006/relationships" xmlns:p="http://schemas.openxmlformats.org/presentationml/2006/main">
   <p:cSld name="Slide 10">
+    <p:bg>
+      <p:bgPr>
+        <a:solidFill>
+          <a:srgbClr val="F0F9FF"/>
+        </a:solidFill>
+      </p:bgPr>
+    </p:bg>
     <p:spTree>
       <p:nvGrpSpPr>
         <p:cNvPr id="1" name=""/>
@@ -1935,14 +2179,34 @@
       </p:grpSpPr>
       <p:sp>
         <p:nvSpPr>
-          <p:cNvPr id="2" name="Text 0"/>
-          <p:cNvSpPr/>
-          <p:nvPr/>
-        </p:nvSpPr>
-        <p:spPr>
-          <a:xfrm>
-            <a:off x="457200" y="457200"/>
-            <a:ext cx="8229600" cy="457200"/>
+          <p:cNvPr id="2" name="Shape 0"/>
+          <p:cNvSpPr/>
+          <p:nvPr/>
+        </p:nvSpPr>
+        <p:spPr>
+          <a:xfrm>
+            <a:off x="0" y="0"/>
+            <a:ext cx="9144000" cy="109728"/>
+          </a:xfrm>
+          <a:prstGeom prst="rect">
+            <a:avLst/>
+          </a:prstGeom>
+          <a:solidFill>
+            <a:srgbClr val="34D399"/>
+          </a:solidFill>
+          <a:ln/>
+        </p:spPr>
+      </p:sp>
+      <p:sp>
+        <p:nvSpPr>
+          <p:cNvPr id="3" name="Text 1"/>
+          <p:cNvSpPr/>
+          <p:nvPr/>
+        </p:nvSpPr>
+        <p:spPr>
+          <a:xfrm>
+            <a:off x="365760" y="182880"/>
+            <a:ext cx="8229600" cy="640080"/>
           </a:xfrm>
           <a:prstGeom prst="rect">
             <a:avLst/>
@@ -1958,27 +2222,73 @@
               <a:buNone/>
             </a:pPr>
             <a:r>
-              <a:rPr lang="en-US" sz="2400" b="1" dirty="0">
-                <a:solidFill>
-                  <a:srgbClr val="00A2D9"/>
-                </a:solidFill>
-              </a:rPr>
-              <a:t>REFERENCES</a:t>
-            </a:r>
-            <a:endParaRPr lang="en-US" sz="2400" dirty="0"/>
-          </a:p>
-        </p:txBody>
-      </p:sp>
-      <p:sp>
-        <p:nvSpPr>
-          <p:cNvPr id="3" name="Text 1"/>
-          <p:cNvSpPr/>
-          <p:nvPr/>
-        </p:nvSpPr>
-        <p:spPr>
-          <a:xfrm>
-            <a:off x="457200" y="1371600"/>
-            <a:ext cx="8229600" cy="3200400"/>
+              <a:rPr lang="en-US" sz="2600" b="1" dirty="0">
+                <a:solidFill>
+                  <a:srgbClr val="1A73E8"/>
+                </a:solidFill>
+                <a:latin typeface="Calibri" pitchFamily="34" charset="0"/>
+                <a:ea typeface="Calibri" pitchFamily="34" charset="-122"/>
+                <a:cs typeface="Calibri" pitchFamily="34" charset="-120"/>
+              </a:rPr>
+              <a:t>Future Scope</a:t>
+            </a:r>
+            <a:endParaRPr lang="en-US" sz="2600" dirty="0"/>
+          </a:p>
+        </p:txBody>
+      </p:sp>
+      <p:sp>
+        <p:nvSpPr>
+          <p:cNvPr id="4" name="Shape 2"/>
+          <p:cNvSpPr/>
+          <p:nvPr/>
+        </p:nvSpPr>
+        <p:spPr>
+          <a:xfrm>
+            <a:off x="365760" y="777240"/>
+            <a:ext cx="8229600" cy="0"/>
+          </a:xfrm>
+          <a:prstGeom prst="line">
+            <a:avLst/>
+          </a:prstGeom>
+          <a:noFill/>
+          <a:ln w="19050">
+            <a:solidFill>
+              <a:srgbClr val="34D399"/>
+            </a:solidFill>
+            <a:prstDash val="solid"/>
+          </a:ln>
+        </p:spPr>
+      </p:sp>
+      <p:sp>
+        <p:nvSpPr>
+          <p:cNvPr id="5" name="Shape 3"/>
+          <p:cNvSpPr/>
+          <p:nvPr/>
+        </p:nvSpPr>
+        <p:spPr>
+          <a:xfrm>
+            <a:off x="365760" y="1078992"/>
+            <a:ext cx="164592" cy="164592"/>
+          </a:xfrm>
+          <a:prstGeom prst="ellipse">
+            <a:avLst/>
+          </a:prstGeom>
+          <a:solidFill>
+            <a:srgbClr val="34D399"/>
+          </a:solidFill>
+          <a:ln/>
+        </p:spPr>
+      </p:sp>
+      <p:sp>
+        <p:nvSpPr>
+          <p:cNvPr id="6" name="Text 4"/>
+          <p:cNvSpPr/>
+          <p:nvPr/>
+        </p:nvSpPr>
+        <p:spPr>
+          <a:xfrm>
+            <a:off x="658368" y="1005840"/>
+            <a:ext cx="7955280" cy="548640"/>
           </a:xfrm>
           <a:prstGeom prst="rect">
             <a:avLst/>
@@ -1990,55 +2300,257 @@
           <a:bodyPr wrap="square" rtlCol="0" anchor="ctr"/>
           <a:lstStyle/>
           <a:p>
-            <a:pPr marL="342900" indent="-342900">
-              <a:buSzPct val="100000"/>
-              <a:buChar char="•"/>
-            </a:pPr>
-            <a:r>
-              <a:rPr lang="en-US" sz="1800" dirty="0">
-                <a:solidFill>
-                  <a:srgbClr val="000000"/>
-                </a:solidFill>
-              </a:rPr>
-              <a:t>Mifflin, M. D., et al. (1990). 'A new predictive equation for resting energy expenditure in healthy individuals.' The American Journal of Clinical Nutrition.
-</a:t>
-            </a:r>
-            <a:pPr indent="0" marL="0">
-              <a:buNone/>
-            </a:pPr>
-            <a:r>
-              <a:rPr lang="en-US" sz="1800" dirty="0">
-                <a:solidFill>
-                  <a:srgbClr val="000000"/>
-                </a:solidFill>
-              </a:rPr>
-              <a:t>Node.js Documentation: https://nodejs.org/
-</a:t>
-            </a:r>
-            <a:pPr indent="0" marL="0">
-              <a:buNone/>
-            </a:pPr>
-            <a:r>
-              <a:rPr lang="en-US" sz="1800" dirty="0">
-                <a:solidFill>
-                  <a:srgbClr val="000000"/>
-                </a:solidFill>
-              </a:rPr>
-              <a:t>Express.js Framework: https://expressjs.com/
-</a:t>
-            </a:r>
-            <a:pPr indent="0" marL="0">
-              <a:buNone/>
-            </a:pPr>
-            <a:r>
-              <a:rPr lang="en-US" sz="1800" dirty="0">
-                <a:solidFill>
-                  <a:srgbClr val="000000"/>
-                </a:solidFill>
-              </a:rPr>
-              <a:t>JSON Web Tokens (JWT) Industry Standards: https://jwt.io/</a:t>
-            </a:r>
-            <a:endParaRPr lang="en-US" sz="1800" dirty="0"/>
+            <a:pPr indent="0" marL="0">
+              <a:buNone/>
+            </a:pPr>
+            <a:r>
+              <a:rPr lang="en-US" sz="1500" dirty="0">
+                <a:solidFill>
+                  <a:srgbClr val="1E293B"/>
+                </a:solidFill>
+                <a:latin typeface="Calibri" pitchFamily="34" charset="0"/>
+                <a:ea typeface="Calibri" pitchFamily="34" charset="-122"/>
+                <a:cs typeface="Calibri" pitchFamily="34" charset="-120"/>
+              </a:rPr>
+              <a:t>📱  Mobile App: Convert to native iOS and Android applications.</a:t>
+            </a:r>
+            <a:endParaRPr lang="en-US" sz="1500" dirty="0"/>
+          </a:p>
+        </p:txBody>
+      </p:sp>
+      <p:sp>
+        <p:nvSpPr>
+          <p:cNvPr id="7" name="Shape 5"/>
+          <p:cNvSpPr/>
+          <p:nvPr/>
+        </p:nvSpPr>
+        <p:spPr>
+          <a:xfrm>
+            <a:off x="365760" y="1673352"/>
+            <a:ext cx="164592" cy="164592"/>
+          </a:xfrm>
+          <a:prstGeom prst="ellipse">
+            <a:avLst/>
+          </a:prstGeom>
+          <a:solidFill>
+            <a:srgbClr val="34D399"/>
+          </a:solidFill>
+          <a:ln/>
+        </p:spPr>
+      </p:sp>
+      <p:sp>
+        <p:nvSpPr>
+          <p:cNvPr id="8" name="Text 6"/>
+          <p:cNvSpPr/>
+          <p:nvPr/>
+        </p:nvSpPr>
+        <p:spPr>
+          <a:xfrm>
+            <a:off x="658368" y="1600200"/>
+            <a:ext cx="7955280" cy="548640"/>
+          </a:xfrm>
+          <a:prstGeom prst="rect">
+            <a:avLst/>
+          </a:prstGeom>
+          <a:noFill/>
+          <a:ln/>
+        </p:spPr>
+        <p:txBody>
+          <a:bodyPr wrap="square" rtlCol="0" anchor="ctr"/>
+          <a:lstStyle/>
+          <a:p>
+            <a:pPr indent="0" marL="0">
+              <a:buNone/>
+            </a:pPr>
+            <a:r>
+              <a:rPr lang="en-US" sz="1500" dirty="0">
+                <a:solidFill>
+                  <a:srgbClr val="1E293B"/>
+                </a:solidFill>
+                <a:latin typeface="Calibri" pitchFamily="34" charset="0"/>
+                <a:ea typeface="Calibri" pitchFamily="34" charset="-122"/>
+                <a:cs typeface="Calibri" pitchFamily="34" charset="-120"/>
+              </a:rPr>
+              <a:t>⌚  Wearable Integration: Sync with smartwatches for real-time calorie and step tracking.</a:t>
+            </a:r>
+            <a:endParaRPr lang="en-US" sz="1500" dirty="0"/>
+          </a:p>
+        </p:txBody>
+      </p:sp>
+      <p:sp>
+        <p:nvSpPr>
+          <p:cNvPr id="9" name="Shape 7"/>
+          <p:cNvSpPr/>
+          <p:nvPr/>
+        </p:nvSpPr>
+        <p:spPr>
+          <a:xfrm>
+            <a:off x="365760" y="2267712"/>
+            <a:ext cx="164592" cy="164592"/>
+          </a:xfrm>
+          <a:prstGeom prst="ellipse">
+            <a:avLst/>
+          </a:prstGeom>
+          <a:solidFill>
+            <a:srgbClr val="34D399"/>
+          </a:solidFill>
+          <a:ln/>
+        </p:spPr>
+      </p:sp>
+      <p:sp>
+        <p:nvSpPr>
+          <p:cNvPr id="10" name="Text 8"/>
+          <p:cNvSpPr/>
+          <p:nvPr/>
+        </p:nvSpPr>
+        <p:spPr>
+          <a:xfrm>
+            <a:off x="658368" y="2194560"/>
+            <a:ext cx="7955280" cy="548640"/>
+          </a:xfrm>
+          <a:prstGeom prst="rect">
+            <a:avLst/>
+          </a:prstGeom>
+          <a:noFill/>
+          <a:ln/>
+        </p:spPr>
+        <p:txBody>
+          <a:bodyPr wrap="square" rtlCol="0" anchor="ctr"/>
+          <a:lstStyle/>
+          <a:p>
+            <a:pPr indent="0" marL="0">
+              <a:buNone/>
+            </a:pPr>
+            <a:r>
+              <a:rPr lang="en-US" sz="1500" dirty="0">
+                <a:solidFill>
+                  <a:srgbClr val="1E293B"/>
+                </a:solidFill>
+                <a:latin typeface="Calibri" pitchFamily="34" charset="0"/>
+                <a:ea typeface="Calibri" pitchFamily="34" charset="-122"/>
+                <a:cs typeface="Calibri" pitchFamily="34" charset="-120"/>
+              </a:rPr>
+              <a:t>🤖  LLM Integration: Use open-source language models for natural language fitness advice.</a:t>
+            </a:r>
+            <a:endParaRPr lang="en-US" sz="1500" dirty="0"/>
+          </a:p>
+        </p:txBody>
+      </p:sp>
+      <p:sp>
+        <p:nvSpPr>
+          <p:cNvPr id="11" name="Shape 9"/>
+          <p:cNvSpPr/>
+          <p:nvPr/>
+        </p:nvSpPr>
+        <p:spPr>
+          <a:xfrm>
+            <a:off x="365760" y="2862072"/>
+            <a:ext cx="164592" cy="164592"/>
+          </a:xfrm>
+          <a:prstGeom prst="ellipse">
+            <a:avLst/>
+          </a:prstGeom>
+          <a:solidFill>
+            <a:srgbClr val="34D399"/>
+          </a:solidFill>
+          <a:ln/>
+        </p:spPr>
+      </p:sp>
+      <p:sp>
+        <p:nvSpPr>
+          <p:cNvPr id="12" name="Text 10"/>
+          <p:cNvSpPr/>
+          <p:nvPr/>
+        </p:nvSpPr>
+        <p:spPr>
+          <a:xfrm>
+            <a:off x="658368" y="2788920"/>
+            <a:ext cx="7955280" cy="548640"/>
+          </a:xfrm>
+          <a:prstGeom prst="rect">
+            <a:avLst/>
+          </a:prstGeom>
+          <a:noFill/>
+          <a:ln/>
+        </p:spPr>
+        <p:txBody>
+          <a:bodyPr wrap="square" rtlCol="0" anchor="ctr"/>
+          <a:lstStyle/>
+          <a:p>
+            <a:pPr indent="0" marL="0">
+              <a:buNone/>
+            </a:pPr>
+            <a:r>
+              <a:rPr lang="en-US" sz="1500" dirty="0">
+                <a:solidFill>
+                  <a:srgbClr val="1E293B"/>
+                </a:solidFill>
+                <a:latin typeface="Calibri" pitchFamily="34" charset="0"/>
+                <a:ea typeface="Calibri" pitchFamily="34" charset="-122"/>
+                <a:cs typeface="Calibri" pitchFamily="34" charset="-120"/>
+              </a:rPr>
+              <a:t>📊  Visual Analytics: Add graphs to visualize weight trends, strength progress over time.</a:t>
+            </a:r>
+            <a:endParaRPr lang="en-US" sz="1500" dirty="0"/>
+          </a:p>
+        </p:txBody>
+      </p:sp>
+      <p:sp>
+        <p:nvSpPr>
+          <p:cNvPr id="13" name="Shape 11"/>
+          <p:cNvSpPr/>
+          <p:nvPr/>
+        </p:nvSpPr>
+        <p:spPr>
+          <a:xfrm>
+            <a:off x="365760" y="3456432"/>
+            <a:ext cx="164592" cy="164592"/>
+          </a:xfrm>
+          <a:prstGeom prst="ellipse">
+            <a:avLst/>
+          </a:prstGeom>
+          <a:solidFill>
+            <a:srgbClr val="34D399"/>
+          </a:solidFill>
+          <a:ln/>
+        </p:spPr>
+      </p:sp>
+      <p:sp>
+        <p:nvSpPr>
+          <p:cNvPr id="14" name="Text 12"/>
+          <p:cNvSpPr/>
+          <p:nvPr/>
+        </p:nvSpPr>
+        <p:spPr>
+          <a:xfrm>
+            <a:off x="658368" y="3383280"/>
+            <a:ext cx="7955280" cy="548640"/>
+          </a:xfrm>
+          <a:prstGeom prst="rect">
+            <a:avLst/>
+          </a:prstGeom>
+          <a:noFill/>
+          <a:ln/>
+        </p:spPr>
+        <p:txBody>
+          <a:bodyPr wrap="square" rtlCol="0" anchor="ctr"/>
+          <a:lstStyle/>
+          <a:p>
+            <a:pPr indent="0" marL="0">
+              <a:buNone/>
+            </a:pPr>
+            <a:r>
+              <a:rPr lang="en-US" sz="1500" dirty="0">
+                <a:solidFill>
+                  <a:srgbClr val="1E293B"/>
+                </a:solidFill>
+                <a:latin typeface="Calibri" pitchFamily="34" charset="0"/>
+                <a:ea typeface="Calibri" pitchFamily="34" charset="-122"/>
+                <a:cs typeface="Calibri" pitchFamily="34" charset="-120"/>
+              </a:rPr>
+              <a:t>🌍  Expanded Database: More cultural food datasets (South Asian, Middle Eastern, East Asian).</a:t>
+            </a:r>
+            <a:endParaRPr lang="en-US" sz="1500" dirty="0"/>
           </a:p>
         </p:txBody>
       </p:sp>
@@ -2053,6 +2565,13 @@
 <file path=ppt/slides/slide11.xml><?xml version="1.0" encoding="utf-8"?>
 <p:sld xmlns:a="http://schemas.openxmlformats.org/drawingml/2006/main" xmlns:r="http://schemas.openxmlformats.org/officeDocument/2006/relationships" xmlns:p="http://schemas.openxmlformats.org/presentationml/2006/main">
   <p:cSld name="Slide 11">
+    <p:bg>
+      <p:bgPr>
+        <a:solidFill>
+          <a:srgbClr val="FFFFFF"/>
+        </a:solidFill>
+      </p:bgPr>
+    </p:bg>
     <p:spTree>
       <p:nvGrpSpPr>
         <p:cNvPr id="1" name=""/>
@@ -2069,14 +2588,34 @@
       </p:grpSpPr>
       <p:sp>
         <p:nvSpPr>
-          <p:cNvPr id="2" name="Text 0"/>
-          <p:cNvSpPr/>
-          <p:nvPr/>
-        </p:nvSpPr>
-        <p:spPr>
-          <a:xfrm>
-            <a:off x="457200" y="1828800"/>
-            <a:ext cx="9144000" cy="914400"/>
+          <p:cNvPr id="2" name="Shape 0"/>
+          <p:cNvSpPr/>
+          <p:nvPr/>
+        </p:nvSpPr>
+        <p:spPr>
+          <a:xfrm>
+            <a:off x="0" y="0"/>
+            <a:ext cx="9144000" cy="109728"/>
+          </a:xfrm>
+          <a:prstGeom prst="rect">
+            <a:avLst/>
+          </a:prstGeom>
+          <a:solidFill>
+            <a:srgbClr val="34D399"/>
+          </a:solidFill>
+          <a:ln/>
+        </p:spPr>
+      </p:sp>
+      <p:sp>
+        <p:nvSpPr>
+          <p:cNvPr id="3" name="Text 1"/>
+          <p:cNvSpPr/>
+          <p:nvPr/>
+        </p:nvSpPr>
+        <p:spPr>
+          <a:xfrm>
+            <a:off x="365760" y="182880"/>
+            <a:ext cx="8229600" cy="640080"/>
           </a:xfrm>
           <a:prstGeom prst="rect">
             <a:avLst/>
@@ -2088,18 +2627,398 @@
           <a:bodyPr wrap="square" rtlCol="0" anchor="ctr"/>
           <a:lstStyle/>
           <a:p>
-            <a:pPr algn="ctr" indent="0" marL="0">
-              <a:buNone/>
-            </a:pPr>
-            <a:r>
-              <a:rPr lang="en-US" sz="4000" b="1" dirty="0">
-                <a:solidFill>
-                  <a:srgbClr val="00A2D9"/>
-                </a:solidFill>
-              </a:rPr>
-              <a:t>THANK YOU</a:t>
-            </a:r>
-            <a:endParaRPr lang="en-US" sz="4000" dirty="0"/>
+            <a:pPr indent="0" marL="0">
+              <a:buNone/>
+            </a:pPr>
+            <a:r>
+              <a:rPr lang="en-US" sz="2600" b="1" dirty="0">
+                <a:solidFill>
+                  <a:srgbClr val="1A73E8"/>
+                </a:solidFill>
+                <a:latin typeface="Calibri" pitchFamily="34" charset="0"/>
+                <a:ea typeface="Calibri" pitchFamily="34" charset="-122"/>
+                <a:cs typeface="Calibri" pitchFamily="34" charset="-120"/>
+              </a:rPr>
+              <a:t>References</a:t>
+            </a:r>
+            <a:endParaRPr lang="en-US" sz="2600" dirty="0"/>
+          </a:p>
+        </p:txBody>
+      </p:sp>
+      <p:sp>
+        <p:nvSpPr>
+          <p:cNvPr id="4" name="Shape 2"/>
+          <p:cNvSpPr/>
+          <p:nvPr/>
+        </p:nvSpPr>
+        <p:spPr>
+          <a:xfrm>
+            <a:off x="365760" y="777240"/>
+            <a:ext cx="8229600" cy="0"/>
+          </a:xfrm>
+          <a:prstGeom prst="line">
+            <a:avLst/>
+          </a:prstGeom>
+          <a:noFill/>
+          <a:ln w="19050">
+            <a:solidFill>
+              <a:srgbClr val="34D399"/>
+            </a:solidFill>
+            <a:prstDash val="solid"/>
+          </a:ln>
+        </p:spPr>
+      </p:sp>
+      <p:sp>
+        <p:nvSpPr>
+          <p:cNvPr id="5" name="Shape 3"/>
+          <p:cNvSpPr/>
+          <p:nvPr/>
+        </p:nvSpPr>
+        <p:spPr>
+          <a:xfrm>
+            <a:off x="365760" y="1078992"/>
+            <a:ext cx="164592" cy="164592"/>
+          </a:xfrm>
+          <a:prstGeom prst="ellipse">
+            <a:avLst/>
+          </a:prstGeom>
+          <a:solidFill>
+            <a:srgbClr val="34D399"/>
+          </a:solidFill>
+          <a:ln/>
+        </p:spPr>
+      </p:sp>
+      <p:sp>
+        <p:nvSpPr>
+          <p:cNvPr id="6" name="Text 4"/>
+          <p:cNvSpPr/>
+          <p:nvPr/>
+        </p:nvSpPr>
+        <p:spPr>
+          <a:xfrm>
+            <a:off x="658368" y="1005840"/>
+            <a:ext cx="7955280" cy="548640"/>
+          </a:xfrm>
+          <a:prstGeom prst="rect">
+            <a:avLst/>
+          </a:prstGeom>
+          <a:noFill/>
+          <a:ln/>
+        </p:spPr>
+        <p:txBody>
+          <a:bodyPr wrap="square" rtlCol="0" anchor="ctr"/>
+          <a:lstStyle/>
+          <a:p>
+            <a:pPr indent="0" marL="0">
+              <a:buNone/>
+            </a:pPr>
+            <a:r>
+              <a:rPr lang="en-US" sz="1500" dirty="0">
+                <a:solidFill>
+                  <a:srgbClr val="1E293B"/>
+                </a:solidFill>
+                <a:latin typeface="Calibri" pitchFamily="34" charset="0"/>
+                <a:ea typeface="Calibri" pitchFamily="34" charset="-122"/>
+                <a:cs typeface="Calibri" pitchFamily="34" charset="-120"/>
+              </a:rPr>
+              <a:t>Mifflin, M. D., et al. (1990). A new predictive equation for resting energy expenditure. The American Journal of Clinical Nutrition.</a:t>
+            </a:r>
+            <a:endParaRPr lang="en-US" sz="1500" dirty="0"/>
+          </a:p>
+        </p:txBody>
+      </p:sp>
+      <p:sp>
+        <p:nvSpPr>
+          <p:cNvPr id="7" name="Shape 5"/>
+          <p:cNvSpPr/>
+          <p:nvPr/>
+        </p:nvSpPr>
+        <p:spPr>
+          <a:xfrm>
+            <a:off x="365760" y="1673352"/>
+            <a:ext cx="164592" cy="164592"/>
+          </a:xfrm>
+          <a:prstGeom prst="ellipse">
+            <a:avLst/>
+          </a:prstGeom>
+          <a:solidFill>
+            <a:srgbClr val="34D399"/>
+          </a:solidFill>
+          <a:ln/>
+        </p:spPr>
+      </p:sp>
+      <p:sp>
+        <p:nvSpPr>
+          <p:cNvPr id="8" name="Text 6"/>
+          <p:cNvSpPr/>
+          <p:nvPr/>
+        </p:nvSpPr>
+        <p:spPr>
+          <a:xfrm>
+            <a:off x="658368" y="1600200"/>
+            <a:ext cx="7955280" cy="548640"/>
+          </a:xfrm>
+          <a:prstGeom prst="rect">
+            <a:avLst/>
+          </a:prstGeom>
+          <a:noFill/>
+          <a:ln/>
+        </p:spPr>
+        <p:txBody>
+          <a:bodyPr wrap="square" rtlCol="0" anchor="ctr"/>
+          <a:lstStyle/>
+          <a:p>
+            <a:pPr indent="0" marL="0">
+              <a:buNone/>
+            </a:pPr>
+            <a:r>
+              <a:rPr lang="en-US" sz="1500" dirty="0">
+                <a:solidFill>
+                  <a:srgbClr val="1E293B"/>
+                </a:solidFill>
+                <a:latin typeface="Calibri" pitchFamily="34" charset="0"/>
+                <a:ea typeface="Calibri" pitchFamily="34" charset="-122"/>
+                <a:cs typeface="Calibri" pitchFamily="34" charset="-120"/>
+              </a:rPr>
+              <a:t>Node.js Foundation. Node.js Documentation. https://nodejs.org/</a:t>
+            </a:r>
+            <a:endParaRPr lang="en-US" sz="1500" dirty="0"/>
+          </a:p>
+        </p:txBody>
+      </p:sp>
+      <p:sp>
+        <p:nvSpPr>
+          <p:cNvPr id="9" name="Shape 7"/>
+          <p:cNvSpPr/>
+          <p:nvPr/>
+        </p:nvSpPr>
+        <p:spPr>
+          <a:xfrm>
+            <a:off x="365760" y="2267712"/>
+            <a:ext cx="164592" cy="164592"/>
+          </a:xfrm>
+          <a:prstGeom prst="ellipse">
+            <a:avLst/>
+          </a:prstGeom>
+          <a:solidFill>
+            <a:srgbClr val="34D399"/>
+          </a:solidFill>
+          <a:ln/>
+        </p:spPr>
+      </p:sp>
+      <p:sp>
+        <p:nvSpPr>
+          <p:cNvPr id="10" name="Text 8"/>
+          <p:cNvSpPr/>
+          <p:nvPr/>
+        </p:nvSpPr>
+        <p:spPr>
+          <a:xfrm>
+            <a:off x="658368" y="2194560"/>
+            <a:ext cx="7955280" cy="548640"/>
+          </a:xfrm>
+          <a:prstGeom prst="rect">
+            <a:avLst/>
+          </a:prstGeom>
+          <a:noFill/>
+          <a:ln/>
+        </p:spPr>
+        <p:txBody>
+          <a:bodyPr wrap="square" rtlCol="0" anchor="ctr"/>
+          <a:lstStyle/>
+          <a:p>
+            <a:pPr indent="0" marL="0">
+              <a:buNone/>
+            </a:pPr>
+            <a:r>
+              <a:rPr lang="en-US" sz="1500" dirty="0">
+                <a:solidFill>
+                  <a:srgbClr val="1E293B"/>
+                </a:solidFill>
+                <a:latin typeface="Calibri" pitchFamily="34" charset="0"/>
+                <a:ea typeface="Calibri" pitchFamily="34" charset="-122"/>
+                <a:cs typeface="Calibri" pitchFamily="34" charset="-120"/>
+              </a:rPr>
+              <a:t>OpenJS Foundation. Express.js Framework. https://expressjs.com/</a:t>
+            </a:r>
+            <a:endParaRPr lang="en-US" sz="1500" dirty="0"/>
+          </a:p>
+        </p:txBody>
+      </p:sp>
+      <p:sp>
+        <p:nvSpPr>
+          <p:cNvPr id="11" name="Shape 9"/>
+          <p:cNvSpPr/>
+          <p:nvPr/>
+        </p:nvSpPr>
+        <p:spPr>
+          <a:xfrm>
+            <a:off x="365760" y="2862072"/>
+            <a:ext cx="164592" cy="164592"/>
+          </a:xfrm>
+          <a:prstGeom prst="ellipse">
+            <a:avLst/>
+          </a:prstGeom>
+          <a:solidFill>
+            <a:srgbClr val="34D399"/>
+          </a:solidFill>
+          <a:ln/>
+        </p:spPr>
+      </p:sp>
+      <p:sp>
+        <p:nvSpPr>
+          <p:cNvPr id="12" name="Text 10"/>
+          <p:cNvSpPr/>
+          <p:nvPr/>
+        </p:nvSpPr>
+        <p:spPr>
+          <a:xfrm>
+            <a:off x="658368" y="2788920"/>
+            <a:ext cx="7955280" cy="548640"/>
+          </a:xfrm>
+          <a:prstGeom prst="rect">
+            <a:avLst/>
+          </a:prstGeom>
+          <a:noFill/>
+          <a:ln/>
+        </p:spPr>
+        <p:txBody>
+          <a:bodyPr wrap="square" rtlCol="0" anchor="ctr"/>
+          <a:lstStyle/>
+          <a:p>
+            <a:pPr indent="0" marL="0">
+              <a:buNone/>
+            </a:pPr>
+            <a:r>
+              <a:rPr lang="en-US" sz="1500" dirty="0">
+                <a:solidFill>
+                  <a:srgbClr val="1E293B"/>
+                </a:solidFill>
+                <a:latin typeface="Calibri" pitchFamily="34" charset="0"/>
+                <a:ea typeface="Calibri" pitchFamily="34" charset="-122"/>
+                <a:cs typeface="Calibri" pitchFamily="34" charset="-120"/>
+              </a:rPr>
+              <a:t>JSON Web Tokens Standard. https://jwt.io/</a:t>
+            </a:r>
+            <a:endParaRPr lang="en-US" sz="1500" dirty="0"/>
+          </a:p>
+        </p:txBody>
+      </p:sp>
+      <p:sp>
+        <p:nvSpPr>
+          <p:cNvPr id="13" name="Shape 11"/>
+          <p:cNvSpPr/>
+          <p:nvPr/>
+        </p:nvSpPr>
+        <p:spPr>
+          <a:xfrm>
+            <a:off x="365760" y="3456432"/>
+            <a:ext cx="164592" cy="164592"/>
+          </a:xfrm>
+          <a:prstGeom prst="ellipse">
+            <a:avLst/>
+          </a:prstGeom>
+          <a:solidFill>
+            <a:srgbClr val="34D399"/>
+          </a:solidFill>
+          <a:ln/>
+        </p:spPr>
+      </p:sp>
+      <p:sp>
+        <p:nvSpPr>
+          <p:cNvPr id="14" name="Text 12"/>
+          <p:cNvSpPr/>
+          <p:nvPr/>
+        </p:nvSpPr>
+        <p:spPr>
+          <a:xfrm>
+            <a:off x="658368" y="3383280"/>
+            <a:ext cx="7955280" cy="548640"/>
+          </a:xfrm>
+          <a:prstGeom prst="rect">
+            <a:avLst/>
+          </a:prstGeom>
+          <a:noFill/>
+          <a:ln/>
+        </p:spPr>
+        <p:txBody>
+          <a:bodyPr wrap="square" rtlCol="0" anchor="ctr"/>
+          <a:lstStyle/>
+          <a:p>
+            <a:pPr indent="0" marL="0">
+              <a:buNone/>
+            </a:pPr>
+            <a:r>
+              <a:rPr lang="en-US" sz="1500" dirty="0">
+                <a:solidFill>
+                  <a:srgbClr val="1E293B"/>
+                </a:solidFill>
+                <a:latin typeface="Calibri" pitchFamily="34" charset="0"/>
+                <a:ea typeface="Calibri" pitchFamily="34" charset="-122"/>
+                <a:cs typeface="Calibri" pitchFamily="34" charset="-120"/>
+              </a:rPr>
+              <a:t>Vercel Inc. Vercel Deployment Platform. https://vercel.com/</a:t>
+            </a:r>
+            <a:endParaRPr lang="en-US" sz="1500" dirty="0"/>
+          </a:p>
+        </p:txBody>
+      </p:sp>
+      <p:sp>
+        <p:nvSpPr>
+          <p:cNvPr id="15" name="Shape 13"/>
+          <p:cNvSpPr/>
+          <p:nvPr/>
+        </p:nvSpPr>
+        <p:spPr>
+          <a:xfrm>
+            <a:off x="365760" y="4050792"/>
+            <a:ext cx="164592" cy="164592"/>
+          </a:xfrm>
+          <a:prstGeom prst="ellipse">
+            <a:avLst/>
+          </a:prstGeom>
+          <a:solidFill>
+            <a:srgbClr val="34D399"/>
+          </a:solidFill>
+          <a:ln/>
+        </p:spPr>
+      </p:sp>
+      <p:sp>
+        <p:nvSpPr>
+          <p:cNvPr id="16" name="Text 14"/>
+          <p:cNvSpPr/>
+          <p:nvPr/>
+        </p:nvSpPr>
+        <p:spPr>
+          <a:xfrm>
+            <a:off x="658368" y="3977640"/>
+            <a:ext cx="7955280" cy="548640"/>
+          </a:xfrm>
+          <a:prstGeom prst="rect">
+            <a:avLst/>
+          </a:prstGeom>
+          <a:noFill/>
+          <a:ln/>
+        </p:spPr>
+        <p:txBody>
+          <a:bodyPr wrap="square" rtlCol="0" anchor="ctr"/>
+          <a:lstStyle/>
+          <a:p>
+            <a:pPr indent="0" marL="0">
+              <a:buNone/>
+            </a:pPr>
+            <a:r>
+              <a:rPr lang="en-US" sz="1500" dirty="0">
+                <a:solidFill>
+                  <a:srgbClr val="1E293B"/>
+                </a:solidFill>
+                <a:latin typeface="Calibri" pitchFamily="34" charset="0"/>
+                <a:ea typeface="Calibri" pitchFamily="34" charset="-122"/>
+                <a:cs typeface="Calibri" pitchFamily="34" charset="-120"/>
+              </a:rPr>
+              <a:t>pptxgenjs Library. https://gitbrent.github.io/PptxGenJS/</a:t>
+            </a:r>
+            <a:endParaRPr lang="en-US" sz="1500" dirty="0"/>
           </a:p>
         </p:txBody>
       </p:sp>
@@ -2111,9 +3030,9 @@
 </p:sld>
 </file>
 
-<file path=ppt/slides/slide2.xml><?xml version="1.0" encoding="utf-8"?>
+<file path=ppt/slides/slide12.xml><?xml version="1.0" encoding="utf-8"?>
 <p:sld xmlns:a="http://schemas.openxmlformats.org/drawingml/2006/main" xmlns:r="http://schemas.openxmlformats.org/officeDocument/2006/relationships" xmlns:p="http://schemas.openxmlformats.org/presentationml/2006/main">
-  <p:cSld name="Slide 2">
+  <p:cSld name="Slide 12">
     <p:spTree>
       <p:nvGrpSpPr>
         <p:cNvPr id="1" name=""/>
@@ -2130,13 +3049,112 @@
       </p:grpSpPr>
       <p:sp>
         <p:nvSpPr>
-          <p:cNvPr id="2" name="Text 0"/>
-          <p:cNvSpPr/>
-          <p:nvPr/>
-        </p:nvSpPr>
-        <p:spPr>
-          <a:xfrm>
-            <a:off x="457200" y="457200"/>
+          <p:cNvPr id="2" name="Shape 0"/>
+          <p:cNvSpPr/>
+          <p:nvPr/>
+        </p:nvSpPr>
+        <p:spPr>
+          <a:xfrm>
+            <a:off x="0" y="0"/>
+            <a:ext cx="9144000" cy="5143500"/>
+          </a:xfrm>
+          <a:prstGeom prst="rect">
+            <a:avLst/>
+          </a:prstGeom>
+          <a:solidFill>
+            <a:srgbClr val="0F172A"/>
+          </a:solidFill>
+          <a:ln/>
+        </p:spPr>
+      </p:sp>
+      <p:sp>
+        <p:nvSpPr>
+          <p:cNvPr id="3" name="Shape 1"/>
+          <p:cNvSpPr/>
+          <p:nvPr/>
+        </p:nvSpPr>
+        <p:spPr>
+          <a:xfrm>
+            <a:off x="0" y="0"/>
+            <a:ext cx="9144000" cy="164592"/>
+          </a:xfrm>
+          <a:prstGeom prst="rect">
+            <a:avLst/>
+          </a:prstGeom>
+          <a:solidFill>
+            <a:srgbClr val="34D399"/>
+          </a:solidFill>
+          <a:ln/>
+        </p:spPr>
+      </p:sp>
+      <p:sp>
+        <p:nvSpPr>
+          <p:cNvPr id="4" name="Shape 2"/>
+          <p:cNvSpPr/>
+          <p:nvPr/>
+        </p:nvSpPr>
+        <p:spPr>
+          <a:xfrm>
+            <a:off x="0" y="0"/>
+            <a:ext cx="164592" cy="5143500"/>
+          </a:xfrm>
+          <a:prstGeom prst="rect">
+            <a:avLst/>
+          </a:prstGeom>
+          <a:solidFill>
+            <a:srgbClr val="1A73E8"/>
+          </a:solidFill>
+          <a:ln/>
+        </p:spPr>
+      </p:sp>
+      <p:sp>
+        <p:nvSpPr>
+          <p:cNvPr id="5" name="Text 3"/>
+          <p:cNvSpPr/>
+          <p:nvPr/>
+        </p:nvSpPr>
+        <p:spPr>
+          <a:xfrm>
+            <a:off x="457200" y="1280160"/>
+            <a:ext cx="8229600" cy="1097280"/>
+          </a:xfrm>
+          <a:prstGeom prst="rect">
+            <a:avLst/>
+          </a:prstGeom>
+          <a:noFill/>
+          <a:ln/>
+        </p:spPr>
+        <p:txBody>
+          <a:bodyPr wrap="square" rtlCol="0" anchor="ctr"/>
+          <a:lstStyle/>
+          <a:p>
+            <a:pPr algn="ctr" indent="0" marL="0">
+              <a:buNone/>
+            </a:pPr>
+            <a:r>
+              <a:rPr lang="en-US" sz="5400" b="1" dirty="0">
+                <a:solidFill>
+                  <a:srgbClr val="FFFFFF"/>
+                </a:solidFill>
+                <a:latin typeface="Calibri" pitchFamily="34" charset="0"/>
+                <a:ea typeface="Calibri" pitchFamily="34" charset="-122"/>
+                <a:cs typeface="Calibri" pitchFamily="34" charset="-120"/>
+              </a:rPr>
+              <a:t>Thank You!</a:t>
+            </a:r>
+            <a:endParaRPr lang="en-US" sz="5400" dirty="0"/>
+          </a:p>
+        </p:txBody>
+      </p:sp>
+      <p:sp>
+        <p:nvSpPr>
+          <p:cNvPr id="6" name="Text 4"/>
+          <p:cNvSpPr/>
+          <p:nvPr/>
+        </p:nvSpPr>
+        <p:spPr>
+          <a:xfrm>
+            <a:off x="457200" y="2468880"/>
             <a:ext cx="8229600" cy="457200"/>
           </a:xfrm>
           <a:prstGeom prst="rect">
@@ -2149,31 +3167,34 @@
           <a:bodyPr wrap="square" rtlCol="0" anchor="ctr"/>
           <a:lstStyle/>
           <a:p>
-            <a:pPr indent="0" marL="0">
-              <a:buNone/>
-            </a:pPr>
-            <a:r>
-              <a:rPr lang="en-US" sz="2400" b="1" dirty="0">
-                <a:solidFill>
-                  <a:srgbClr val="00A2D9"/>
-                </a:solidFill>
-              </a:rPr>
-              <a:t>INTRODUCTION</a:t>
-            </a:r>
-            <a:endParaRPr lang="en-US" sz="2400" dirty="0"/>
-          </a:p>
-        </p:txBody>
-      </p:sp>
-      <p:sp>
-        <p:nvSpPr>
-          <p:cNvPr id="3" name="Text 1"/>
-          <p:cNvSpPr/>
-          <p:nvPr/>
-        </p:nvSpPr>
-        <p:spPr>
-          <a:xfrm>
-            <a:off x="457200" y="1371600"/>
-            <a:ext cx="8229600" cy="3200400"/>
+            <a:pPr algn="ctr" indent="0" marL="0">
+              <a:buNone/>
+            </a:pPr>
+            <a:r>
+              <a:rPr lang="en-US" sz="2000" i="1" dirty="0">
+                <a:solidFill>
+                  <a:srgbClr val="34D399"/>
+                </a:solidFill>
+                <a:latin typeface="Calibri" pitchFamily="34" charset="0"/>
+                <a:ea typeface="Calibri" pitchFamily="34" charset="-122"/>
+                <a:cs typeface="Calibri" pitchFamily="34" charset="-120"/>
+              </a:rPr>
+              <a:t>Questions &amp; Feedback Welcome</a:t>
+            </a:r>
+            <a:endParaRPr lang="en-US" sz="2000" dirty="0"/>
+          </a:p>
+        </p:txBody>
+      </p:sp>
+      <p:sp>
+        <p:nvSpPr>
+          <p:cNvPr id="7" name="Text 5"/>
+          <p:cNvSpPr/>
+          <p:nvPr/>
+        </p:nvSpPr>
+        <p:spPr>
+          <a:xfrm>
+            <a:off x="1371600" y="3200400"/>
+            <a:ext cx="6400800" cy="822960"/>
           </a:xfrm>
           <a:prstGeom prst="rect">
             <a:avLst/>
@@ -2185,79 +3206,38 @@
           <a:bodyPr wrap="square" rtlCol="0" anchor="ctr"/>
           <a:lstStyle/>
           <a:p>
-            <a:pPr marL="342900" indent="-342900">
-              <a:buSzPct val="100000"/>
-              <a:buChar char="•"/>
-            </a:pPr>
-            <a:r>
-              <a:rPr lang="en-US" sz="1800" b="1" dirty="0">
-                <a:solidFill>
-                  <a:srgbClr val="000000"/>
-                </a:solidFill>
-              </a:rPr>
-              <a:t>What is it?
-</a:t>
-            </a:r>
-            <a:pPr indent="0" marL="0">
-              <a:buNone/>
-            </a:pPr>
-            <a:r>
-              <a:rPr lang="en-US" sz="1800" dirty="0">
-                <a:solidFill>
-                  <a:srgbClr val="000000"/>
-                </a:solidFill>
-              </a:rPr>
-              <a:t>A comprehensive web application that generates personalized workout routines and meal plans.
-</a:t>
-            </a:r>
-            <a:pPr indent="0" marL="0">
-              <a:buNone/>
-            </a:pPr>
-            <a:r>
-              <a:rPr lang="en-US" sz="1800" b="1" dirty="0">
-                <a:solidFill>
-                  <a:srgbClr val="000000"/>
-                </a:solidFill>
-              </a:rPr>
-              <a:t>Core Philosophy:
-</a:t>
-            </a:r>
-            <a:pPr indent="0" marL="0">
-              <a:buNone/>
-            </a:pPr>
-            <a:r>
-              <a:rPr lang="en-US" sz="1800" dirty="0">
-                <a:solidFill>
-                  <a:srgbClr val="000000"/>
-                </a:solidFill>
-              </a:rPr>
-              <a:t>Fitness planning tailored to individual body metrics, fitness goals, and preferences.
-</a:t>
-            </a:r>
-            <a:pPr indent="0" marL="0">
-              <a:buNone/>
-            </a:pPr>
-            <a:r>
-              <a:rPr lang="en-US" sz="1800" b="1" dirty="0">
-                <a:solidFill>
-                  <a:srgbClr val="000000"/>
-                </a:solidFill>
-              </a:rPr>
-              <a:t>Key Differentiator:
-</a:t>
-            </a:r>
-            <a:pPr indent="0" marL="0">
-              <a:buNone/>
-            </a:pPr>
-            <a:r>
-              <a:rPr lang="en-US" sz="1800" dirty="0">
-                <a:solidFill>
-                  <a:srgbClr val="000000"/>
-                </a:solidFill>
-              </a:rPr>
-              <a:t>Powered by a built-in AI engine running entirely on the server without requiring external paid APIs.</a:t>
-            </a:r>
-            <a:endParaRPr lang="en-US" sz="1800" dirty="0"/>
+            <a:pPr algn="ctr" indent="0" marL="0">
+              <a:buNone/>
+            </a:pPr>
+            <a:r>
+              <a:rPr lang="en-US" sz="1400" dirty="0">
+                <a:solidFill>
+                  <a:srgbClr val="94A3B8"/>
+                </a:solidFill>
+                <a:latin typeface="Calibri" pitchFamily="34" charset="0"/>
+                <a:ea typeface="Calibri" pitchFamily="34" charset="-122"/>
+                <a:cs typeface="Calibri" pitchFamily="34" charset="-120"/>
+              </a:rPr>
+              <a:t>🌐  https://fitness-seven-sand.vercel.app</a:t>
+            </a:r>
+            <a:endParaRPr lang="en-US" sz="1400" dirty="0"/>
+          </a:p>
+          <a:p>
+            <a:pPr algn="ctr" indent="0" marL="0">
+              <a:buNone/>
+            </a:pPr>
+            <a:r>
+              <a:rPr lang="en-US" sz="1400" dirty="0">
+                <a:solidFill>
+                  <a:srgbClr val="94A3B8"/>
+                </a:solidFill>
+                <a:latin typeface="Calibri" pitchFamily="34" charset="0"/>
+                <a:ea typeface="Calibri" pitchFamily="34" charset="-122"/>
+                <a:cs typeface="Calibri" pitchFamily="34" charset="-120"/>
+              </a:rPr>
+              <a:t>📦  github.com/adityadhanrajpathak/fitness-planner-ai</a:t>
+            </a:r>
+            <a:endParaRPr lang="en-US" sz="1400" dirty="0"/>
           </a:p>
         </p:txBody>
       </p:sp>
@@ -2269,9 +3249,16 @@
 </p:sld>
 </file>
 
-<file path=ppt/slides/slide3.xml><?xml version="1.0" encoding="utf-8"?>
+<file path=ppt/slides/slide2.xml><?xml version="1.0" encoding="utf-8"?>
 <p:sld xmlns:a="http://schemas.openxmlformats.org/drawingml/2006/main" xmlns:r="http://schemas.openxmlformats.org/officeDocument/2006/relationships" xmlns:p="http://schemas.openxmlformats.org/presentationml/2006/main">
-  <p:cSld name="Slide 3">
+  <p:cSld name="Slide 2">
+    <p:bg>
+      <p:bgPr>
+        <a:solidFill>
+          <a:srgbClr val="F0F9FF"/>
+        </a:solidFill>
+      </p:bgPr>
+    </p:bg>
     <p:spTree>
       <p:nvGrpSpPr>
         <p:cNvPr id="1" name=""/>
@@ -2288,14 +3275,34 @@
       </p:grpSpPr>
       <p:sp>
         <p:nvSpPr>
-          <p:cNvPr id="2" name="Text 0"/>
-          <p:cNvSpPr/>
-          <p:nvPr/>
-        </p:nvSpPr>
-        <p:spPr>
-          <a:xfrm>
-            <a:off x="457200" y="457200"/>
-            <a:ext cx="8229600" cy="457200"/>
+          <p:cNvPr id="2" name="Shape 0"/>
+          <p:cNvSpPr/>
+          <p:nvPr/>
+        </p:nvSpPr>
+        <p:spPr>
+          <a:xfrm>
+            <a:off x="0" y="0"/>
+            <a:ext cx="9144000" cy="109728"/>
+          </a:xfrm>
+          <a:prstGeom prst="rect">
+            <a:avLst/>
+          </a:prstGeom>
+          <a:solidFill>
+            <a:srgbClr val="34D399"/>
+          </a:solidFill>
+          <a:ln/>
+        </p:spPr>
+      </p:sp>
+      <p:sp>
+        <p:nvSpPr>
+          <p:cNvPr id="3" name="Text 1"/>
+          <p:cNvSpPr/>
+          <p:nvPr/>
+        </p:nvSpPr>
+        <p:spPr>
+          <a:xfrm>
+            <a:off x="365760" y="182880"/>
+            <a:ext cx="8229600" cy="640080"/>
           </a:xfrm>
           <a:prstGeom prst="rect">
             <a:avLst/>
@@ -2311,27 +3318,73 @@
               <a:buNone/>
             </a:pPr>
             <a:r>
-              <a:rPr lang="en-US" sz="2400" b="1" dirty="0">
-                <a:solidFill>
-                  <a:srgbClr val="00A2D9"/>
-                </a:solidFill>
-              </a:rPr>
-              <a:t>PROBLEM STATEMENT</a:t>
-            </a:r>
-            <a:endParaRPr lang="en-US" sz="2400" dirty="0"/>
-          </a:p>
-        </p:txBody>
-      </p:sp>
-      <p:sp>
-        <p:nvSpPr>
-          <p:cNvPr id="3" name="Text 1"/>
-          <p:cNvSpPr/>
-          <p:nvPr/>
-        </p:nvSpPr>
-        <p:spPr>
-          <a:xfrm>
-            <a:off x="457200" y="1371600"/>
-            <a:ext cx="8229600" cy="3200400"/>
+              <a:rPr lang="en-US" sz="2600" b="1" dirty="0">
+                <a:solidFill>
+                  <a:srgbClr val="1A73E8"/>
+                </a:solidFill>
+                <a:latin typeface="Calibri" pitchFamily="34" charset="0"/>
+                <a:ea typeface="Calibri" pitchFamily="34" charset="-122"/>
+                <a:cs typeface="Calibri" pitchFamily="34" charset="-120"/>
+              </a:rPr>
+              <a:t>Outline</a:t>
+            </a:r>
+            <a:endParaRPr lang="en-US" sz="2600" dirty="0"/>
+          </a:p>
+        </p:txBody>
+      </p:sp>
+      <p:sp>
+        <p:nvSpPr>
+          <p:cNvPr id="4" name="Shape 2"/>
+          <p:cNvSpPr/>
+          <p:nvPr/>
+        </p:nvSpPr>
+        <p:spPr>
+          <a:xfrm>
+            <a:off x="365760" y="777240"/>
+            <a:ext cx="8229600" cy="0"/>
+          </a:xfrm>
+          <a:prstGeom prst="line">
+            <a:avLst/>
+          </a:prstGeom>
+          <a:noFill/>
+          <a:ln w="19050">
+            <a:solidFill>
+              <a:srgbClr val="34D399"/>
+            </a:solidFill>
+            <a:prstDash val="solid"/>
+          </a:ln>
+        </p:spPr>
+      </p:sp>
+      <p:sp>
+        <p:nvSpPr>
+          <p:cNvPr id="5" name="Shape 3"/>
+          <p:cNvSpPr/>
+          <p:nvPr/>
+        </p:nvSpPr>
+        <p:spPr>
+          <a:xfrm>
+            <a:off x="365760" y="1078992"/>
+            <a:ext cx="164592" cy="164592"/>
+          </a:xfrm>
+          <a:prstGeom prst="ellipse">
+            <a:avLst/>
+          </a:prstGeom>
+          <a:solidFill>
+            <a:srgbClr val="34D399"/>
+          </a:solidFill>
+          <a:ln/>
+        </p:spPr>
+      </p:sp>
+      <p:sp>
+        <p:nvSpPr>
+          <p:cNvPr id="6" name="Text 4"/>
+          <p:cNvSpPr/>
+          <p:nvPr/>
+        </p:nvSpPr>
+        <p:spPr>
+          <a:xfrm>
+            <a:off x="658368" y="1005840"/>
+            <a:ext cx="7955280" cy="548640"/>
           </a:xfrm>
           <a:prstGeom prst="rect">
             <a:avLst/>
@@ -2343,43 +3396,375 @@
           <a:bodyPr wrap="square" rtlCol="0" anchor="ctr"/>
           <a:lstStyle/>
           <a:p>
-            <a:pPr marL="342900" indent="-342900">
-              <a:buSzPct val="100000"/>
-              <a:buChar char="•"/>
-            </a:pPr>
-            <a:r>
-              <a:rPr lang="en-US" sz="1800" dirty="0">
-                <a:solidFill>
-                  <a:srgbClr val="000000"/>
-                </a:solidFill>
-              </a:rPr>
-              <a:t>Generic Advice: Most fitness apps offer generic routines that don't account for individual body metrics or dietary constraints.
-</a:t>
-            </a:r>
-            <a:pPr indent="0" marL="0">
-              <a:buNone/>
-            </a:pPr>
-            <a:r>
-              <a:rPr lang="en-US" sz="1800" dirty="0">
-                <a:solidFill>
-                  <a:srgbClr val="000000"/>
-                </a:solidFill>
-              </a:rPr>
-              <a:t>Cost Barriers: Premium fitness coaching and specialized dietitians are expensive.
-</a:t>
-            </a:r>
-            <a:pPr indent="0" marL="0">
-              <a:buNone/>
-            </a:pPr>
-            <a:r>
-              <a:rPr lang="en-US" sz="1800" dirty="0">
-                <a:solidFill>
-                  <a:srgbClr val="000000"/>
-                </a:solidFill>
-              </a:rPr>
-              <a:t>Data Privacy: Many health apps share sensitive body metric data with third-party APIs.</a:t>
-            </a:r>
-            <a:endParaRPr lang="en-US" sz="1800" dirty="0"/>
+            <a:pPr indent="0" marL="0">
+              <a:buNone/>
+            </a:pPr>
+            <a:r>
+              <a:rPr lang="en-US" sz="1500" dirty="0">
+                <a:solidFill>
+                  <a:srgbClr val="1E293B"/>
+                </a:solidFill>
+                <a:latin typeface="Calibri" pitchFamily="34" charset="0"/>
+                <a:ea typeface="Calibri" pitchFamily="34" charset="-122"/>
+                <a:cs typeface="Calibri" pitchFamily="34" charset="-120"/>
+              </a:rPr>
+              <a:t>1.  Problem Statement</a:t>
+            </a:r>
+            <a:endParaRPr lang="en-US" sz="1500" dirty="0"/>
+          </a:p>
+        </p:txBody>
+      </p:sp>
+      <p:sp>
+        <p:nvSpPr>
+          <p:cNvPr id="7" name="Shape 5"/>
+          <p:cNvSpPr/>
+          <p:nvPr/>
+        </p:nvSpPr>
+        <p:spPr>
+          <a:xfrm>
+            <a:off x="365760" y="1673352"/>
+            <a:ext cx="164592" cy="164592"/>
+          </a:xfrm>
+          <a:prstGeom prst="ellipse">
+            <a:avLst/>
+          </a:prstGeom>
+          <a:solidFill>
+            <a:srgbClr val="34D399"/>
+          </a:solidFill>
+          <a:ln/>
+        </p:spPr>
+      </p:sp>
+      <p:sp>
+        <p:nvSpPr>
+          <p:cNvPr id="8" name="Text 6"/>
+          <p:cNvSpPr/>
+          <p:nvPr/>
+        </p:nvSpPr>
+        <p:spPr>
+          <a:xfrm>
+            <a:off x="658368" y="1600200"/>
+            <a:ext cx="7955280" cy="548640"/>
+          </a:xfrm>
+          <a:prstGeom prst="rect">
+            <a:avLst/>
+          </a:prstGeom>
+          <a:noFill/>
+          <a:ln/>
+        </p:spPr>
+        <p:txBody>
+          <a:bodyPr wrap="square" rtlCol="0" anchor="ctr"/>
+          <a:lstStyle/>
+          <a:p>
+            <a:pPr indent="0" marL="0">
+              <a:buNone/>
+            </a:pPr>
+            <a:r>
+              <a:rPr lang="en-US" sz="1500" dirty="0">
+                <a:solidFill>
+                  <a:srgbClr val="1E293B"/>
+                </a:solidFill>
+                <a:latin typeface="Calibri" pitchFamily="34" charset="0"/>
+                <a:ea typeface="Calibri" pitchFamily="34" charset="-122"/>
+                <a:cs typeface="Calibri" pitchFamily="34" charset="-120"/>
+              </a:rPr>
+              <a:t>2.  Proposed Solution</a:t>
+            </a:r>
+            <a:endParaRPr lang="en-US" sz="1500" dirty="0"/>
+          </a:p>
+        </p:txBody>
+      </p:sp>
+      <p:sp>
+        <p:nvSpPr>
+          <p:cNvPr id="9" name="Shape 7"/>
+          <p:cNvSpPr/>
+          <p:nvPr/>
+        </p:nvSpPr>
+        <p:spPr>
+          <a:xfrm>
+            <a:off x="365760" y="2267712"/>
+            <a:ext cx="164592" cy="164592"/>
+          </a:xfrm>
+          <a:prstGeom prst="ellipse">
+            <a:avLst/>
+          </a:prstGeom>
+          <a:solidFill>
+            <a:srgbClr val="34D399"/>
+          </a:solidFill>
+          <a:ln/>
+        </p:spPr>
+      </p:sp>
+      <p:sp>
+        <p:nvSpPr>
+          <p:cNvPr id="10" name="Text 8"/>
+          <p:cNvSpPr/>
+          <p:nvPr/>
+        </p:nvSpPr>
+        <p:spPr>
+          <a:xfrm>
+            <a:off x="658368" y="2194560"/>
+            <a:ext cx="7955280" cy="548640"/>
+          </a:xfrm>
+          <a:prstGeom prst="rect">
+            <a:avLst/>
+          </a:prstGeom>
+          <a:noFill/>
+          <a:ln/>
+        </p:spPr>
+        <p:txBody>
+          <a:bodyPr wrap="square" rtlCol="0" anchor="ctr"/>
+          <a:lstStyle/>
+          <a:p>
+            <a:pPr indent="0" marL="0">
+              <a:buNone/>
+            </a:pPr>
+            <a:r>
+              <a:rPr lang="en-US" sz="1500" dirty="0">
+                <a:solidFill>
+                  <a:srgbClr val="1E293B"/>
+                </a:solidFill>
+                <a:latin typeface="Calibri" pitchFamily="34" charset="0"/>
+                <a:ea typeface="Calibri" pitchFamily="34" charset="-122"/>
+                <a:cs typeface="Calibri" pitchFamily="34" charset="-120"/>
+              </a:rPr>
+              <a:t>3.  System Architecture &amp; Tech Stack</a:t>
+            </a:r>
+            <a:endParaRPr lang="en-US" sz="1500" dirty="0"/>
+          </a:p>
+        </p:txBody>
+      </p:sp>
+      <p:sp>
+        <p:nvSpPr>
+          <p:cNvPr id="11" name="Shape 9"/>
+          <p:cNvSpPr/>
+          <p:nvPr/>
+        </p:nvSpPr>
+        <p:spPr>
+          <a:xfrm>
+            <a:off x="365760" y="2862072"/>
+            <a:ext cx="164592" cy="164592"/>
+          </a:xfrm>
+          <a:prstGeom prst="ellipse">
+            <a:avLst/>
+          </a:prstGeom>
+          <a:solidFill>
+            <a:srgbClr val="34D399"/>
+          </a:solidFill>
+          <a:ln/>
+        </p:spPr>
+      </p:sp>
+      <p:sp>
+        <p:nvSpPr>
+          <p:cNvPr id="12" name="Text 10"/>
+          <p:cNvSpPr/>
+          <p:nvPr/>
+        </p:nvSpPr>
+        <p:spPr>
+          <a:xfrm>
+            <a:off x="658368" y="2788920"/>
+            <a:ext cx="7955280" cy="548640"/>
+          </a:xfrm>
+          <a:prstGeom prst="rect">
+            <a:avLst/>
+          </a:prstGeom>
+          <a:noFill/>
+          <a:ln/>
+        </p:spPr>
+        <p:txBody>
+          <a:bodyPr wrap="square" rtlCol="0" anchor="ctr"/>
+          <a:lstStyle/>
+          <a:p>
+            <a:pPr indent="0" marL="0">
+              <a:buNone/>
+            </a:pPr>
+            <a:r>
+              <a:rPr lang="en-US" sz="1500" dirty="0">
+                <a:solidFill>
+                  <a:srgbClr val="1E293B"/>
+                </a:solidFill>
+                <a:latin typeface="Calibri" pitchFamily="34" charset="0"/>
+                <a:ea typeface="Calibri" pitchFamily="34" charset="-122"/>
+                <a:cs typeface="Calibri" pitchFamily="34" charset="-120"/>
+              </a:rPr>
+              <a:t>4.  Algorithm &amp; Deployment</a:t>
+            </a:r>
+            <a:endParaRPr lang="en-US" sz="1500" dirty="0"/>
+          </a:p>
+        </p:txBody>
+      </p:sp>
+      <p:sp>
+        <p:nvSpPr>
+          <p:cNvPr id="13" name="Shape 11"/>
+          <p:cNvSpPr/>
+          <p:nvPr/>
+        </p:nvSpPr>
+        <p:spPr>
+          <a:xfrm>
+            <a:off x="365760" y="3456432"/>
+            <a:ext cx="164592" cy="164592"/>
+          </a:xfrm>
+          <a:prstGeom prst="ellipse">
+            <a:avLst/>
+          </a:prstGeom>
+          <a:solidFill>
+            <a:srgbClr val="34D399"/>
+          </a:solidFill>
+          <a:ln/>
+        </p:spPr>
+      </p:sp>
+      <p:sp>
+        <p:nvSpPr>
+          <p:cNvPr id="14" name="Text 12"/>
+          <p:cNvSpPr/>
+          <p:nvPr/>
+        </p:nvSpPr>
+        <p:spPr>
+          <a:xfrm>
+            <a:off x="658368" y="3383280"/>
+            <a:ext cx="7955280" cy="548640"/>
+          </a:xfrm>
+          <a:prstGeom prst="rect">
+            <a:avLst/>
+          </a:prstGeom>
+          <a:noFill/>
+          <a:ln/>
+        </p:spPr>
+        <p:txBody>
+          <a:bodyPr wrap="square" rtlCol="0" anchor="ctr"/>
+          <a:lstStyle/>
+          <a:p>
+            <a:pPr indent="0" marL="0">
+              <a:buNone/>
+            </a:pPr>
+            <a:r>
+              <a:rPr lang="en-US" sz="1500" dirty="0">
+                <a:solidFill>
+                  <a:srgbClr val="1E293B"/>
+                </a:solidFill>
+                <a:latin typeface="Calibri" pitchFamily="34" charset="0"/>
+                <a:ea typeface="Calibri" pitchFamily="34" charset="-122"/>
+                <a:cs typeface="Calibri" pitchFamily="34" charset="-120"/>
+              </a:rPr>
+              <a:t>5.  Key Features &amp; Results</a:t>
+            </a:r>
+            <a:endParaRPr lang="en-US" sz="1500" dirty="0"/>
+          </a:p>
+        </p:txBody>
+      </p:sp>
+      <p:sp>
+        <p:nvSpPr>
+          <p:cNvPr id="15" name="Shape 13"/>
+          <p:cNvSpPr/>
+          <p:nvPr/>
+        </p:nvSpPr>
+        <p:spPr>
+          <a:xfrm>
+            <a:off x="365760" y="4050792"/>
+            <a:ext cx="164592" cy="164592"/>
+          </a:xfrm>
+          <a:prstGeom prst="ellipse">
+            <a:avLst/>
+          </a:prstGeom>
+          <a:solidFill>
+            <a:srgbClr val="34D399"/>
+          </a:solidFill>
+          <a:ln/>
+        </p:spPr>
+      </p:sp>
+      <p:sp>
+        <p:nvSpPr>
+          <p:cNvPr id="16" name="Text 14"/>
+          <p:cNvSpPr/>
+          <p:nvPr/>
+        </p:nvSpPr>
+        <p:spPr>
+          <a:xfrm>
+            <a:off x="658368" y="3977640"/>
+            <a:ext cx="7955280" cy="548640"/>
+          </a:xfrm>
+          <a:prstGeom prst="rect">
+            <a:avLst/>
+          </a:prstGeom>
+          <a:noFill/>
+          <a:ln/>
+        </p:spPr>
+        <p:txBody>
+          <a:bodyPr wrap="square" rtlCol="0" anchor="ctr"/>
+          <a:lstStyle/>
+          <a:p>
+            <a:pPr indent="0" marL="0">
+              <a:buNone/>
+            </a:pPr>
+            <a:r>
+              <a:rPr lang="en-US" sz="1500" dirty="0">
+                <a:solidFill>
+                  <a:srgbClr val="1E293B"/>
+                </a:solidFill>
+                <a:latin typeface="Calibri" pitchFamily="34" charset="0"/>
+                <a:ea typeface="Calibri" pitchFamily="34" charset="-122"/>
+                <a:cs typeface="Calibri" pitchFamily="34" charset="-120"/>
+              </a:rPr>
+              <a:t>6.  Conclusion &amp; Future Scope</a:t>
+            </a:r>
+            <a:endParaRPr lang="en-US" sz="1500" dirty="0"/>
+          </a:p>
+        </p:txBody>
+      </p:sp>
+      <p:sp>
+        <p:nvSpPr>
+          <p:cNvPr id="17" name="Shape 15"/>
+          <p:cNvSpPr/>
+          <p:nvPr/>
+        </p:nvSpPr>
+        <p:spPr>
+          <a:xfrm>
+            <a:off x="365760" y="4645152"/>
+            <a:ext cx="164592" cy="164592"/>
+          </a:xfrm>
+          <a:prstGeom prst="ellipse">
+            <a:avLst/>
+          </a:prstGeom>
+          <a:solidFill>
+            <a:srgbClr val="34D399"/>
+          </a:solidFill>
+          <a:ln/>
+        </p:spPr>
+      </p:sp>
+      <p:sp>
+        <p:nvSpPr>
+          <p:cNvPr id="18" name="Text 16"/>
+          <p:cNvSpPr/>
+          <p:nvPr/>
+        </p:nvSpPr>
+        <p:spPr>
+          <a:xfrm>
+            <a:off x="658368" y="4572000"/>
+            <a:ext cx="7955280" cy="548640"/>
+          </a:xfrm>
+          <a:prstGeom prst="rect">
+            <a:avLst/>
+          </a:prstGeom>
+          <a:noFill/>
+          <a:ln/>
+        </p:spPr>
+        <p:txBody>
+          <a:bodyPr wrap="square" rtlCol="0" anchor="ctr"/>
+          <a:lstStyle/>
+          <a:p>
+            <a:pPr indent="0" marL="0">
+              <a:buNone/>
+            </a:pPr>
+            <a:r>
+              <a:rPr lang="en-US" sz="1500" dirty="0">
+                <a:solidFill>
+                  <a:srgbClr val="1E293B"/>
+                </a:solidFill>
+                <a:latin typeface="Calibri" pitchFamily="34" charset="0"/>
+                <a:ea typeface="Calibri" pitchFamily="34" charset="-122"/>
+                <a:cs typeface="Calibri" pitchFamily="34" charset="-120"/>
+              </a:rPr>
+              <a:t>7.  References</a:t>
+            </a:r>
+            <a:endParaRPr lang="en-US" sz="1500" dirty="0"/>
           </a:p>
         </p:txBody>
       </p:sp>
@@ -2391,9 +3776,16 @@
 </p:sld>
 </file>
 
-<file path=ppt/slides/slide4.xml><?xml version="1.0" encoding="utf-8"?>
+<file path=ppt/slides/slide3.xml><?xml version="1.0" encoding="utf-8"?>
 <p:sld xmlns:a="http://schemas.openxmlformats.org/drawingml/2006/main" xmlns:r="http://schemas.openxmlformats.org/officeDocument/2006/relationships" xmlns:p="http://schemas.openxmlformats.org/presentationml/2006/main">
-  <p:cSld name="Slide 4">
+  <p:cSld name="Slide 3">
+    <p:bg>
+      <p:bgPr>
+        <a:solidFill>
+          <a:srgbClr val="FFFFFF"/>
+        </a:solidFill>
+      </p:bgPr>
+    </p:bg>
     <p:spTree>
       <p:nvGrpSpPr>
         <p:cNvPr id="1" name=""/>
@@ -2410,14 +3802,34 @@
       </p:grpSpPr>
       <p:sp>
         <p:nvSpPr>
-          <p:cNvPr id="2" name="Text 0"/>
-          <p:cNvSpPr/>
-          <p:nvPr/>
-        </p:nvSpPr>
-        <p:spPr>
-          <a:xfrm>
-            <a:off x="457200" y="457200"/>
-            <a:ext cx="8229600" cy="457200"/>
+          <p:cNvPr id="2" name="Shape 0"/>
+          <p:cNvSpPr/>
+          <p:nvPr/>
+        </p:nvSpPr>
+        <p:spPr>
+          <a:xfrm>
+            <a:off x="0" y="0"/>
+            <a:ext cx="9144000" cy="109728"/>
+          </a:xfrm>
+          <a:prstGeom prst="rect">
+            <a:avLst/>
+          </a:prstGeom>
+          <a:solidFill>
+            <a:srgbClr val="34D399"/>
+          </a:solidFill>
+          <a:ln/>
+        </p:spPr>
+      </p:sp>
+      <p:sp>
+        <p:nvSpPr>
+          <p:cNvPr id="3" name="Text 1"/>
+          <p:cNvSpPr/>
+          <p:nvPr/>
+        </p:nvSpPr>
+        <p:spPr>
+          <a:xfrm>
+            <a:off x="365760" y="182880"/>
+            <a:ext cx="8229600" cy="640080"/>
           </a:xfrm>
           <a:prstGeom prst="rect">
             <a:avLst/>
@@ -2433,27 +3845,73 @@
               <a:buNone/>
             </a:pPr>
             <a:r>
-              <a:rPr lang="en-US" sz="2400" b="1" dirty="0">
-                <a:solidFill>
-                  <a:srgbClr val="00A2D9"/>
-                </a:solidFill>
-              </a:rPr>
-              <a:t>PROPOSED SOLUTION</a:t>
-            </a:r>
-            <a:endParaRPr lang="en-US" sz="2400" dirty="0"/>
-          </a:p>
-        </p:txBody>
-      </p:sp>
-      <p:sp>
-        <p:nvSpPr>
-          <p:cNvPr id="3" name="Text 1"/>
-          <p:cNvSpPr/>
-          <p:nvPr/>
-        </p:nvSpPr>
-        <p:spPr>
-          <a:xfrm>
-            <a:off x="457200" y="1371600"/>
-            <a:ext cx="8229600" cy="3200400"/>
+              <a:rPr lang="en-US" sz="2600" b="1" dirty="0">
+                <a:solidFill>
+                  <a:srgbClr val="1A73E8"/>
+                </a:solidFill>
+                <a:latin typeface="Calibri" pitchFamily="34" charset="0"/>
+                <a:ea typeface="Calibri" pitchFamily="34" charset="-122"/>
+                <a:cs typeface="Calibri" pitchFamily="34" charset="-120"/>
+              </a:rPr>
+              <a:t>Problem Statement</a:t>
+            </a:r>
+            <a:endParaRPr lang="en-US" sz="2600" dirty="0"/>
+          </a:p>
+        </p:txBody>
+      </p:sp>
+      <p:sp>
+        <p:nvSpPr>
+          <p:cNvPr id="4" name="Shape 2"/>
+          <p:cNvSpPr/>
+          <p:nvPr/>
+        </p:nvSpPr>
+        <p:spPr>
+          <a:xfrm>
+            <a:off x="365760" y="777240"/>
+            <a:ext cx="8229600" cy="0"/>
+          </a:xfrm>
+          <a:prstGeom prst="line">
+            <a:avLst/>
+          </a:prstGeom>
+          <a:noFill/>
+          <a:ln w="19050">
+            <a:solidFill>
+              <a:srgbClr val="34D399"/>
+            </a:solidFill>
+            <a:prstDash val="solid"/>
+          </a:ln>
+        </p:spPr>
+      </p:sp>
+      <p:sp>
+        <p:nvSpPr>
+          <p:cNvPr id="5" name="Shape 3"/>
+          <p:cNvSpPr/>
+          <p:nvPr/>
+        </p:nvSpPr>
+        <p:spPr>
+          <a:xfrm>
+            <a:off x="365760" y="1078992"/>
+            <a:ext cx="164592" cy="164592"/>
+          </a:xfrm>
+          <a:prstGeom prst="ellipse">
+            <a:avLst/>
+          </a:prstGeom>
+          <a:solidFill>
+            <a:srgbClr val="34D399"/>
+          </a:solidFill>
+          <a:ln/>
+        </p:spPr>
+      </p:sp>
+      <p:sp>
+        <p:nvSpPr>
+          <p:cNvPr id="6" name="Text 4"/>
+          <p:cNvSpPr/>
+          <p:nvPr/>
+        </p:nvSpPr>
+        <p:spPr>
+          <a:xfrm>
+            <a:off x="658368" y="1005840"/>
+            <a:ext cx="7955280" cy="548640"/>
           </a:xfrm>
           <a:prstGeom prst="rect">
             <a:avLst/>
@@ -2465,55 +3923,198 @@
           <a:bodyPr wrap="square" rtlCol="0" anchor="ctr"/>
           <a:lstStyle/>
           <a:p>
-            <a:pPr marL="342900" indent="-342900">
-              <a:buSzPct val="100000"/>
-              <a:buChar char="•"/>
-            </a:pPr>
-            <a:r>
-              <a:rPr lang="en-US" sz="1800" dirty="0">
-                <a:solidFill>
-                  <a:srgbClr val="000000"/>
-                </a:solidFill>
-              </a:rPr>
-              <a:t>Personalized Generation: Creates custom plans based on age, weight, height, and activity level.
-</a:t>
-            </a:r>
-            <a:pPr indent="0" marL="0">
-              <a:buNone/>
-            </a:pPr>
-            <a:r>
-              <a:rPr lang="en-US" sz="1800" dirty="0">
-                <a:solidFill>
-                  <a:srgbClr val="000000"/>
-                </a:solidFill>
-              </a:rPr>
-              <a:t>Scientific Formulas: Uses established sports-science equations (e.g., Mifflin-St Jeor for BMR).
-</a:t>
-            </a:r>
-            <a:pPr indent="0" marL="0">
-              <a:buNone/>
-            </a:pPr>
-            <a:r>
-              <a:rPr lang="en-US" sz="1800" dirty="0">
-                <a:solidFill>
-                  <a:srgbClr val="000000"/>
-                </a:solidFill>
-              </a:rPr>
-              <a:t>Local Processing: All AI computations are done on the backend, ensuring data privacy and no reliance on third-party API keys.
-</a:t>
-            </a:r>
-            <a:pPr indent="0" marL="0">
-              <a:buNone/>
-            </a:pPr>
-            <a:r>
-              <a:rPr lang="en-US" sz="1800" dirty="0">
-                <a:solidFill>
-                  <a:srgbClr val="000000"/>
-                </a:solidFill>
-              </a:rPr>
-              <a:t>Comprehensive Dashboard: A unified view for daily caloric targets, macronutrient splits, and progress tracking.</a:t>
-            </a:r>
-            <a:endParaRPr lang="en-US" sz="1800" dirty="0"/>
+            <a:pPr indent="0" marL="0">
+              <a:buNone/>
+            </a:pPr>
+            <a:r>
+              <a:rPr lang="en-US" sz="1500" dirty="0">
+                <a:solidFill>
+                  <a:srgbClr val="1E293B"/>
+                </a:solidFill>
+                <a:latin typeface="Calibri" pitchFamily="34" charset="0"/>
+                <a:ea typeface="Calibri" pitchFamily="34" charset="-122"/>
+                <a:cs typeface="Calibri" pitchFamily="34" charset="-120"/>
+              </a:rPr>
+              <a:t>Generic Solutions: Fitness apps offer one-size-fits-all plans ignoring individual body metrics and dietary needs.</a:t>
+            </a:r>
+            <a:endParaRPr lang="en-US" sz="1500" dirty="0"/>
+          </a:p>
+        </p:txBody>
+      </p:sp>
+      <p:sp>
+        <p:nvSpPr>
+          <p:cNvPr id="7" name="Shape 5"/>
+          <p:cNvSpPr/>
+          <p:nvPr/>
+        </p:nvSpPr>
+        <p:spPr>
+          <a:xfrm>
+            <a:off x="365760" y="1673352"/>
+            <a:ext cx="164592" cy="164592"/>
+          </a:xfrm>
+          <a:prstGeom prst="ellipse">
+            <a:avLst/>
+          </a:prstGeom>
+          <a:solidFill>
+            <a:srgbClr val="34D399"/>
+          </a:solidFill>
+          <a:ln/>
+        </p:spPr>
+      </p:sp>
+      <p:sp>
+        <p:nvSpPr>
+          <p:cNvPr id="8" name="Text 6"/>
+          <p:cNvSpPr/>
+          <p:nvPr/>
+        </p:nvSpPr>
+        <p:spPr>
+          <a:xfrm>
+            <a:off x="658368" y="1600200"/>
+            <a:ext cx="7955280" cy="548640"/>
+          </a:xfrm>
+          <a:prstGeom prst="rect">
+            <a:avLst/>
+          </a:prstGeom>
+          <a:noFill/>
+          <a:ln/>
+        </p:spPr>
+        <p:txBody>
+          <a:bodyPr wrap="square" rtlCol="0" anchor="ctr"/>
+          <a:lstStyle/>
+          <a:p>
+            <a:pPr indent="0" marL="0">
+              <a:buNone/>
+            </a:pPr>
+            <a:r>
+              <a:rPr lang="en-US" sz="1500" dirty="0">
+                <a:solidFill>
+                  <a:srgbClr val="1E293B"/>
+                </a:solidFill>
+                <a:latin typeface="Calibri" pitchFamily="34" charset="0"/>
+                <a:ea typeface="Calibri" pitchFamily="34" charset="-122"/>
+                <a:cs typeface="Calibri" pitchFamily="34" charset="-120"/>
+              </a:rPr>
+              <a:t>Cost Barriers: Personal fitness coaching and specialized dietitians are expensive and inaccessible.</a:t>
+            </a:r>
+            <a:endParaRPr lang="en-US" sz="1500" dirty="0"/>
+          </a:p>
+        </p:txBody>
+      </p:sp>
+      <p:sp>
+        <p:nvSpPr>
+          <p:cNvPr id="9" name="Shape 7"/>
+          <p:cNvSpPr/>
+          <p:nvPr/>
+        </p:nvSpPr>
+        <p:spPr>
+          <a:xfrm>
+            <a:off x="365760" y="2267712"/>
+            <a:ext cx="164592" cy="164592"/>
+          </a:xfrm>
+          <a:prstGeom prst="ellipse">
+            <a:avLst/>
+          </a:prstGeom>
+          <a:solidFill>
+            <a:srgbClr val="34D399"/>
+          </a:solidFill>
+          <a:ln/>
+        </p:spPr>
+      </p:sp>
+      <p:sp>
+        <p:nvSpPr>
+          <p:cNvPr id="10" name="Text 8"/>
+          <p:cNvSpPr/>
+          <p:nvPr/>
+        </p:nvSpPr>
+        <p:spPr>
+          <a:xfrm>
+            <a:off x="658368" y="2194560"/>
+            <a:ext cx="7955280" cy="548640"/>
+          </a:xfrm>
+          <a:prstGeom prst="rect">
+            <a:avLst/>
+          </a:prstGeom>
+          <a:noFill/>
+          <a:ln/>
+        </p:spPr>
+        <p:txBody>
+          <a:bodyPr wrap="square" rtlCol="0" anchor="ctr"/>
+          <a:lstStyle/>
+          <a:p>
+            <a:pPr indent="0" marL="0">
+              <a:buNone/>
+            </a:pPr>
+            <a:r>
+              <a:rPr lang="en-US" sz="1500" dirty="0">
+                <a:solidFill>
+                  <a:srgbClr val="1E293B"/>
+                </a:solidFill>
+                <a:latin typeface="Calibri" pitchFamily="34" charset="0"/>
+                <a:ea typeface="Calibri" pitchFamily="34" charset="-122"/>
+                <a:cs typeface="Calibri" pitchFamily="34" charset="-120"/>
+              </a:rPr>
+              <a:t>Data Privacy: Health apps relying on cloud AI APIs expose sensitive body metrics to third-party servers.</a:t>
+            </a:r>
+            <a:endParaRPr lang="en-US" sz="1500" dirty="0"/>
+          </a:p>
+        </p:txBody>
+      </p:sp>
+      <p:sp>
+        <p:nvSpPr>
+          <p:cNvPr id="11" name="Shape 9"/>
+          <p:cNvSpPr/>
+          <p:nvPr/>
+        </p:nvSpPr>
+        <p:spPr>
+          <a:xfrm>
+            <a:off x="365760" y="2862072"/>
+            <a:ext cx="164592" cy="164592"/>
+          </a:xfrm>
+          <a:prstGeom prst="ellipse">
+            <a:avLst/>
+          </a:prstGeom>
+          <a:solidFill>
+            <a:srgbClr val="34D399"/>
+          </a:solidFill>
+          <a:ln/>
+        </p:spPr>
+      </p:sp>
+      <p:sp>
+        <p:nvSpPr>
+          <p:cNvPr id="12" name="Text 10"/>
+          <p:cNvSpPr/>
+          <p:nvPr/>
+        </p:nvSpPr>
+        <p:spPr>
+          <a:xfrm>
+            <a:off x="658368" y="2788920"/>
+            <a:ext cx="7955280" cy="548640"/>
+          </a:xfrm>
+          <a:prstGeom prst="rect">
+            <a:avLst/>
+          </a:prstGeom>
+          <a:noFill/>
+          <a:ln/>
+        </p:spPr>
+        <p:txBody>
+          <a:bodyPr wrap="square" rtlCol="0" anchor="ctr"/>
+          <a:lstStyle/>
+          <a:p>
+            <a:pPr indent="0" marL="0">
+              <a:buNone/>
+            </a:pPr>
+            <a:r>
+              <a:rPr lang="en-US" sz="1500" dirty="0">
+                <a:solidFill>
+                  <a:srgbClr val="1E293B"/>
+                </a:solidFill>
+                <a:latin typeface="Calibri" pitchFamily="34" charset="0"/>
+                <a:ea typeface="Calibri" pitchFamily="34" charset="-122"/>
+                <a:cs typeface="Calibri" pitchFamily="34" charset="-120"/>
+              </a:rPr>
+              <a:t>Cultural Blindspot: Most plans ignore cultural food preferences, making them hard to follow in the long run.</a:t>
+            </a:r>
+            <a:endParaRPr lang="en-US" sz="1500" dirty="0"/>
           </a:p>
         </p:txBody>
       </p:sp>
@@ -2525,9 +4126,16 @@
 </p:sld>
 </file>
 
-<file path=ppt/slides/slide5.xml><?xml version="1.0" encoding="utf-8"?>
+<file path=ppt/slides/slide4.xml><?xml version="1.0" encoding="utf-8"?>
 <p:sld xmlns:a="http://schemas.openxmlformats.org/drawingml/2006/main" xmlns:r="http://schemas.openxmlformats.org/officeDocument/2006/relationships" xmlns:p="http://schemas.openxmlformats.org/presentationml/2006/main">
-  <p:cSld name="Slide 5">
+  <p:cSld name="Slide 4">
+    <p:bg>
+      <p:bgPr>
+        <a:solidFill>
+          <a:srgbClr val="F0F9FF"/>
+        </a:solidFill>
+      </p:bgPr>
+    </p:bg>
     <p:spTree>
       <p:nvGrpSpPr>
         <p:cNvPr id="1" name=""/>
@@ -2544,14 +4152,34 @@
       </p:grpSpPr>
       <p:sp>
         <p:nvSpPr>
-          <p:cNvPr id="2" name="Text 0"/>
-          <p:cNvSpPr/>
-          <p:nvPr/>
-        </p:nvSpPr>
-        <p:spPr>
-          <a:xfrm>
-            <a:off x="457200" y="457200"/>
-            <a:ext cx="8229600" cy="457200"/>
+          <p:cNvPr id="2" name="Shape 0"/>
+          <p:cNvSpPr/>
+          <p:nvPr/>
+        </p:nvSpPr>
+        <p:spPr>
+          <a:xfrm>
+            <a:off x="0" y="0"/>
+            <a:ext cx="9144000" cy="109728"/>
+          </a:xfrm>
+          <a:prstGeom prst="rect">
+            <a:avLst/>
+          </a:prstGeom>
+          <a:solidFill>
+            <a:srgbClr val="34D399"/>
+          </a:solidFill>
+          <a:ln/>
+        </p:spPr>
+      </p:sp>
+      <p:sp>
+        <p:nvSpPr>
+          <p:cNvPr id="3" name="Text 1"/>
+          <p:cNvSpPr/>
+          <p:nvPr/>
+        </p:nvSpPr>
+        <p:spPr>
+          <a:xfrm>
+            <a:off x="365760" y="182880"/>
+            <a:ext cx="8229600" cy="640080"/>
           </a:xfrm>
           <a:prstGeom prst="rect">
             <a:avLst/>
@@ -2567,27 +4195,73 @@
               <a:buNone/>
             </a:pPr>
             <a:r>
-              <a:rPr lang="en-US" sz="2400" b="1" dirty="0">
-                <a:solidFill>
-                  <a:srgbClr val="00A2D9"/>
-                </a:solidFill>
-              </a:rPr>
-              <a:t>SYSTEM ARCHITECTURE &amp; TECH STACK</a:t>
-            </a:r>
-            <a:endParaRPr lang="en-US" sz="2400" dirty="0"/>
-          </a:p>
-        </p:txBody>
-      </p:sp>
-      <p:sp>
-        <p:nvSpPr>
-          <p:cNvPr id="3" name="Text 1"/>
-          <p:cNvSpPr/>
-          <p:nvPr/>
-        </p:nvSpPr>
-        <p:spPr>
-          <a:xfrm>
-            <a:off x="457200" y="1371600"/>
-            <a:ext cx="8229600" cy="3200400"/>
+              <a:rPr lang="en-US" sz="2600" b="1" dirty="0">
+                <a:solidFill>
+                  <a:srgbClr val="1A73E8"/>
+                </a:solidFill>
+                <a:latin typeface="Calibri" pitchFamily="34" charset="0"/>
+                <a:ea typeface="Calibri" pitchFamily="34" charset="-122"/>
+                <a:cs typeface="Calibri" pitchFamily="34" charset="-120"/>
+              </a:rPr>
+              <a:t>Proposed Solution</a:t>
+            </a:r>
+            <a:endParaRPr lang="en-US" sz="2600" dirty="0"/>
+          </a:p>
+        </p:txBody>
+      </p:sp>
+      <p:sp>
+        <p:nvSpPr>
+          <p:cNvPr id="4" name="Shape 2"/>
+          <p:cNvSpPr/>
+          <p:nvPr/>
+        </p:nvSpPr>
+        <p:spPr>
+          <a:xfrm>
+            <a:off x="365760" y="777240"/>
+            <a:ext cx="8229600" cy="0"/>
+          </a:xfrm>
+          <a:prstGeom prst="line">
+            <a:avLst/>
+          </a:prstGeom>
+          <a:noFill/>
+          <a:ln w="19050">
+            <a:solidFill>
+              <a:srgbClr val="34D399"/>
+            </a:solidFill>
+            <a:prstDash val="solid"/>
+          </a:ln>
+        </p:spPr>
+      </p:sp>
+      <p:sp>
+        <p:nvSpPr>
+          <p:cNvPr id="5" name="Shape 3"/>
+          <p:cNvSpPr/>
+          <p:nvPr/>
+        </p:nvSpPr>
+        <p:spPr>
+          <a:xfrm>
+            <a:off x="365760" y="1078992"/>
+            <a:ext cx="164592" cy="164592"/>
+          </a:xfrm>
+          <a:prstGeom prst="ellipse">
+            <a:avLst/>
+          </a:prstGeom>
+          <a:solidFill>
+            <a:srgbClr val="34D399"/>
+          </a:solidFill>
+          <a:ln/>
+        </p:spPr>
+      </p:sp>
+      <p:sp>
+        <p:nvSpPr>
+          <p:cNvPr id="6" name="Text 4"/>
+          <p:cNvSpPr/>
+          <p:nvPr/>
+        </p:nvSpPr>
+        <p:spPr>
+          <a:xfrm>
+            <a:off x="658368" y="1005840"/>
+            <a:ext cx="7955280" cy="548640"/>
           </a:xfrm>
           <a:prstGeom prst="rect">
             <a:avLst/>
@@ -2599,55 +4273,257 @@
           <a:bodyPr wrap="square" rtlCol="0" anchor="ctr"/>
           <a:lstStyle/>
           <a:p>
-            <a:pPr marL="342900" indent="-342900">
-              <a:buSzPct val="100000"/>
-              <a:buChar char="•"/>
-            </a:pPr>
-            <a:r>
-              <a:rPr lang="en-US" sz="1800" dirty="0">
-                <a:solidFill>
-                  <a:srgbClr val="000000"/>
-                </a:solidFill>
-              </a:rPr>
-              <a:t>Frontend: HTML5, CSS3, Vanilla JavaScript (Single Page Application architecture)
-</a:t>
-            </a:r>
-            <a:pPr indent="0" marL="0">
-              <a:buNone/>
-            </a:pPr>
-            <a:r>
-              <a:rPr lang="en-US" sz="1800" dirty="0">
-                <a:solidFill>
-                  <a:srgbClr val="000000"/>
-                </a:solidFill>
-              </a:rPr>
-              <a:t>Backend: Node.js, Express.js (RESTful API)
-</a:t>
-            </a:r>
-            <a:pPr indent="0" marL="0">
-              <a:buNone/>
-            </a:pPr>
-            <a:r>
-              <a:rPr lang="en-US" sz="1800" dirty="0">
-                <a:solidFill>
-                  <a:srgbClr val="000000"/>
-                </a:solidFill>
-              </a:rPr>
-              <a:t>Database: SQLite (using better-sqlite3 for lightweight, embedded storage)
-</a:t>
-            </a:r>
-            <a:pPr indent="0" marL="0">
-              <a:buNone/>
-            </a:pPr>
-            <a:r>
-              <a:rPr lang="en-US" sz="1800" dirty="0">
-                <a:solidFill>
-                  <a:srgbClr val="000000"/>
-                </a:solidFill>
-              </a:rPr>
-              <a:t>Security: JWT (JSON Web Tokens) for authentication, bcryptjs for secure password hashing.</a:t>
-            </a:r>
-            <a:endParaRPr lang="en-US" sz="1800" dirty="0"/>
+            <a:pPr indent="0" marL="0">
+              <a:buNone/>
+            </a:pPr>
+            <a:r>
+              <a:rPr lang="en-US" sz="1500" dirty="0">
+                <a:solidFill>
+                  <a:srgbClr val="1E293B"/>
+                </a:solidFill>
+                <a:latin typeface="Calibri" pitchFamily="34" charset="0"/>
+                <a:ea typeface="Calibri" pitchFamily="34" charset="-122"/>
+                <a:cs typeface="Calibri" pitchFamily="34" charset="-120"/>
+              </a:rPr>
+              <a:t>AI-Powered Personalization: Generates custom workout + meal plans from user body metrics (age, weight, height, activity level).</a:t>
+            </a:r>
+            <a:endParaRPr lang="en-US" sz="1500" dirty="0"/>
+          </a:p>
+        </p:txBody>
+      </p:sp>
+      <p:sp>
+        <p:nvSpPr>
+          <p:cNvPr id="7" name="Shape 5"/>
+          <p:cNvSpPr/>
+          <p:nvPr/>
+        </p:nvSpPr>
+        <p:spPr>
+          <a:xfrm>
+            <a:off x="365760" y="1673352"/>
+            <a:ext cx="164592" cy="164592"/>
+          </a:xfrm>
+          <a:prstGeom prst="ellipse">
+            <a:avLst/>
+          </a:prstGeom>
+          <a:solidFill>
+            <a:srgbClr val="34D399"/>
+          </a:solidFill>
+          <a:ln/>
+        </p:spPr>
+      </p:sp>
+      <p:sp>
+        <p:nvSpPr>
+          <p:cNvPr id="8" name="Text 6"/>
+          <p:cNvSpPr/>
+          <p:nvPr/>
+        </p:nvSpPr>
+        <p:spPr>
+          <a:xfrm>
+            <a:off x="658368" y="1600200"/>
+            <a:ext cx="7955280" cy="548640"/>
+          </a:xfrm>
+          <a:prstGeom prst="rect">
+            <a:avLst/>
+          </a:prstGeom>
+          <a:noFill/>
+          <a:ln/>
+        </p:spPr>
+        <p:txBody>
+          <a:bodyPr wrap="square" rtlCol="0" anchor="ctr"/>
+          <a:lstStyle/>
+          <a:p>
+            <a:pPr indent="0" marL="0">
+              <a:buNone/>
+            </a:pPr>
+            <a:r>
+              <a:rPr lang="en-US" sz="1500" dirty="0">
+                <a:solidFill>
+                  <a:srgbClr val="1E293B"/>
+                </a:solidFill>
+                <a:latin typeface="Calibri" pitchFamily="34" charset="0"/>
+                <a:ea typeface="Calibri" pitchFamily="34" charset="-122"/>
+                <a:cs typeface="Calibri" pitchFamily="34" charset="-120"/>
+              </a:rPr>
+              <a:t>100% Local Processing: Built-in AI engine on the backend — no external API calls, full data privacy guaranteed.</a:t>
+            </a:r>
+            <a:endParaRPr lang="en-US" sz="1500" dirty="0"/>
+          </a:p>
+        </p:txBody>
+      </p:sp>
+      <p:sp>
+        <p:nvSpPr>
+          <p:cNvPr id="9" name="Shape 7"/>
+          <p:cNvSpPr/>
+          <p:nvPr/>
+        </p:nvSpPr>
+        <p:spPr>
+          <a:xfrm>
+            <a:off x="365760" y="2267712"/>
+            <a:ext cx="164592" cy="164592"/>
+          </a:xfrm>
+          <a:prstGeom prst="ellipse">
+            <a:avLst/>
+          </a:prstGeom>
+          <a:solidFill>
+            <a:srgbClr val="34D399"/>
+          </a:solidFill>
+          <a:ln/>
+        </p:spPr>
+      </p:sp>
+      <p:sp>
+        <p:nvSpPr>
+          <p:cNvPr id="10" name="Text 8"/>
+          <p:cNvSpPr/>
+          <p:nvPr/>
+        </p:nvSpPr>
+        <p:spPr>
+          <a:xfrm>
+            <a:off x="658368" y="2194560"/>
+            <a:ext cx="7955280" cy="548640"/>
+          </a:xfrm>
+          <a:prstGeom prst="rect">
+            <a:avLst/>
+          </a:prstGeom>
+          <a:noFill/>
+          <a:ln/>
+        </p:spPr>
+        <p:txBody>
+          <a:bodyPr wrap="square" rtlCol="0" anchor="ctr"/>
+          <a:lstStyle/>
+          <a:p>
+            <a:pPr indent="0" marL="0">
+              <a:buNone/>
+            </a:pPr>
+            <a:r>
+              <a:rPr lang="en-US" sz="1500" dirty="0">
+                <a:solidFill>
+                  <a:srgbClr val="1E293B"/>
+                </a:solidFill>
+                <a:latin typeface="Calibri" pitchFamily="34" charset="0"/>
+                <a:ea typeface="Calibri" pitchFamily="34" charset="-122"/>
+                <a:cs typeface="Calibri" pitchFamily="34" charset="-120"/>
+              </a:rPr>
+              <a:t>Scientific Accuracy: Uses the Mifflin-St Jeor BMR equation with TDEE multipliers for precise calorie calculation.</a:t>
+            </a:r>
+            <a:endParaRPr lang="en-US" sz="1500" dirty="0"/>
+          </a:p>
+        </p:txBody>
+      </p:sp>
+      <p:sp>
+        <p:nvSpPr>
+          <p:cNvPr id="11" name="Shape 9"/>
+          <p:cNvSpPr/>
+          <p:nvPr/>
+        </p:nvSpPr>
+        <p:spPr>
+          <a:xfrm>
+            <a:off x="365760" y="2862072"/>
+            <a:ext cx="164592" cy="164592"/>
+          </a:xfrm>
+          <a:prstGeom prst="ellipse">
+            <a:avLst/>
+          </a:prstGeom>
+          <a:solidFill>
+            <a:srgbClr val="34D399"/>
+          </a:solidFill>
+          <a:ln/>
+        </p:spPr>
+      </p:sp>
+      <p:sp>
+        <p:nvSpPr>
+          <p:cNvPr id="12" name="Text 10"/>
+          <p:cNvSpPr/>
+          <p:nvPr/>
+        </p:nvSpPr>
+        <p:spPr>
+          <a:xfrm>
+            <a:off x="658368" y="2788920"/>
+            <a:ext cx="7955280" cy="548640"/>
+          </a:xfrm>
+          <a:prstGeom prst="rect">
+            <a:avLst/>
+          </a:prstGeom>
+          <a:noFill/>
+          <a:ln/>
+        </p:spPr>
+        <p:txBody>
+          <a:bodyPr wrap="square" rtlCol="0" anchor="ctr"/>
+          <a:lstStyle/>
+          <a:p>
+            <a:pPr indent="0" marL="0">
+              <a:buNone/>
+            </a:pPr>
+            <a:r>
+              <a:rPr lang="en-US" sz="1500" dirty="0">
+                <a:solidFill>
+                  <a:srgbClr val="1E293B"/>
+                </a:solidFill>
+                <a:latin typeface="Calibri" pitchFamily="34" charset="0"/>
+                <a:ea typeface="Calibri" pitchFamily="34" charset="-122"/>
+                <a:cs typeface="Calibri" pitchFamily="34" charset="-120"/>
+              </a:rPr>
+              <a:t>Cultural Meal Plans: Supports North Indian, South Indian, Jain, Vegan and Mixed food preferences.</a:t>
+            </a:r>
+            <a:endParaRPr lang="en-US" sz="1500" dirty="0"/>
+          </a:p>
+        </p:txBody>
+      </p:sp>
+      <p:sp>
+        <p:nvSpPr>
+          <p:cNvPr id="13" name="Shape 11"/>
+          <p:cNvSpPr/>
+          <p:nvPr/>
+        </p:nvSpPr>
+        <p:spPr>
+          <a:xfrm>
+            <a:off x="365760" y="3456432"/>
+            <a:ext cx="164592" cy="164592"/>
+          </a:xfrm>
+          <a:prstGeom prst="ellipse">
+            <a:avLst/>
+          </a:prstGeom>
+          <a:solidFill>
+            <a:srgbClr val="34D399"/>
+          </a:solidFill>
+          <a:ln/>
+        </p:spPr>
+      </p:sp>
+      <p:sp>
+        <p:nvSpPr>
+          <p:cNvPr id="14" name="Text 12"/>
+          <p:cNvSpPr/>
+          <p:nvPr/>
+        </p:nvSpPr>
+        <p:spPr>
+          <a:xfrm>
+            <a:off x="658368" y="3383280"/>
+            <a:ext cx="7955280" cy="548640"/>
+          </a:xfrm>
+          <a:prstGeom prst="rect">
+            <a:avLst/>
+          </a:prstGeom>
+          <a:noFill/>
+          <a:ln/>
+        </p:spPr>
+        <p:txBody>
+          <a:bodyPr wrap="square" rtlCol="0" anchor="ctr"/>
+          <a:lstStyle/>
+          <a:p>
+            <a:pPr indent="0" marL="0">
+              <a:buNone/>
+            </a:pPr>
+            <a:r>
+              <a:rPr lang="en-US" sz="1500" dirty="0">
+                <a:solidFill>
+                  <a:srgbClr val="1E293B"/>
+                </a:solidFill>
+                <a:latin typeface="Calibri" pitchFamily="34" charset="0"/>
+                <a:ea typeface="Calibri" pitchFamily="34" charset="-122"/>
+                <a:cs typeface="Calibri" pitchFamily="34" charset="-120"/>
+              </a:rPr>
+              <a:t>Free &amp; Accessible: Fully deployed web app at fitness-seven-sand.vercel.app — free for everyone.</a:t>
+            </a:r>
+            <a:endParaRPr lang="en-US" sz="1500" dirty="0"/>
           </a:p>
         </p:txBody>
       </p:sp>
@@ -2659,9 +4535,16 @@
 </p:sld>
 </file>
 
-<file path=ppt/slides/slide6.xml><?xml version="1.0" encoding="utf-8"?>
+<file path=ppt/slides/slide5.xml><?xml version="1.0" encoding="utf-8"?>
 <p:sld xmlns:a="http://schemas.openxmlformats.org/drawingml/2006/main" xmlns:r="http://schemas.openxmlformats.org/officeDocument/2006/relationships" xmlns:p="http://schemas.openxmlformats.org/presentationml/2006/main">
-  <p:cSld name="Slide 6">
+  <p:cSld name="Slide 5">
+    <p:bg>
+      <p:bgPr>
+        <a:solidFill>
+          <a:srgbClr val="FFFFFF"/>
+        </a:solidFill>
+      </p:bgPr>
+    </p:bg>
     <p:spTree>
       <p:nvGrpSpPr>
         <p:cNvPr id="1" name=""/>
@@ -2678,14 +4561,34 @@
       </p:grpSpPr>
       <p:sp>
         <p:nvSpPr>
-          <p:cNvPr id="2" name="Text 0"/>
-          <p:cNvSpPr/>
-          <p:nvPr/>
-        </p:nvSpPr>
-        <p:spPr>
-          <a:xfrm>
-            <a:off x="457200" y="457200"/>
-            <a:ext cx="8229600" cy="457200"/>
+          <p:cNvPr id="2" name="Shape 0"/>
+          <p:cNvSpPr/>
+          <p:nvPr/>
+        </p:nvSpPr>
+        <p:spPr>
+          <a:xfrm>
+            <a:off x="0" y="0"/>
+            <a:ext cx="9144000" cy="109728"/>
+          </a:xfrm>
+          <a:prstGeom prst="rect">
+            <a:avLst/>
+          </a:prstGeom>
+          <a:solidFill>
+            <a:srgbClr val="34D399"/>
+          </a:solidFill>
+          <a:ln/>
+        </p:spPr>
+      </p:sp>
+      <p:sp>
+        <p:nvSpPr>
+          <p:cNvPr id="3" name="Text 1"/>
+          <p:cNvSpPr/>
+          <p:nvPr/>
+        </p:nvSpPr>
+        <p:spPr>
+          <a:xfrm>
+            <a:off x="365760" y="182880"/>
+            <a:ext cx="8229600" cy="640080"/>
           </a:xfrm>
           <a:prstGeom prst="rect">
             <a:avLst/>
@@ -2701,27 +4604,73 @@
               <a:buNone/>
             </a:pPr>
             <a:r>
-              <a:rPr lang="en-US" sz="2400" b="1" dirty="0">
-                <a:solidFill>
-                  <a:srgbClr val="00A2D9"/>
-                </a:solidFill>
-              </a:rPr>
-              <a:t>AI ENGINE &amp; IMPLEMENTATION</a:t>
-            </a:r>
-            <a:endParaRPr lang="en-US" sz="2400" dirty="0"/>
-          </a:p>
-        </p:txBody>
-      </p:sp>
-      <p:sp>
-        <p:nvSpPr>
-          <p:cNvPr id="3" name="Text 1"/>
-          <p:cNvSpPr/>
-          <p:nvPr/>
-        </p:nvSpPr>
-        <p:spPr>
-          <a:xfrm>
-            <a:off x="457200" y="1371600"/>
-            <a:ext cx="8229600" cy="3200400"/>
+              <a:rPr lang="en-US" sz="2600" b="1" dirty="0">
+                <a:solidFill>
+                  <a:srgbClr val="1A73E8"/>
+                </a:solidFill>
+                <a:latin typeface="Calibri" pitchFamily="34" charset="0"/>
+                <a:ea typeface="Calibri" pitchFamily="34" charset="-122"/>
+                <a:cs typeface="Calibri" pitchFamily="34" charset="-120"/>
+              </a:rPr>
+              <a:t>System Architecture &amp; Tech Stack</a:t>
+            </a:r>
+            <a:endParaRPr lang="en-US" sz="2600" dirty="0"/>
+          </a:p>
+        </p:txBody>
+      </p:sp>
+      <p:sp>
+        <p:nvSpPr>
+          <p:cNvPr id="4" name="Shape 2"/>
+          <p:cNvSpPr/>
+          <p:nvPr/>
+        </p:nvSpPr>
+        <p:spPr>
+          <a:xfrm>
+            <a:off x="365760" y="777240"/>
+            <a:ext cx="8229600" cy="0"/>
+          </a:xfrm>
+          <a:prstGeom prst="line">
+            <a:avLst/>
+          </a:prstGeom>
+          <a:noFill/>
+          <a:ln w="19050">
+            <a:solidFill>
+              <a:srgbClr val="34D399"/>
+            </a:solidFill>
+            <a:prstDash val="solid"/>
+          </a:ln>
+        </p:spPr>
+      </p:sp>
+      <p:sp>
+        <p:nvSpPr>
+          <p:cNvPr id="5" name="Shape 3"/>
+          <p:cNvSpPr/>
+          <p:nvPr/>
+        </p:nvSpPr>
+        <p:spPr>
+          <a:xfrm>
+            <a:off x="365760" y="960120"/>
+            <a:ext cx="4023360" cy="411480"/>
+          </a:xfrm>
+          <a:prstGeom prst="rect">
+            <a:avLst/>
+          </a:prstGeom>
+          <a:solidFill>
+            <a:srgbClr val="1A73E8"/>
+          </a:solidFill>
+          <a:ln/>
+        </p:spPr>
+      </p:sp>
+      <p:sp>
+        <p:nvSpPr>
+          <p:cNvPr id="6" name="Text 4"/>
+          <p:cNvSpPr/>
+          <p:nvPr/>
+        </p:nvSpPr>
+        <p:spPr>
+          <a:xfrm>
+            <a:off x="365760" y="960120"/>
+            <a:ext cx="4023360" cy="411480"/>
           </a:xfrm>
           <a:prstGeom prst="rect">
             <a:avLst/>
@@ -2733,55 +4682,631 @@
           <a:bodyPr wrap="square" rtlCol="0" anchor="ctr"/>
           <a:lstStyle/>
           <a:p>
-            <a:pPr marL="342900" indent="-342900">
-              <a:buSzPct val="100000"/>
-              <a:buChar char="•"/>
-            </a:pPr>
-            <a:r>
-              <a:rPr lang="en-US" sz="1800" dirty="0">
-                <a:solidFill>
-                  <a:srgbClr val="000000"/>
-                </a:solidFill>
-              </a:rPr>
-              <a:t>Basal Metabolic Rate (BMR): Calculated using the Mifflin-St Jeor Equation.
-</a:t>
-            </a:r>
-            <a:pPr indent="0" marL="0">
-              <a:buNone/>
-            </a:pPr>
-            <a:r>
-              <a:rPr lang="en-US" sz="1800" dirty="0">
-                <a:solidFill>
-                  <a:srgbClr val="000000"/>
-                </a:solidFill>
-              </a:rPr>
-              <a:t>Total Daily Energy Expenditure (TDEE): Adjusted via activity level multipliers.
-</a:t>
-            </a:r>
-            <a:pPr indent="0" marL="0">
-              <a:buNone/>
-            </a:pPr>
-            <a:r>
-              <a:rPr lang="en-US" sz="1800" dirty="0">
-                <a:solidFill>
-                  <a:srgbClr val="000000"/>
-                </a:solidFill>
-              </a:rPr>
-              <a:t>Macronutrient Splitting: Goal-specific protein, carbohydrate, and fat ratios with a strict protein floor (1.6g/kg).
-</a:t>
-            </a:r>
-            <a:pPr indent="0" marL="0">
-              <a:buNone/>
-            </a:pPr>
-            <a:r>
-              <a:rPr lang="en-US" sz="1800" dirty="0">
-                <a:solidFill>
-                  <a:srgbClr val="000000"/>
-                </a:solidFill>
-              </a:rPr>
-              <a:t>Workout Generator: Dynamic selection of exercises from local datasets based on fitness level and available equipment.</a:t>
-            </a:r>
-            <a:endParaRPr lang="en-US" sz="1800" dirty="0"/>
+            <a:pPr algn="ctr" indent="0" marL="0">
+              <a:buNone/>
+            </a:pPr>
+            <a:r>
+              <a:rPr lang="en-US" sz="1500" b="1" dirty="0">
+                <a:solidFill>
+                  <a:srgbClr val="FFFFFF"/>
+                </a:solidFill>
+                <a:latin typeface="Calibri" pitchFamily="34" charset="0"/>
+                <a:ea typeface="Calibri" pitchFamily="34" charset="-122"/>
+                <a:cs typeface="Calibri" pitchFamily="34" charset="-120"/>
+              </a:rPr>
+              <a:t>Frontend</a:t>
+            </a:r>
+            <a:endParaRPr lang="en-US" sz="1500" dirty="0"/>
+          </a:p>
+        </p:txBody>
+      </p:sp>
+      <p:sp>
+        <p:nvSpPr>
+          <p:cNvPr id="7" name="Shape 5"/>
+          <p:cNvSpPr/>
+          <p:nvPr/>
+        </p:nvSpPr>
+        <p:spPr>
+          <a:xfrm>
+            <a:off x="365760" y="1417320"/>
+            <a:ext cx="4023360" cy="548640"/>
+          </a:xfrm>
+          <a:prstGeom prst="rect">
+            <a:avLst/>
+          </a:prstGeom>
+          <a:solidFill>
+            <a:srgbClr val="F0F9FF"/>
+          </a:solidFill>
+          <a:ln w="6350">
+            <a:solidFill>
+              <a:srgbClr val="CBD5E1"/>
+            </a:solidFill>
+            <a:prstDash val="solid"/>
+          </a:ln>
+        </p:spPr>
+      </p:sp>
+      <p:sp>
+        <p:nvSpPr>
+          <p:cNvPr id="8" name="Text 6"/>
+          <p:cNvSpPr/>
+          <p:nvPr/>
+        </p:nvSpPr>
+        <p:spPr>
+          <a:xfrm>
+            <a:off x="457200" y="1417320"/>
+            <a:ext cx="3840480" cy="548640"/>
+          </a:xfrm>
+          <a:prstGeom prst="rect">
+            <a:avLst/>
+          </a:prstGeom>
+          <a:noFill/>
+          <a:ln/>
+        </p:spPr>
+        <p:txBody>
+          <a:bodyPr wrap="square" rtlCol="0" anchor="ctr"/>
+          <a:lstStyle/>
+          <a:p>
+            <a:pPr indent="0" marL="0">
+              <a:buNone/>
+            </a:pPr>
+            <a:r>
+              <a:rPr lang="en-US" sz="1300" dirty="0">
+                <a:solidFill>
+                  <a:srgbClr val="1E293B"/>
+                </a:solidFill>
+                <a:latin typeface="Calibri" pitchFamily="34" charset="0"/>
+                <a:ea typeface="Calibri" pitchFamily="34" charset="-122"/>
+                <a:cs typeface="Calibri" pitchFamily="34" charset="-120"/>
+              </a:rPr>
+              <a:t>HTML5 + CSS3 (Vanilla)</a:t>
+            </a:r>
+            <a:endParaRPr lang="en-US" sz="1300" dirty="0"/>
+          </a:p>
+        </p:txBody>
+      </p:sp>
+      <p:sp>
+        <p:nvSpPr>
+          <p:cNvPr id="9" name="Shape 7"/>
+          <p:cNvSpPr/>
+          <p:nvPr/>
+        </p:nvSpPr>
+        <p:spPr>
+          <a:xfrm>
+            <a:off x="365760" y="2011680"/>
+            <a:ext cx="4023360" cy="548640"/>
+          </a:xfrm>
+          <a:prstGeom prst="rect">
+            <a:avLst/>
+          </a:prstGeom>
+          <a:solidFill>
+            <a:srgbClr val="FFFFFF"/>
+          </a:solidFill>
+          <a:ln w="6350">
+            <a:solidFill>
+              <a:srgbClr val="CBD5E1"/>
+            </a:solidFill>
+            <a:prstDash val="solid"/>
+          </a:ln>
+        </p:spPr>
+      </p:sp>
+      <p:sp>
+        <p:nvSpPr>
+          <p:cNvPr id="10" name="Text 8"/>
+          <p:cNvSpPr/>
+          <p:nvPr/>
+        </p:nvSpPr>
+        <p:spPr>
+          <a:xfrm>
+            <a:off x="457200" y="2011680"/>
+            <a:ext cx="3840480" cy="548640"/>
+          </a:xfrm>
+          <a:prstGeom prst="rect">
+            <a:avLst/>
+          </a:prstGeom>
+          <a:noFill/>
+          <a:ln/>
+        </p:spPr>
+        <p:txBody>
+          <a:bodyPr wrap="square" rtlCol="0" anchor="ctr"/>
+          <a:lstStyle/>
+          <a:p>
+            <a:pPr indent="0" marL="0">
+              <a:buNone/>
+            </a:pPr>
+            <a:r>
+              <a:rPr lang="en-US" sz="1300" dirty="0">
+                <a:solidFill>
+                  <a:srgbClr val="1E293B"/>
+                </a:solidFill>
+                <a:latin typeface="Calibri" pitchFamily="34" charset="0"/>
+                <a:ea typeface="Calibri" pitchFamily="34" charset="-122"/>
+                <a:cs typeface="Calibri" pitchFamily="34" charset="-120"/>
+              </a:rPr>
+              <a:t>Modular JavaScript (SPA)</a:t>
+            </a:r>
+            <a:endParaRPr lang="en-US" sz="1300" dirty="0"/>
+          </a:p>
+        </p:txBody>
+      </p:sp>
+      <p:sp>
+        <p:nvSpPr>
+          <p:cNvPr id="11" name="Shape 9"/>
+          <p:cNvSpPr/>
+          <p:nvPr/>
+        </p:nvSpPr>
+        <p:spPr>
+          <a:xfrm>
+            <a:off x="365760" y="2606040"/>
+            <a:ext cx="4023360" cy="548640"/>
+          </a:xfrm>
+          <a:prstGeom prst="rect">
+            <a:avLst/>
+          </a:prstGeom>
+          <a:solidFill>
+            <a:srgbClr val="F0F9FF"/>
+          </a:solidFill>
+          <a:ln w="6350">
+            <a:solidFill>
+              <a:srgbClr val="CBD5E1"/>
+            </a:solidFill>
+            <a:prstDash val="solid"/>
+          </a:ln>
+        </p:spPr>
+      </p:sp>
+      <p:sp>
+        <p:nvSpPr>
+          <p:cNvPr id="12" name="Text 10"/>
+          <p:cNvSpPr/>
+          <p:nvPr/>
+        </p:nvSpPr>
+        <p:spPr>
+          <a:xfrm>
+            <a:off x="457200" y="2606040"/>
+            <a:ext cx="3840480" cy="548640"/>
+          </a:xfrm>
+          <a:prstGeom prst="rect">
+            <a:avLst/>
+          </a:prstGeom>
+          <a:noFill/>
+          <a:ln/>
+        </p:spPr>
+        <p:txBody>
+          <a:bodyPr wrap="square" rtlCol="0" anchor="ctr"/>
+          <a:lstStyle/>
+          <a:p>
+            <a:pPr indent="0" marL="0">
+              <a:buNone/>
+            </a:pPr>
+            <a:r>
+              <a:rPr lang="en-US" sz="1300" dirty="0">
+                <a:solidFill>
+                  <a:srgbClr val="1E293B"/>
+                </a:solidFill>
+                <a:latin typeface="Calibri" pitchFamily="34" charset="0"/>
+                <a:ea typeface="Calibri" pitchFamily="34" charset="-122"/>
+                <a:cs typeface="Calibri" pitchFamily="34" charset="-120"/>
+              </a:rPr>
+              <a:t>Responsive Design</a:t>
+            </a:r>
+            <a:endParaRPr lang="en-US" sz="1300" dirty="0"/>
+          </a:p>
+        </p:txBody>
+      </p:sp>
+      <p:sp>
+        <p:nvSpPr>
+          <p:cNvPr id="13" name="Shape 11"/>
+          <p:cNvSpPr/>
+          <p:nvPr/>
+        </p:nvSpPr>
+        <p:spPr>
+          <a:xfrm>
+            <a:off x="365760" y="3200400"/>
+            <a:ext cx="4023360" cy="548640"/>
+          </a:xfrm>
+          <a:prstGeom prst="rect">
+            <a:avLst/>
+          </a:prstGeom>
+          <a:solidFill>
+            <a:srgbClr val="FFFFFF"/>
+          </a:solidFill>
+          <a:ln w="6350">
+            <a:solidFill>
+              <a:srgbClr val="CBD5E1"/>
+            </a:solidFill>
+            <a:prstDash val="solid"/>
+          </a:ln>
+        </p:spPr>
+      </p:sp>
+      <p:sp>
+        <p:nvSpPr>
+          <p:cNvPr id="14" name="Text 12"/>
+          <p:cNvSpPr/>
+          <p:nvPr/>
+        </p:nvSpPr>
+        <p:spPr>
+          <a:xfrm>
+            <a:off x="457200" y="3200400"/>
+            <a:ext cx="3840480" cy="548640"/>
+          </a:xfrm>
+          <a:prstGeom prst="rect">
+            <a:avLst/>
+          </a:prstGeom>
+          <a:noFill/>
+          <a:ln/>
+        </p:spPr>
+        <p:txBody>
+          <a:bodyPr wrap="square" rtlCol="0" anchor="ctr"/>
+          <a:lstStyle/>
+          <a:p>
+            <a:pPr indent="0" marL="0">
+              <a:buNone/>
+            </a:pPr>
+            <a:r>
+              <a:rPr lang="en-US" sz="1300" dirty="0">
+                <a:solidFill>
+                  <a:srgbClr val="1E293B"/>
+                </a:solidFill>
+                <a:latin typeface="Calibri" pitchFamily="34" charset="0"/>
+                <a:ea typeface="Calibri" pitchFamily="34" charset="-122"/>
+                <a:cs typeface="Calibri" pitchFamily="34" charset="-120"/>
+              </a:rPr>
+              <a:t>Dark Theme UI</a:t>
+            </a:r>
+            <a:endParaRPr lang="en-US" sz="1300" dirty="0"/>
+          </a:p>
+        </p:txBody>
+      </p:sp>
+      <p:sp>
+        <p:nvSpPr>
+          <p:cNvPr id="15" name="Shape 13"/>
+          <p:cNvSpPr/>
+          <p:nvPr/>
+        </p:nvSpPr>
+        <p:spPr>
+          <a:xfrm>
+            <a:off x="4754880" y="960120"/>
+            <a:ext cx="4023360" cy="411480"/>
+          </a:xfrm>
+          <a:prstGeom prst="rect">
+            <a:avLst/>
+          </a:prstGeom>
+          <a:solidFill>
+            <a:srgbClr val="1A73E8"/>
+          </a:solidFill>
+          <a:ln/>
+        </p:spPr>
+      </p:sp>
+      <p:sp>
+        <p:nvSpPr>
+          <p:cNvPr id="16" name="Text 14"/>
+          <p:cNvSpPr/>
+          <p:nvPr/>
+        </p:nvSpPr>
+        <p:spPr>
+          <a:xfrm>
+            <a:off x="4754880" y="960120"/>
+            <a:ext cx="4023360" cy="411480"/>
+          </a:xfrm>
+          <a:prstGeom prst="rect">
+            <a:avLst/>
+          </a:prstGeom>
+          <a:noFill/>
+          <a:ln/>
+        </p:spPr>
+        <p:txBody>
+          <a:bodyPr wrap="square" rtlCol="0" anchor="ctr"/>
+          <a:lstStyle/>
+          <a:p>
+            <a:pPr algn="ctr" indent="0" marL="0">
+              <a:buNone/>
+            </a:pPr>
+            <a:r>
+              <a:rPr lang="en-US" sz="1500" b="1" dirty="0">
+                <a:solidFill>
+                  <a:srgbClr val="FFFFFF"/>
+                </a:solidFill>
+                <a:latin typeface="Calibri" pitchFamily="34" charset="0"/>
+                <a:ea typeface="Calibri" pitchFamily="34" charset="-122"/>
+                <a:cs typeface="Calibri" pitchFamily="34" charset="-120"/>
+              </a:rPr>
+              <a:t>Backend</a:t>
+            </a:r>
+            <a:endParaRPr lang="en-US" sz="1500" dirty="0"/>
+          </a:p>
+        </p:txBody>
+      </p:sp>
+      <p:sp>
+        <p:nvSpPr>
+          <p:cNvPr id="17" name="Shape 15"/>
+          <p:cNvSpPr/>
+          <p:nvPr/>
+        </p:nvSpPr>
+        <p:spPr>
+          <a:xfrm>
+            <a:off x="4754880" y="1417320"/>
+            <a:ext cx="4023360" cy="548640"/>
+          </a:xfrm>
+          <a:prstGeom prst="rect">
+            <a:avLst/>
+          </a:prstGeom>
+          <a:solidFill>
+            <a:srgbClr val="F0F9FF"/>
+          </a:solidFill>
+          <a:ln w="6350">
+            <a:solidFill>
+              <a:srgbClr val="CBD5E1"/>
+            </a:solidFill>
+            <a:prstDash val="solid"/>
+          </a:ln>
+        </p:spPr>
+      </p:sp>
+      <p:sp>
+        <p:nvSpPr>
+          <p:cNvPr id="18" name="Text 16"/>
+          <p:cNvSpPr/>
+          <p:nvPr/>
+        </p:nvSpPr>
+        <p:spPr>
+          <a:xfrm>
+            <a:off x="4846320" y="1417320"/>
+            <a:ext cx="3840480" cy="548640"/>
+          </a:xfrm>
+          <a:prstGeom prst="rect">
+            <a:avLst/>
+          </a:prstGeom>
+          <a:noFill/>
+          <a:ln/>
+        </p:spPr>
+        <p:txBody>
+          <a:bodyPr wrap="square" rtlCol="0" anchor="ctr"/>
+          <a:lstStyle/>
+          <a:p>
+            <a:pPr indent="0" marL="0">
+              <a:buNone/>
+            </a:pPr>
+            <a:r>
+              <a:rPr lang="en-US" sz="1300" dirty="0">
+                <a:solidFill>
+                  <a:srgbClr val="1E293B"/>
+                </a:solidFill>
+                <a:latin typeface="Calibri" pitchFamily="34" charset="0"/>
+                <a:ea typeface="Calibri" pitchFamily="34" charset="-122"/>
+                <a:cs typeface="Calibri" pitchFamily="34" charset="-120"/>
+              </a:rPr>
+              <a:t>Node.js + Express.js</a:t>
+            </a:r>
+            <a:endParaRPr lang="en-US" sz="1300" dirty="0"/>
+          </a:p>
+        </p:txBody>
+      </p:sp>
+      <p:sp>
+        <p:nvSpPr>
+          <p:cNvPr id="19" name="Shape 17"/>
+          <p:cNvSpPr/>
+          <p:nvPr/>
+        </p:nvSpPr>
+        <p:spPr>
+          <a:xfrm>
+            <a:off x="4754880" y="2011680"/>
+            <a:ext cx="4023360" cy="548640"/>
+          </a:xfrm>
+          <a:prstGeom prst="rect">
+            <a:avLst/>
+          </a:prstGeom>
+          <a:solidFill>
+            <a:srgbClr val="FFFFFF"/>
+          </a:solidFill>
+          <a:ln w="6350">
+            <a:solidFill>
+              <a:srgbClr val="CBD5E1"/>
+            </a:solidFill>
+            <a:prstDash val="solid"/>
+          </a:ln>
+        </p:spPr>
+      </p:sp>
+      <p:sp>
+        <p:nvSpPr>
+          <p:cNvPr id="20" name="Text 18"/>
+          <p:cNvSpPr/>
+          <p:nvPr/>
+        </p:nvSpPr>
+        <p:spPr>
+          <a:xfrm>
+            <a:off x="4846320" y="2011680"/>
+            <a:ext cx="3840480" cy="548640"/>
+          </a:xfrm>
+          <a:prstGeom prst="rect">
+            <a:avLst/>
+          </a:prstGeom>
+          <a:noFill/>
+          <a:ln/>
+        </p:spPr>
+        <p:txBody>
+          <a:bodyPr wrap="square" rtlCol="0" anchor="ctr"/>
+          <a:lstStyle/>
+          <a:p>
+            <a:pPr indent="0" marL="0">
+              <a:buNone/>
+            </a:pPr>
+            <a:r>
+              <a:rPr lang="en-US" sz="1300" dirty="0">
+                <a:solidFill>
+                  <a:srgbClr val="1E293B"/>
+                </a:solidFill>
+                <a:latin typeface="Calibri" pitchFamily="34" charset="0"/>
+                <a:ea typeface="Calibri" pitchFamily="34" charset="-122"/>
+                <a:cs typeface="Calibri" pitchFamily="34" charset="-120"/>
+              </a:rPr>
+              <a:t>JWT Authentication</a:t>
+            </a:r>
+            <a:endParaRPr lang="en-US" sz="1300" dirty="0"/>
+          </a:p>
+        </p:txBody>
+      </p:sp>
+      <p:sp>
+        <p:nvSpPr>
+          <p:cNvPr id="21" name="Shape 19"/>
+          <p:cNvSpPr/>
+          <p:nvPr/>
+        </p:nvSpPr>
+        <p:spPr>
+          <a:xfrm>
+            <a:off x="4754880" y="2606040"/>
+            <a:ext cx="4023360" cy="548640"/>
+          </a:xfrm>
+          <a:prstGeom prst="rect">
+            <a:avLst/>
+          </a:prstGeom>
+          <a:solidFill>
+            <a:srgbClr val="F0F9FF"/>
+          </a:solidFill>
+          <a:ln w="6350">
+            <a:solidFill>
+              <a:srgbClr val="CBD5E1"/>
+            </a:solidFill>
+            <a:prstDash val="solid"/>
+          </a:ln>
+        </p:spPr>
+      </p:sp>
+      <p:sp>
+        <p:nvSpPr>
+          <p:cNvPr id="22" name="Text 20"/>
+          <p:cNvSpPr/>
+          <p:nvPr/>
+        </p:nvSpPr>
+        <p:spPr>
+          <a:xfrm>
+            <a:off x="4846320" y="2606040"/>
+            <a:ext cx="3840480" cy="548640"/>
+          </a:xfrm>
+          <a:prstGeom prst="rect">
+            <a:avLst/>
+          </a:prstGeom>
+          <a:noFill/>
+          <a:ln/>
+        </p:spPr>
+        <p:txBody>
+          <a:bodyPr wrap="square" rtlCol="0" anchor="ctr"/>
+          <a:lstStyle/>
+          <a:p>
+            <a:pPr indent="0" marL="0">
+              <a:buNone/>
+            </a:pPr>
+            <a:r>
+              <a:rPr lang="en-US" sz="1300" dirty="0">
+                <a:solidFill>
+                  <a:srgbClr val="1E293B"/>
+                </a:solidFill>
+                <a:latin typeface="Calibri" pitchFamily="34" charset="0"/>
+                <a:ea typeface="Calibri" pitchFamily="34" charset="-122"/>
+                <a:cs typeface="Calibri" pitchFamily="34" charset="-120"/>
+              </a:rPr>
+              <a:t>bcryptjs Password Hashing</a:t>
+            </a:r>
+            <a:endParaRPr lang="en-US" sz="1300" dirty="0"/>
+          </a:p>
+        </p:txBody>
+      </p:sp>
+      <p:sp>
+        <p:nvSpPr>
+          <p:cNvPr id="23" name="Shape 21"/>
+          <p:cNvSpPr/>
+          <p:nvPr/>
+        </p:nvSpPr>
+        <p:spPr>
+          <a:xfrm>
+            <a:off x="4754880" y="3200400"/>
+            <a:ext cx="4023360" cy="548640"/>
+          </a:xfrm>
+          <a:prstGeom prst="rect">
+            <a:avLst/>
+          </a:prstGeom>
+          <a:solidFill>
+            <a:srgbClr val="FFFFFF"/>
+          </a:solidFill>
+          <a:ln w="6350">
+            <a:solidFill>
+              <a:srgbClr val="CBD5E1"/>
+            </a:solidFill>
+            <a:prstDash val="solid"/>
+          </a:ln>
+        </p:spPr>
+      </p:sp>
+      <p:sp>
+        <p:nvSpPr>
+          <p:cNvPr id="24" name="Text 22"/>
+          <p:cNvSpPr/>
+          <p:nvPr/>
+        </p:nvSpPr>
+        <p:spPr>
+          <a:xfrm>
+            <a:off x="4846320" y="3200400"/>
+            <a:ext cx="3840480" cy="548640"/>
+          </a:xfrm>
+          <a:prstGeom prst="rect">
+            <a:avLst/>
+          </a:prstGeom>
+          <a:noFill/>
+          <a:ln/>
+        </p:spPr>
+        <p:txBody>
+          <a:bodyPr wrap="square" rtlCol="0" anchor="ctr"/>
+          <a:lstStyle/>
+          <a:p>
+            <a:pPr indent="0" marL="0">
+              <a:buNone/>
+            </a:pPr>
+            <a:r>
+              <a:rPr lang="en-US" sz="1300" dirty="0">
+                <a:solidFill>
+                  <a:srgbClr val="1E293B"/>
+                </a:solidFill>
+                <a:latin typeface="Calibri" pitchFamily="34" charset="0"/>
+                <a:ea typeface="Calibri" pitchFamily="34" charset="-122"/>
+                <a:cs typeface="Calibri" pitchFamily="34" charset="-120"/>
+              </a:rPr>
+              <a:t>@libsql/client (Turso DB)</a:t>
+            </a:r>
+            <a:endParaRPr lang="en-US" sz="1300" dirty="0"/>
+          </a:p>
+        </p:txBody>
+      </p:sp>
+      <p:sp>
+        <p:nvSpPr>
+          <p:cNvPr id="25" name="Text 23"/>
+          <p:cNvSpPr/>
+          <p:nvPr/>
+        </p:nvSpPr>
+        <p:spPr>
+          <a:xfrm>
+            <a:off x="365760" y="4206240"/>
+            <a:ext cx="8229600" cy="365760"/>
+          </a:xfrm>
+          <a:prstGeom prst="rect">
+            <a:avLst/>
+          </a:prstGeom>
+          <a:noFill/>
+          <a:ln/>
+        </p:spPr>
+        <p:txBody>
+          <a:bodyPr wrap="square" rtlCol="0" anchor="ctr"/>
+          <a:lstStyle/>
+          <a:p>
+            <a:pPr indent="0" marL="0">
+              <a:buNone/>
+            </a:pPr>
+            <a:r>
+              <a:rPr lang="en-US" sz="1200" i="1" dirty="0">
+                <a:solidFill>
+                  <a:srgbClr val="64748B"/>
+                </a:solidFill>
+                <a:latin typeface="Calibri" pitchFamily="34" charset="0"/>
+                <a:ea typeface="Calibri" pitchFamily="34" charset="-122"/>
+                <a:cs typeface="Calibri" pitchFamily="34" charset="-120"/>
+              </a:rPr>
+              <a:t>🚀  Deployed on Vercel  |  GitHub: adityadhanrajpathak/fitness-planner-ai</a:t>
+            </a:r>
+            <a:endParaRPr lang="en-US" sz="1200" dirty="0"/>
           </a:p>
         </p:txBody>
       </p:sp>
@@ -2793,9 +5318,16 @@
 </p:sld>
 </file>
 
-<file path=ppt/slides/slide7.xml><?xml version="1.0" encoding="utf-8"?>
+<file path=ppt/slides/slide6.xml><?xml version="1.0" encoding="utf-8"?>
 <p:sld xmlns:a="http://schemas.openxmlformats.org/drawingml/2006/main" xmlns:r="http://schemas.openxmlformats.org/officeDocument/2006/relationships" xmlns:p="http://schemas.openxmlformats.org/presentationml/2006/main">
-  <p:cSld name="Slide 7">
+  <p:cSld name="Slide 6">
+    <p:bg>
+      <p:bgPr>
+        <a:solidFill>
+          <a:srgbClr val="F0F9FF"/>
+        </a:solidFill>
+      </p:bgPr>
+    </p:bg>
     <p:spTree>
       <p:nvGrpSpPr>
         <p:cNvPr id="1" name=""/>
@@ -2812,14 +5344,34 @@
       </p:grpSpPr>
       <p:sp>
         <p:nvSpPr>
-          <p:cNvPr id="2" name="Text 0"/>
-          <p:cNvSpPr/>
-          <p:nvPr/>
-        </p:nvSpPr>
-        <p:spPr>
-          <a:xfrm>
-            <a:off x="457200" y="457200"/>
-            <a:ext cx="8229600" cy="457200"/>
+          <p:cNvPr id="2" name="Shape 0"/>
+          <p:cNvSpPr/>
+          <p:nvPr/>
+        </p:nvSpPr>
+        <p:spPr>
+          <a:xfrm>
+            <a:off x="0" y="0"/>
+            <a:ext cx="9144000" cy="109728"/>
+          </a:xfrm>
+          <a:prstGeom prst="rect">
+            <a:avLst/>
+          </a:prstGeom>
+          <a:solidFill>
+            <a:srgbClr val="34D399"/>
+          </a:solidFill>
+          <a:ln/>
+        </p:spPr>
+      </p:sp>
+      <p:sp>
+        <p:nvSpPr>
+          <p:cNvPr id="3" name="Text 1"/>
+          <p:cNvSpPr/>
+          <p:nvPr/>
+        </p:nvSpPr>
+        <p:spPr>
+          <a:xfrm>
+            <a:off x="365760" y="182880"/>
+            <a:ext cx="8229600" cy="640080"/>
           </a:xfrm>
           <a:prstGeom prst="rect">
             <a:avLst/>
@@ -2835,27 +5387,73 @@
               <a:buNone/>
             </a:pPr>
             <a:r>
-              <a:rPr lang="en-US" sz="2400" b="1" dirty="0">
-                <a:solidFill>
-                  <a:srgbClr val="00A2D9"/>
-                </a:solidFill>
-              </a:rPr>
-              <a:t>RESULT</a:t>
-            </a:r>
-            <a:endParaRPr lang="en-US" sz="2400" dirty="0"/>
-          </a:p>
-        </p:txBody>
-      </p:sp>
-      <p:sp>
-        <p:nvSpPr>
-          <p:cNvPr id="3" name="Text 1"/>
-          <p:cNvSpPr/>
-          <p:nvPr/>
-        </p:nvSpPr>
-        <p:spPr>
-          <a:xfrm>
-            <a:off x="457200" y="1371600"/>
-            <a:ext cx="8229600" cy="3200400"/>
+              <a:rPr lang="en-US" sz="2600" b="1" dirty="0">
+                <a:solidFill>
+                  <a:srgbClr val="1A73E8"/>
+                </a:solidFill>
+                <a:latin typeface="Calibri" pitchFamily="34" charset="0"/>
+                <a:ea typeface="Calibri" pitchFamily="34" charset="-122"/>
+                <a:cs typeface="Calibri" pitchFamily="34" charset="-120"/>
+              </a:rPr>
+              <a:t>Algorithm &amp; Core Engine</a:t>
+            </a:r>
+            <a:endParaRPr lang="en-US" sz="2600" dirty="0"/>
+          </a:p>
+        </p:txBody>
+      </p:sp>
+      <p:sp>
+        <p:nvSpPr>
+          <p:cNvPr id="4" name="Shape 2"/>
+          <p:cNvSpPr/>
+          <p:nvPr/>
+        </p:nvSpPr>
+        <p:spPr>
+          <a:xfrm>
+            <a:off x="365760" y="777240"/>
+            <a:ext cx="8229600" cy="0"/>
+          </a:xfrm>
+          <a:prstGeom prst="line">
+            <a:avLst/>
+          </a:prstGeom>
+          <a:noFill/>
+          <a:ln w="19050">
+            <a:solidFill>
+              <a:srgbClr val="34D399"/>
+            </a:solidFill>
+            <a:prstDash val="solid"/>
+          </a:ln>
+        </p:spPr>
+      </p:sp>
+      <p:sp>
+        <p:nvSpPr>
+          <p:cNvPr id="5" name="Shape 3"/>
+          <p:cNvSpPr/>
+          <p:nvPr/>
+        </p:nvSpPr>
+        <p:spPr>
+          <a:xfrm>
+            <a:off x="365760" y="1078992"/>
+            <a:ext cx="164592" cy="164592"/>
+          </a:xfrm>
+          <a:prstGeom prst="ellipse">
+            <a:avLst/>
+          </a:prstGeom>
+          <a:solidFill>
+            <a:srgbClr val="34D399"/>
+          </a:solidFill>
+          <a:ln/>
+        </p:spPr>
+      </p:sp>
+      <p:sp>
+        <p:nvSpPr>
+          <p:cNvPr id="6" name="Text 4"/>
+          <p:cNvSpPr/>
+          <p:nvPr/>
+        </p:nvSpPr>
+        <p:spPr>
+          <a:xfrm>
+            <a:off x="658368" y="1005840"/>
+            <a:ext cx="7955280" cy="548640"/>
           </a:xfrm>
           <a:prstGeom prst="rect">
             <a:avLst/>
@@ -2867,55 +5465,257 @@
           <a:bodyPr wrap="square" rtlCol="0" anchor="ctr"/>
           <a:lstStyle/>
           <a:p>
-            <a:pPr marL="342900" indent="-342900">
-              <a:buSzPct val="100000"/>
-              <a:buChar char="•"/>
-            </a:pPr>
-            <a:r>
-              <a:rPr lang="en-US" sz="1800" dirty="0">
-                <a:solidFill>
-                  <a:srgbClr val="000000"/>
-                </a:solidFill>
-              </a:rPr>
-              <a:t>Functional Dashboard: Users can view their real-time BMI, BMR, and daily water intake needs.
-</a:t>
-            </a:r>
-            <a:pPr indent="0" marL="0">
-              <a:buNone/>
-            </a:pPr>
-            <a:r>
-              <a:rPr lang="en-US" sz="1800" dirty="0">
-                <a:solidFill>
-                  <a:srgbClr val="000000"/>
-                </a:solidFill>
-              </a:rPr>
-              <a:t>Custom Diet Plans: Successfully generates 3-meal dietary plans aligned strictly with the user's calculated caloric needs.
-</a:t>
-            </a:r>
-            <a:pPr indent="0" marL="0">
-              <a:buNone/>
-            </a:pPr>
-            <a:r>
-              <a:rPr lang="en-US" sz="1800" dirty="0">
-                <a:solidFill>
-                  <a:srgbClr val="000000"/>
-                </a:solidFill>
-              </a:rPr>
-              <a:t>Workout Routines: Delivers structured, day-by-day exercise regimes tailored for weight loss, maintenance, or muscle gain.
-</a:t>
-            </a:r>
-            <a:pPr indent="0" marL="0">
-              <a:buNone/>
-            </a:pPr>
-            <a:r>
-              <a:rPr lang="en-US" sz="1800" dirty="0">
-                <a:solidFill>
-                  <a:srgbClr val="000000"/>
-                </a:solidFill>
-              </a:rPr>
-              <a:t>Authentication Flow: Secure registration and login workflows fully operational.</a:t>
-            </a:r>
-            <a:endParaRPr lang="en-US" sz="1800" dirty="0"/>
+            <a:pPr indent="0" marL="0">
+              <a:buNone/>
+            </a:pPr>
+            <a:r>
+              <a:rPr lang="en-US" sz="1500" dirty="0">
+                <a:solidFill>
+                  <a:srgbClr val="1E293B"/>
+                </a:solidFill>
+                <a:latin typeface="Calibri" pitchFamily="34" charset="0"/>
+                <a:ea typeface="Calibri" pitchFamily="34" charset="-122"/>
+                <a:cs typeface="Calibri" pitchFamily="34" charset="-120"/>
+              </a:rPr>
+              <a:t>Step 1 – BMR Calculation: Mifflin-St Jeor Equation → BMR = (10×W) + (6.25×H) – (5×A) ± 5</a:t>
+            </a:r>
+            <a:endParaRPr lang="en-US" sz="1500" dirty="0"/>
+          </a:p>
+        </p:txBody>
+      </p:sp>
+      <p:sp>
+        <p:nvSpPr>
+          <p:cNvPr id="7" name="Shape 5"/>
+          <p:cNvSpPr/>
+          <p:nvPr/>
+        </p:nvSpPr>
+        <p:spPr>
+          <a:xfrm>
+            <a:off x="365760" y="1673352"/>
+            <a:ext cx="164592" cy="164592"/>
+          </a:xfrm>
+          <a:prstGeom prst="ellipse">
+            <a:avLst/>
+          </a:prstGeom>
+          <a:solidFill>
+            <a:srgbClr val="34D399"/>
+          </a:solidFill>
+          <a:ln/>
+        </p:spPr>
+      </p:sp>
+      <p:sp>
+        <p:nvSpPr>
+          <p:cNvPr id="8" name="Text 6"/>
+          <p:cNvSpPr/>
+          <p:nvPr/>
+        </p:nvSpPr>
+        <p:spPr>
+          <a:xfrm>
+            <a:off x="658368" y="1600200"/>
+            <a:ext cx="7955280" cy="548640"/>
+          </a:xfrm>
+          <a:prstGeom prst="rect">
+            <a:avLst/>
+          </a:prstGeom>
+          <a:noFill/>
+          <a:ln/>
+        </p:spPr>
+        <p:txBody>
+          <a:bodyPr wrap="square" rtlCol="0" anchor="ctr"/>
+          <a:lstStyle/>
+          <a:p>
+            <a:pPr indent="0" marL="0">
+              <a:buNone/>
+            </a:pPr>
+            <a:r>
+              <a:rPr lang="en-US" sz="1500" dirty="0">
+                <a:solidFill>
+                  <a:srgbClr val="1E293B"/>
+                </a:solidFill>
+                <a:latin typeface="Calibri" pitchFamily="34" charset="0"/>
+                <a:ea typeface="Calibri" pitchFamily="34" charset="-122"/>
+                <a:cs typeface="Calibri" pitchFamily="34" charset="-120"/>
+              </a:rPr>
+              <a:t>Step 2 – TDEE Calculation: BMR × Activity Multiplier (Sedentary 1.2 → Very Active 1.9)</a:t>
+            </a:r>
+            <a:endParaRPr lang="en-US" sz="1500" dirty="0"/>
+          </a:p>
+        </p:txBody>
+      </p:sp>
+      <p:sp>
+        <p:nvSpPr>
+          <p:cNvPr id="9" name="Shape 7"/>
+          <p:cNvSpPr/>
+          <p:nvPr/>
+        </p:nvSpPr>
+        <p:spPr>
+          <a:xfrm>
+            <a:off x="365760" y="2267712"/>
+            <a:ext cx="164592" cy="164592"/>
+          </a:xfrm>
+          <a:prstGeom prst="ellipse">
+            <a:avLst/>
+          </a:prstGeom>
+          <a:solidFill>
+            <a:srgbClr val="34D399"/>
+          </a:solidFill>
+          <a:ln/>
+        </p:spPr>
+      </p:sp>
+      <p:sp>
+        <p:nvSpPr>
+          <p:cNvPr id="10" name="Text 8"/>
+          <p:cNvSpPr/>
+          <p:nvPr/>
+        </p:nvSpPr>
+        <p:spPr>
+          <a:xfrm>
+            <a:off x="658368" y="2194560"/>
+            <a:ext cx="7955280" cy="548640"/>
+          </a:xfrm>
+          <a:prstGeom prst="rect">
+            <a:avLst/>
+          </a:prstGeom>
+          <a:noFill/>
+          <a:ln/>
+        </p:spPr>
+        <p:txBody>
+          <a:bodyPr wrap="square" rtlCol="0" anchor="ctr"/>
+          <a:lstStyle/>
+          <a:p>
+            <a:pPr indent="0" marL="0">
+              <a:buNone/>
+            </a:pPr>
+            <a:r>
+              <a:rPr lang="en-US" sz="1500" dirty="0">
+                <a:solidFill>
+                  <a:srgbClr val="1E293B"/>
+                </a:solidFill>
+                <a:latin typeface="Calibri" pitchFamily="34" charset="0"/>
+                <a:ea typeface="Calibri" pitchFamily="34" charset="-122"/>
+                <a:cs typeface="Calibri" pitchFamily="34" charset="-120"/>
+              </a:rPr>
+              <a:t>Step 3 – Goal Adjustment: Weight Loss (−500 cal), Maintenance (±0), Muscle Gain (+300 cal)</a:t>
+            </a:r>
+            <a:endParaRPr lang="en-US" sz="1500" dirty="0"/>
+          </a:p>
+        </p:txBody>
+      </p:sp>
+      <p:sp>
+        <p:nvSpPr>
+          <p:cNvPr id="11" name="Shape 9"/>
+          <p:cNvSpPr/>
+          <p:nvPr/>
+        </p:nvSpPr>
+        <p:spPr>
+          <a:xfrm>
+            <a:off x="365760" y="2862072"/>
+            <a:ext cx="164592" cy="164592"/>
+          </a:xfrm>
+          <a:prstGeom prst="ellipse">
+            <a:avLst/>
+          </a:prstGeom>
+          <a:solidFill>
+            <a:srgbClr val="34D399"/>
+          </a:solidFill>
+          <a:ln/>
+        </p:spPr>
+      </p:sp>
+      <p:sp>
+        <p:nvSpPr>
+          <p:cNvPr id="12" name="Text 10"/>
+          <p:cNvSpPr/>
+          <p:nvPr/>
+        </p:nvSpPr>
+        <p:spPr>
+          <a:xfrm>
+            <a:off x="658368" y="2788920"/>
+            <a:ext cx="7955280" cy="548640"/>
+          </a:xfrm>
+          <a:prstGeom prst="rect">
+            <a:avLst/>
+          </a:prstGeom>
+          <a:noFill/>
+          <a:ln/>
+        </p:spPr>
+        <p:txBody>
+          <a:bodyPr wrap="square" rtlCol="0" anchor="ctr"/>
+          <a:lstStyle/>
+          <a:p>
+            <a:pPr indent="0" marL="0">
+              <a:buNone/>
+            </a:pPr>
+            <a:r>
+              <a:rPr lang="en-US" sz="1500" dirty="0">
+                <a:solidFill>
+                  <a:srgbClr val="1E293B"/>
+                </a:solidFill>
+                <a:latin typeface="Calibri" pitchFamily="34" charset="0"/>
+                <a:ea typeface="Calibri" pitchFamily="34" charset="-122"/>
+                <a:cs typeface="Calibri" pitchFamily="34" charset="-120"/>
+              </a:rPr>
+              <a:t>Step 4 – Macro Split: Protein 1.6g/kg body weight, Carbs 50%, Fat 25% of remaining calories</a:t>
+            </a:r>
+            <a:endParaRPr lang="en-US" sz="1500" dirty="0"/>
+          </a:p>
+        </p:txBody>
+      </p:sp>
+      <p:sp>
+        <p:nvSpPr>
+          <p:cNvPr id="13" name="Shape 11"/>
+          <p:cNvSpPr/>
+          <p:nvPr/>
+        </p:nvSpPr>
+        <p:spPr>
+          <a:xfrm>
+            <a:off x="365760" y="3456432"/>
+            <a:ext cx="164592" cy="164592"/>
+          </a:xfrm>
+          <a:prstGeom prst="ellipse">
+            <a:avLst/>
+          </a:prstGeom>
+          <a:solidFill>
+            <a:srgbClr val="34D399"/>
+          </a:solidFill>
+          <a:ln/>
+        </p:spPr>
+      </p:sp>
+      <p:sp>
+        <p:nvSpPr>
+          <p:cNvPr id="14" name="Text 12"/>
+          <p:cNvSpPr/>
+          <p:nvPr/>
+        </p:nvSpPr>
+        <p:spPr>
+          <a:xfrm>
+            <a:off x="658368" y="3383280"/>
+            <a:ext cx="7955280" cy="548640"/>
+          </a:xfrm>
+          <a:prstGeom prst="rect">
+            <a:avLst/>
+          </a:prstGeom>
+          <a:noFill/>
+          <a:ln/>
+        </p:spPr>
+        <p:txBody>
+          <a:bodyPr wrap="square" rtlCol="0" anchor="ctr"/>
+          <a:lstStyle/>
+          <a:p>
+            <a:pPr indent="0" marL="0">
+              <a:buNone/>
+            </a:pPr>
+            <a:r>
+              <a:rPr lang="en-US" sz="1500" dirty="0">
+                <a:solidFill>
+                  <a:srgbClr val="1E293B"/>
+                </a:solidFill>
+                <a:latin typeface="Calibri" pitchFamily="34" charset="0"/>
+                <a:ea typeface="Calibri" pitchFamily="34" charset="-122"/>
+                <a:cs typeface="Calibri" pitchFamily="34" charset="-120"/>
+              </a:rPr>
+              <a:t>Step 5 – Plan Generation: Algorithmic matching of exercises &amp; meals from internal curated database</a:t>
+            </a:r>
+            <a:endParaRPr lang="en-US" sz="1500" dirty="0"/>
           </a:p>
         </p:txBody>
       </p:sp>
@@ -2927,9 +5727,16 @@
 </p:sld>
 </file>
 
-<file path=ppt/slides/slide8.xml><?xml version="1.0" encoding="utf-8"?>
+<file path=ppt/slides/slide7.xml><?xml version="1.0" encoding="utf-8"?>
 <p:sld xmlns:a="http://schemas.openxmlformats.org/drawingml/2006/main" xmlns:r="http://schemas.openxmlformats.org/officeDocument/2006/relationships" xmlns:p="http://schemas.openxmlformats.org/presentationml/2006/main">
-  <p:cSld name="Slide 8">
+  <p:cSld name="Slide 7">
+    <p:bg>
+      <p:bgPr>
+        <a:solidFill>
+          <a:srgbClr val="FFFFFF"/>
+        </a:solidFill>
+      </p:bgPr>
+    </p:bg>
     <p:spTree>
       <p:nvGrpSpPr>
         <p:cNvPr id="1" name=""/>
@@ -2946,14 +5753,34 @@
       </p:grpSpPr>
       <p:sp>
         <p:nvSpPr>
-          <p:cNvPr id="2" name="Text 0"/>
-          <p:cNvSpPr/>
-          <p:nvPr/>
-        </p:nvSpPr>
-        <p:spPr>
-          <a:xfrm>
-            <a:off x="457200" y="457200"/>
-            <a:ext cx="8229600" cy="457200"/>
+          <p:cNvPr id="2" name="Shape 0"/>
+          <p:cNvSpPr/>
+          <p:nvPr/>
+        </p:nvSpPr>
+        <p:spPr>
+          <a:xfrm>
+            <a:off x="0" y="0"/>
+            <a:ext cx="9144000" cy="109728"/>
+          </a:xfrm>
+          <a:prstGeom prst="rect">
+            <a:avLst/>
+          </a:prstGeom>
+          <a:solidFill>
+            <a:srgbClr val="34D399"/>
+          </a:solidFill>
+          <a:ln/>
+        </p:spPr>
+      </p:sp>
+      <p:sp>
+        <p:nvSpPr>
+          <p:cNvPr id="3" name="Text 1"/>
+          <p:cNvSpPr/>
+          <p:nvPr/>
+        </p:nvSpPr>
+        <p:spPr>
+          <a:xfrm>
+            <a:off x="365760" y="182880"/>
+            <a:ext cx="8229600" cy="640080"/>
           </a:xfrm>
           <a:prstGeom prst="rect">
             <a:avLst/>
@@ -2969,27 +5796,78 @@
               <a:buNone/>
             </a:pPr>
             <a:r>
-              <a:rPr lang="en-US" sz="2400" b="1" dirty="0">
-                <a:solidFill>
-                  <a:srgbClr val="00A2D9"/>
-                </a:solidFill>
-              </a:rPr>
-              <a:t>CONCLUSION</a:t>
-            </a:r>
-            <a:endParaRPr lang="en-US" sz="2400" dirty="0"/>
-          </a:p>
-        </p:txBody>
-      </p:sp>
-      <p:sp>
-        <p:nvSpPr>
-          <p:cNvPr id="3" name="Text 1"/>
-          <p:cNvSpPr/>
-          <p:nvPr/>
-        </p:nvSpPr>
-        <p:spPr>
-          <a:xfrm>
-            <a:off x="457200" y="1371600"/>
-            <a:ext cx="8229600" cy="3200400"/>
+              <a:rPr lang="en-US" sz="2600" b="1" dirty="0">
+                <a:solidFill>
+                  <a:srgbClr val="1A73E8"/>
+                </a:solidFill>
+                <a:latin typeface="Calibri" pitchFamily="34" charset="0"/>
+                <a:ea typeface="Calibri" pitchFamily="34" charset="-122"/>
+                <a:cs typeface="Calibri" pitchFamily="34" charset="-120"/>
+              </a:rPr>
+              <a:t>Key Features</a:t>
+            </a:r>
+            <a:endParaRPr lang="en-US" sz="2600" dirty="0"/>
+          </a:p>
+        </p:txBody>
+      </p:sp>
+      <p:sp>
+        <p:nvSpPr>
+          <p:cNvPr id="4" name="Shape 2"/>
+          <p:cNvSpPr/>
+          <p:nvPr/>
+        </p:nvSpPr>
+        <p:spPr>
+          <a:xfrm>
+            <a:off x="365760" y="777240"/>
+            <a:ext cx="8229600" cy="0"/>
+          </a:xfrm>
+          <a:prstGeom prst="line">
+            <a:avLst/>
+          </a:prstGeom>
+          <a:noFill/>
+          <a:ln w="19050">
+            <a:solidFill>
+              <a:srgbClr val="34D399"/>
+            </a:solidFill>
+            <a:prstDash val="solid"/>
+          </a:ln>
+        </p:spPr>
+      </p:sp>
+      <p:sp>
+        <p:nvSpPr>
+          <p:cNvPr id="5" name="Shape 3"/>
+          <p:cNvSpPr/>
+          <p:nvPr/>
+        </p:nvSpPr>
+        <p:spPr>
+          <a:xfrm>
+            <a:off x="274320" y="1005840"/>
+            <a:ext cx="2834640" cy="1463040"/>
+          </a:xfrm>
+          <a:prstGeom prst="rect">
+            <a:avLst/>
+          </a:prstGeom>
+          <a:solidFill>
+            <a:srgbClr val="F0F9FF"/>
+          </a:solidFill>
+          <a:ln w="12700">
+            <a:solidFill>
+              <a:srgbClr val="34D399"/>
+            </a:solidFill>
+            <a:prstDash val="solid"/>
+          </a:ln>
+        </p:spPr>
+      </p:sp>
+      <p:sp>
+        <p:nvSpPr>
+          <p:cNvPr id="6" name="Text 4"/>
+          <p:cNvSpPr/>
+          <p:nvPr/>
+        </p:nvSpPr>
+        <p:spPr>
+          <a:xfrm>
+            <a:off x="365760" y="1097280"/>
+            <a:ext cx="2651760" cy="411480"/>
           </a:xfrm>
           <a:prstGeom prst="rect">
             <a:avLst/>
@@ -3001,43 +5879,575 @@
           <a:bodyPr wrap="square" rtlCol="0" anchor="ctr"/>
           <a:lstStyle/>
           <a:p>
-            <a:pPr marL="342900" indent="-342900">
-              <a:buSzPct val="100000"/>
-              <a:buChar char="•"/>
-            </a:pPr>
-            <a:r>
-              <a:rPr lang="en-US" sz="1800" dirty="0">
-                <a:solidFill>
-                  <a:srgbClr val="000000"/>
-                </a:solidFill>
-              </a:rPr>
-              <a:t>The Fitness Planner AI successfully bridges the gap between generic fitness apps and expensive personal coaching.
-</a:t>
-            </a:r>
-            <a:pPr indent="0" marL="0">
-              <a:buNone/>
-            </a:pPr>
-            <a:r>
-              <a:rPr lang="en-US" sz="1800" dirty="0">
-                <a:solidFill>
-                  <a:srgbClr val="000000"/>
-                </a:solidFill>
-              </a:rPr>
-              <a:t>By leveraging server-side algorithmic generation, the application provides scientifically sound health recommendations.
-</a:t>
-            </a:r>
-            <a:pPr indent="0" marL="0">
-              <a:buNone/>
-            </a:pPr>
-            <a:r>
-              <a:rPr lang="en-US" sz="1800" dirty="0">
-                <a:solidFill>
-                  <a:srgbClr val="000000"/>
-                </a:solidFill>
-              </a:rPr>
-              <a:t>The system proves that effective, personalized health planning can be achieved efficiently without external AI dependencies or compromised data privacy.</a:t>
-            </a:r>
-            <a:endParaRPr lang="en-US" sz="1800" dirty="0"/>
+            <a:pPr indent="0" marL="0">
+              <a:buNone/>
+            </a:pPr>
+            <a:r>
+              <a:rPr lang="en-US" sz="1400" b="1" dirty="0">
+                <a:solidFill>
+                  <a:srgbClr val="1A73E8"/>
+                </a:solidFill>
+                <a:latin typeface="Calibri" pitchFamily="34" charset="0"/>
+                <a:ea typeface="Calibri" pitchFamily="34" charset="-122"/>
+                <a:cs typeface="Calibri" pitchFamily="34" charset="-120"/>
+              </a:rPr>
+              <a:t>📊 Live Dashboard</a:t>
+            </a:r>
+            <a:endParaRPr lang="en-US" sz="1400" dirty="0"/>
+          </a:p>
+        </p:txBody>
+      </p:sp>
+      <p:sp>
+        <p:nvSpPr>
+          <p:cNvPr id="7" name="Text 5"/>
+          <p:cNvSpPr/>
+          <p:nvPr/>
+        </p:nvSpPr>
+        <p:spPr>
+          <a:xfrm>
+            <a:off x="365760" y="1508760"/>
+            <a:ext cx="2651760" cy="868680"/>
+          </a:xfrm>
+          <a:prstGeom prst="rect">
+            <a:avLst/>
+          </a:prstGeom>
+          <a:noFill/>
+          <a:ln/>
+        </p:spPr>
+        <p:txBody>
+          <a:bodyPr wrap="square" rtlCol="0" anchor="t"/>
+          <a:lstStyle/>
+          <a:p>
+            <a:pPr indent="0" marL="0">
+              <a:buNone/>
+            </a:pPr>
+            <a:r>
+              <a:rPr lang="en-US" sz="1200" dirty="0">
+                <a:solidFill>
+                  <a:srgbClr val="1E293B"/>
+                </a:solidFill>
+                <a:latin typeface="Calibri" pitchFamily="34" charset="0"/>
+                <a:ea typeface="Calibri" pitchFamily="34" charset="-122"/>
+                <a:cs typeface="Calibri" pitchFamily="34" charset="-120"/>
+              </a:rPr>
+              <a:t>BMI, BMR, daily calories &amp; water intake at a glance</a:t>
+            </a:r>
+            <a:endParaRPr lang="en-US" sz="1200" dirty="0"/>
+          </a:p>
+        </p:txBody>
+      </p:sp>
+      <p:sp>
+        <p:nvSpPr>
+          <p:cNvPr id="8" name="Shape 6"/>
+          <p:cNvSpPr/>
+          <p:nvPr/>
+        </p:nvSpPr>
+        <p:spPr>
+          <a:xfrm>
+            <a:off x="3291840" y="1005840"/>
+            <a:ext cx="2834640" cy="1463040"/>
+          </a:xfrm>
+          <a:prstGeom prst="rect">
+            <a:avLst/>
+          </a:prstGeom>
+          <a:solidFill>
+            <a:srgbClr val="F0F9FF"/>
+          </a:solidFill>
+          <a:ln w="12700">
+            <a:solidFill>
+              <a:srgbClr val="34D399"/>
+            </a:solidFill>
+            <a:prstDash val="solid"/>
+          </a:ln>
+        </p:spPr>
+      </p:sp>
+      <p:sp>
+        <p:nvSpPr>
+          <p:cNvPr id="9" name="Text 7"/>
+          <p:cNvSpPr/>
+          <p:nvPr/>
+        </p:nvSpPr>
+        <p:spPr>
+          <a:xfrm>
+            <a:off x="3383280" y="1097280"/>
+            <a:ext cx="2651760" cy="411480"/>
+          </a:xfrm>
+          <a:prstGeom prst="rect">
+            <a:avLst/>
+          </a:prstGeom>
+          <a:noFill/>
+          <a:ln/>
+        </p:spPr>
+        <p:txBody>
+          <a:bodyPr wrap="square" rtlCol="0" anchor="ctr"/>
+          <a:lstStyle/>
+          <a:p>
+            <a:pPr indent="0" marL="0">
+              <a:buNone/>
+            </a:pPr>
+            <a:r>
+              <a:rPr lang="en-US" sz="1400" b="1" dirty="0">
+                <a:solidFill>
+                  <a:srgbClr val="1A73E8"/>
+                </a:solidFill>
+                <a:latin typeface="Calibri" pitchFamily="34" charset="0"/>
+                <a:ea typeface="Calibri" pitchFamily="34" charset="-122"/>
+                <a:cs typeface="Calibri" pitchFamily="34" charset="-120"/>
+              </a:rPr>
+              <a:t>💪 Workout Plans</a:t>
+            </a:r>
+            <a:endParaRPr lang="en-US" sz="1400" dirty="0"/>
+          </a:p>
+        </p:txBody>
+      </p:sp>
+      <p:sp>
+        <p:nvSpPr>
+          <p:cNvPr id="10" name="Text 8"/>
+          <p:cNvSpPr/>
+          <p:nvPr/>
+        </p:nvSpPr>
+        <p:spPr>
+          <a:xfrm>
+            <a:off x="3383280" y="1508760"/>
+            <a:ext cx="2651760" cy="868680"/>
+          </a:xfrm>
+          <a:prstGeom prst="rect">
+            <a:avLst/>
+          </a:prstGeom>
+          <a:noFill/>
+          <a:ln/>
+        </p:spPr>
+        <p:txBody>
+          <a:bodyPr wrap="square" rtlCol="0" anchor="t"/>
+          <a:lstStyle/>
+          <a:p>
+            <a:pPr indent="0" marL="0">
+              <a:buNone/>
+            </a:pPr>
+            <a:r>
+              <a:rPr lang="en-US" sz="1200" dirty="0">
+                <a:solidFill>
+                  <a:srgbClr val="1E293B"/>
+                </a:solidFill>
+                <a:latin typeface="Calibri" pitchFamily="34" charset="0"/>
+                <a:ea typeface="Calibri" pitchFamily="34" charset="-122"/>
+                <a:cs typeface="Calibri" pitchFamily="34" charset="-120"/>
+              </a:rPr>
+              <a:t>Day-by-day exercise routines matched to equipment &amp; goals</a:t>
+            </a:r>
+            <a:endParaRPr lang="en-US" sz="1200" dirty="0"/>
+          </a:p>
+        </p:txBody>
+      </p:sp>
+      <p:sp>
+        <p:nvSpPr>
+          <p:cNvPr id="11" name="Shape 9"/>
+          <p:cNvSpPr/>
+          <p:nvPr/>
+        </p:nvSpPr>
+        <p:spPr>
+          <a:xfrm>
+            <a:off x="6309360" y="1005840"/>
+            <a:ext cx="2834640" cy="1463040"/>
+          </a:xfrm>
+          <a:prstGeom prst="rect">
+            <a:avLst/>
+          </a:prstGeom>
+          <a:solidFill>
+            <a:srgbClr val="F0F9FF"/>
+          </a:solidFill>
+          <a:ln w="12700">
+            <a:solidFill>
+              <a:srgbClr val="34D399"/>
+            </a:solidFill>
+            <a:prstDash val="solid"/>
+          </a:ln>
+        </p:spPr>
+      </p:sp>
+      <p:sp>
+        <p:nvSpPr>
+          <p:cNvPr id="12" name="Text 10"/>
+          <p:cNvSpPr/>
+          <p:nvPr/>
+        </p:nvSpPr>
+        <p:spPr>
+          <a:xfrm>
+            <a:off x="6400800" y="1097280"/>
+            <a:ext cx="2651760" cy="411480"/>
+          </a:xfrm>
+          <a:prstGeom prst="rect">
+            <a:avLst/>
+          </a:prstGeom>
+          <a:noFill/>
+          <a:ln/>
+        </p:spPr>
+        <p:txBody>
+          <a:bodyPr wrap="square" rtlCol="0" anchor="ctr"/>
+          <a:lstStyle/>
+          <a:p>
+            <a:pPr indent="0" marL="0">
+              <a:buNone/>
+            </a:pPr>
+            <a:r>
+              <a:rPr lang="en-US" sz="1400" b="1" dirty="0">
+                <a:solidFill>
+                  <a:srgbClr val="1A73E8"/>
+                </a:solidFill>
+                <a:latin typeface="Calibri" pitchFamily="34" charset="0"/>
+                <a:ea typeface="Calibri" pitchFamily="34" charset="-122"/>
+                <a:cs typeface="Calibri" pitchFamily="34" charset="-120"/>
+              </a:rPr>
+              <a:t>🥗 Diet Plans</a:t>
+            </a:r>
+            <a:endParaRPr lang="en-US" sz="1400" dirty="0"/>
+          </a:p>
+        </p:txBody>
+      </p:sp>
+      <p:sp>
+        <p:nvSpPr>
+          <p:cNvPr id="13" name="Text 11"/>
+          <p:cNvSpPr/>
+          <p:nvPr/>
+        </p:nvSpPr>
+        <p:spPr>
+          <a:xfrm>
+            <a:off x="6400800" y="1508760"/>
+            <a:ext cx="2651760" cy="868680"/>
+          </a:xfrm>
+          <a:prstGeom prst="rect">
+            <a:avLst/>
+          </a:prstGeom>
+          <a:noFill/>
+          <a:ln/>
+        </p:spPr>
+        <p:txBody>
+          <a:bodyPr wrap="square" rtlCol="0" anchor="t"/>
+          <a:lstStyle/>
+          <a:p>
+            <a:pPr indent="0" marL="0">
+              <a:buNone/>
+            </a:pPr>
+            <a:r>
+              <a:rPr lang="en-US" sz="1200" dirty="0">
+                <a:solidFill>
+                  <a:srgbClr val="1E293B"/>
+                </a:solidFill>
+                <a:latin typeface="Calibri" pitchFamily="34" charset="0"/>
+                <a:ea typeface="Calibri" pitchFamily="34" charset="-122"/>
+                <a:cs typeface="Calibri" pitchFamily="34" charset="-120"/>
+              </a:rPr>
+              <a:t>3-meal daily plans with calories, protein &amp; cultural preferences</a:t>
+            </a:r>
+            <a:endParaRPr lang="en-US" sz="1200" dirty="0"/>
+          </a:p>
+        </p:txBody>
+      </p:sp>
+      <p:sp>
+        <p:nvSpPr>
+          <p:cNvPr id="14" name="Shape 12"/>
+          <p:cNvSpPr/>
+          <p:nvPr/>
+        </p:nvSpPr>
+        <p:spPr>
+          <a:xfrm>
+            <a:off x="274320" y="2651760"/>
+            <a:ext cx="2834640" cy="1463040"/>
+          </a:xfrm>
+          <a:prstGeom prst="rect">
+            <a:avLst/>
+          </a:prstGeom>
+          <a:solidFill>
+            <a:srgbClr val="F0F9FF"/>
+          </a:solidFill>
+          <a:ln w="12700">
+            <a:solidFill>
+              <a:srgbClr val="34D399"/>
+            </a:solidFill>
+            <a:prstDash val="solid"/>
+          </a:ln>
+        </p:spPr>
+      </p:sp>
+      <p:sp>
+        <p:nvSpPr>
+          <p:cNvPr id="15" name="Text 13"/>
+          <p:cNvSpPr/>
+          <p:nvPr/>
+        </p:nvSpPr>
+        <p:spPr>
+          <a:xfrm>
+            <a:off x="365760" y="2743200"/>
+            <a:ext cx="2651760" cy="411480"/>
+          </a:xfrm>
+          <a:prstGeom prst="rect">
+            <a:avLst/>
+          </a:prstGeom>
+          <a:noFill/>
+          <a:ln/>
+        </p:spPr>
+        <p:txBody>
+          <a:bodyPr wrap="square" rtlCol="0" anchor="ctr"/>
+          <a:lstStyle/>
+          <a:p>
+            <a:pPr indent="0" marL="0">
+              <a:buNone/>
+            </a:pPr>
+            <a:r>
+              <a:rPr lang="en-US" sz="1400" b="1" dirty="0">
+                <a:solidFill>
+                  <a:srgbClr val="1A73E8"/>
+                </a:solidFill>
+                <a:latin typeface="Calibri" pitchFamily="34" charset="0"/>
+                <a:ea typeface="Calibri" pitchFamily="34" charset="-122"/>
+                <a:cs typeface="Calibri" pitchFamily="34" charset="-120"/>
+              </a:rPr>
+              <a:t>📈 Progress Tracking</a:t>
+            </a:r>
+            <a:endParaRPr lang="en-US" sz="1400" dirty="0"/>
+          </a:p>
+        </p:txBody>
+      </p:sp>
+      <p:sp>
+        <p:nvSpPr>
+          <p:cNvPr id="16" name="Text 14"/>
+          <p:cNvSpPr/>
+          <p:nvPr/>
+        </p:nvSpPr>
+        <p:spPr>
+          <a:xfrm>
+            <a:off x="365760" y="3154680"/>
+            <a:ext cx="2651760" cy="868680"/>
+          </a:xfrm>
+          <a:prstGeom prst="rect">
+            <a:avLst/>
+          </a:prstGeom>
+          <a:noFill/>
+          <a:ln/>
+        </p:spPr>
+        <p:txBody>
+          <a:bodyPr wrap="square" rtlCol="0" anchor="t"/>
+          <a:lstStyle/>
+          <a:p>
+            <a:pPr indent="0" marL="0">
+              <a:buNone/>
+            </a:pPr>
+            <a:r>
+              <a:rPr lang="en-US" sz="1200" dirty="0">
+                <a:solidFill>
+                  <a:srgbClr val="1E293B"/>
+                </a:solidFill>
+                <a:latin typeface="Calibri" pitchFamily="34" charset="0"/>
+                <a:ea typeface="Calibri" pitchFamily="34" charset="-122"/>
+                <a:cs typeface="Calibri" pitchFamily="34" charset="-120"/>
+              </a:rPr>
+              <a:t>Log weight, meals &amp; workout completion daily</a:t>
+            </a:r>
+            <a:endParaRPr lang="en-US" sz="1200" dirty="0"/>
+          </a:p>
+        </p:txBody>
+      </p:sp>
+      <p:sp>
+        <p:nvSpPr>
+          <p:cNvPr id="17" name="Shape 15"/>
+          <p:cNvSpPr/>
+          <p:nvPr/>
+        </p:nvSpPr>
+        <p:spPr>
+          <a:xfrm>
+            <a:off x="3291840" y="2651760"/>
+            <a:ext cx="2834640" cy="1463040"/>
+          </a:xfrm>
+          <a:prstGeom prst="rect">
+            <a:avLst/>
+          </a:prstGeom>
+          <a:solidFill>
+            <a:srgbClr val="F0F9FF"/>
+          </a:solidFill>
+          <a:ln w="12700">
+            <a:solidFill>
+              <a:srgbClr val="34D399"/>
+            </a:solidFill>
+            <a:prstDash val="solid"/>
+          </a:ln>
+        </p:spPr>
+      </p:sp>
+      <p:sp>
+        <p:nvSpPr>
+          <p:cNvPr id="18" name="Text 16"/>
+          <p:cNvSpPr/>
+          <p:nvPr/>
+        </p:nvSpPr>
+        <p:spPr>
+          <a:xfrm>
+            <a:off x="3383280" y="2743200"/>
+            <a:ext cx="2651760" cy="411480"/>
+          </a:xfrm>
+          <a:prstGeom prst="rect">
+            <a:avLst/>
+          </a:prstGeom>
+          <a:noFill/>
+          <a:ln/>
+        </p:spPr>
+        <p:txBody>
+          <a:bodyPr wrap="square" rtlCol="0" anchor="ctr"/>
+          <a:lstStyle/>
+          <a:p>
+            <a:pPr indent="0" marL="0">
+              <a:buNone/>
+            </a:pPr>
+            <a:r>
+              <a:rPr lang="en-US" sz="1400" b="1" dirty="0">
+                <a:solidFill>
+                  <a:srgbClr val="1A73E8"/>
+                </a:solidFill>
+                <a:latin typeface="Calibri" pitchFamily="34" charset="0"/>
+                <a:ea typeface="Calibri" pitchFamily="34" charset="-122"/>
+                <a:cs typeface="Calibri" pitchFamily="34" charset="-120"/>
+              </a:rPr>
+              <a:t>🔐 Secure Auth</a:t>
+            </a:r>
+            <a:endParaRPr lang="en-US" sz="1400" dirty="0"/>
+          </a:p>
+        </p:txBody>
+      </p:sp>
+      <p:sp>
+        <p:nvSpPr>
+          <p:cNvPr id="19" name="Text 17"/>
+          <p:cNvSpPr/>
+          <p:nvPr/>
+        </p:nvSpPr>
+        <p:spPr>
+          <a:xfrm>
+            <a:off x="3383280" y="3154680"/>
+            <a:ext cx="2651760" cy="868680"/>
+          </a:xfrm>
+          <a:prstGeom prst="rect">
+            <a:avLst/>
+          </a:prstGeom>
+          <a:noFill/>
+          <a:ln/>
+        </p:spPr>
+        <p:txBody>
+          <a:bodyPr wrap="square" rtlCol="0" anchor="t"/>
+          <a:lstStyle/>
+          <a:p>
+            <a:pPr indent="0" marL="0">
+              <a:buNone/>
+            </a:pPr>
+            <a:r>
+              <a:rPr lang="en-US" sz="1200" dirty="0">
+                <a:solidFill>
+                  <a:srgbClr val="1E293B"/>
+                </a:solidFill>
+                <a:latin typeface="Calibri" pitchFamily="34" charset="0"/>
+                <a:ea typeface="Calibri" pitchFamily="34" charset="-122"/>
+                <a:cs typeface="Calibri" pitchFamily="34" charset="-120"/>
+              </a:rPr>
+              <a:t>JWT tokens + bcrypt password hashing, role-based access</a:t>
+            </a:r>
+            <a:endParaRPr lang="en-US" sz="1200" dirty="0"/>
+          </a:p>
+        </p:txBody>
+      </p:sp>
+      <p:sp>
+        <p:nvSpPr>
+          <p:cNvPr id="20" name="Shape 18"/>
+          <p:cNvSpPr/>
+          <p:nvPr/>
+        </p:nvSpPr>
+        <p:spPr>
+          <a:xfrm>
+            <a:off x="6309360" y="2651760"/>
+            <a:ext cx="2834640" cy="1463040"/>
+          </a:xfrm>
+          <a:prstGeom prst="rect">
+            <a:avLst/>
+          </a:prstGeom>
+          <a:solidFill>
+            <a:srgbClr val="F0F9FF"/>
+          </a:solidFill>
+          <a:ln w="12700">
+            <a:solidFill>
+              <a:srgbClr val="34D399"/>
+            </a:solidFill>
+            <a:prstDash val="solid"/>
+          </a:ln>
+        </p:spPr>
+      </p:sp>
+      <p:sp>
+        <p:nvSpPr>
+          <p:cNvPr id="21" name="Text 19"/>
+          <p:cNvSpPr/>
+          <p:nvPr/>
+        </p:nvSpPr>
+        <p:spPr>
+          <a:xfrm>
+            <a:off x="6400800" y="2743200"/>
+            <a:ext cx="2651760" cy="411480"/>
+          </a:xfrm>
+          <a:prstGeom prst="rect">
+            <a:avLst/>
+          </a:prstGeom>
+          <a:noFill/>
+          <a:ln/>
+        </p:spPr>
+        <p:txBody>
+          <a:bodyPr wrap="square" rtlCol="0" anchor="ctr"/>
+          <a:lstStyle/>
+          <a:p>
+            <a:pPr indent="0" marL="0">
+              <a:buNone/>
+            </a:pPr>
+            <a:r>
+              <a:rPr lang="en-US" sz="1400" b="1" dirty="0">
+                <a:solidFill>
+                  <a:srgbClr val="1A73E8"/>
+                </a:solidFill>
+                <a:latin typeface="Calibri" pitchFamily="34" charset="0"/>
+                <a:ea typeface="Calibri" pitchFamily="34" charset="-122"/>
+                <a:cs typeface="Calibri" pitchFamily="34" charset="-120"/>
+              </a:rPr>
+              <a:t>👑 Admin Panel</a:t>
+            </a:r>
+            <a:endParaRPr lang="en-US" sz="1400" dirty="0"/>
+          </a:p>
+        </p:txBody>
+      </p:sp>
+      <p:sp>
+        <p:nvSpPr>
+          <p:cNvPr id="22" name="Text 20"/>
+          <p:cNvSpPr/>
+          <p:nvPr/>
+        </p:nvSpPr>
+        <p:spPr>
+          <a:xfrm>
+            <a:off x="6400800" y="3154680"/>
+            <a:ext cx="2651760" cy="868680"/>
+          </a:xfrm>
+          <a:prstGeom prst="rect">
+            <a:avLst/>
+          </a:prstGeom>
+          <a:noFill/>
+          <a:ln/>
+        </p:spPr>
+        <p:txBody>
+          <a:bodyPr wrap="square" rtlCol="0" anchor="t"/>
+          <a:lstStyle/>
+          <a:p>
+            <a:pPr indent="0" marL="0">
+              <a:buNone/>
+            </a:pPr>
+            <a:r>
+              <a:rPr lang="en-US" sz="1200" dirty="0">
+                <a:solidFill>
+                  <a:srgbClr val="1E293B"/>
+                </a:solidFill>
+                <a:latin typeface="Calibri" pitchFamily="34" charset="0"/>
+                <a:ea typeface="Calibri" pitchFamily="34" charset="-122"/>
+                <a:cs typeface="Calibri" pitchFamily="34" charset="-120"/>
+              </a:rPr>
+              <a:t>Platform statistics and user management dashboard</a:t>
+            </a:r>
+            <a:endParaRPr lang="en-US" sz="1200" dirty="0"/>
           </a:p>
         </p:txBody>
       </p:sp>
@@ -3049,9 +6459,16 @@
 </p:sld>
 </file>
 
-<file path=ppt/slides/slide9.xml><?xml version="1.0" encoding="utf-8"?>
+<file path=ppt/slides/slide8.xml><?xml version="1.0" encoding="utf-8"?>
 <p:sld xmlns:a="http://schemas.openxmlformats.org/drawingml/2006/main" xmlns:r="http://schemas.openxmlformats.org/officeDocument/2006/relationships" xmlns:p="http://schemas.openxmlformats.org/presentationml/2006/main">
-  <p:cSld name="Slide 9">
+  <p:cSld name="Slide 8">
+    <p:bg>
+      <p:bgPr>
+        <a:solidFill>
+          <a:srgbClr val="F0F9FF"/>
+        </a:solidFill>
+      </p:bgPr>
+    </p:bg>
     <p:spTree>
       <p:nvGrpSpPr>
         <p:cNvPr id="1" name=""/>
@@ -3068,14 +6485,34 @@
       </p:grpSpPr>
       <p:sp>
         <p:nvSpPr>
-          <p:cNvPr id="2" name="Text 0"/>
-          <p:cNvSpPr/>
-          <p:nvPr/>
-        </p:nvSpPr>
-        <p:spPr>
-          <a:xfrm>
-            <a:off x="457200" y="457200"/>
-            <a:ext cx="8229600" cy="457200"/>
+          <p:cNvPr id="2" name="Shape 0"/>
+          <p:cNvSpPr/>
+          <p:nvPr/>
+        </p:nvSpPr>
+        <p:spPr>
+          <a:xfrm>
+            <a:off x="0" y="0"/>
+            <a:ext cx="9144000" cy="109728"/>
+          </a:xfrm>
+          <a:prstGeom prst="rect">
+            <a:avLst/>
+          </a:prstGeom>
+          <a:solidFill>
+            <a:srgbClr val="34D399"/>
+          </a:solidFill>
+          <a:ln/>
+        </p:spPr>
+      </p:sp>
+      <p:sp>
+        <p:nvSpPr>
+          <p:cNvPr id="3" name="Text 1"/>
+          <p:cNvSpPr/>
+          <p:nvPr/>
+        </p:nvSpPr>
+        <p:spPr>
+          <a:xfrm>
+            <a:off x="365760" y="182880"/>
+            <a:ext cx="8229600" cy="640080"/>
           </a:xfrm>
           <a:prstGeom prst="rect">
             <a:avLst/>
@@ -3091,16 +6528,448 @@
               <a:buNone/>
             </a:pPr>
             <a:r>
-              <a:rPr lang="en-US" sz="2400" b="1" dirty="0">
-                <a:solidFill>
-                  <a:srgbClr val="00A2D9"/>
-                </a:solidFill>
-              </a:rPr>
-              <a:t>FUTURE SCOPE</a:t>
-            </a:r>
-            <a:endParaRPr lang="en-US" sz="2400" dirty="0"/>
-          </a:p>
-        </p:txBody>
+              <a:rPr lang="en-US" sz="2600" b="1" dirty="0">
+                <a:solidFill>
+                  <a:srgbClr val="1A73E8"/>
+                </a:solidFill>
+                <a:latin typeface="Calibri" pitchFamily="34" charset="0"/>
+                <a:ea typeface="Calibri" pitchFamily="34" charset="-122"/>
+                <a:cs typeface="Calibri" pitchFamily="34" charset="-120"/>
+              </a:rPr>
+              <a:t>Results</a:t>
+            </a:r>
+            <a:endParaRPr lang="en-US" sz="2600" dirty="0"/>
+          </a:p>
+        </p:txBody>
+      </p:sp>
+      <p:sp>
+        <p:nvSpPr>
+          <p:cNvPr id="4" name="Shape 2"/>
+          <p:cNvSpPr/>
+          <p:nvPr/>
+        </p:nvSpPr>
+        <p:spPr>
+          <a:xfrm>
+            <a:off x="365760" y="777240"/>
+            <a:ext cx="8229600" cy="0"/>
+          </a:xfrm>
+          <a:prstGeom prst="line">
+            <a:avLst/>
+          </a:prstGeom>
+          <a:noFill/>
+          <a:ln w="19050">
+            <a:solidFill>
+              <a:srgbClr val="34D399"/>
+            </a:solidFill>
+            <a:prstDash val="solid"/>
+          </a:ln>
+        </p:spPr>
+      </p:sp>
+      <p:sp>
+        <p:nvSpPr>
+          <p:cNvPr id="5" name="Shape 3"/>
+          <p:cNvSpPr/>
+          <p:nvPr/>
+        </p:nvSpPr>
+        <p:spPr>
+          <a:xfrm>
+            <a:off x="365760" y="1078992"/>
+            <a:ext cx="164592" cy="164592"/>
+          </a:xfrm>
+          <a:prstGeom prst="ellipse">
+            <a:avLst/>
+          </a:prstGeom>
+          <a:solidFill>
+            <a:srgbClr val="34D399"/>
+          </a:solidFill>
+          <a:ln/>
+        </p:spPr>
+      </p:sp>
+      <p:sp>
+        <p:nvSpPr>
+          <p:cNvPr id="6" name="Text 4"/>
+          <p:cNvSpPr/>
+          <p:nvPr/>
+        </p:nvSpPr>
+        <p:spPr>
+          <a:xfrm>
+            <a:off x="658368" y="1005840"/>
+            <a:ext cx="7955280" cy="548640"/>
+          </a:xfrm>
+          <a:prstGeom prst="rect">
+            <a:avLst/>
+          </a:prstGeom>
+          <a:noFill/>
+          <a:ln/>
+        </p:spPr>
+        <p:txBody>
+          <a:bodyPr wrap="square" rtlCol="0" anchor="ctr"/>
+          <a:lstStyle/>
+          <a:p>
+            <a:pPr indent="0" marL="0">
+              <a:buNone/>
+            </a:pPr>
+            <a:r>
+              <a:rPr lang="en-US" sz="1500" dirty="0">
+                <a:solidFill>
+                  <a:srgbClr val="1E293B"/>
+                </a:solidFill>
+                <a:latin typeface="Calibri" pitchFamily="34" charset="0"/>
+                <a:ea typeface="Calibri" pitchFamily="34" charset="-122"/>
+                <a:cs typeface="Calibri" pitchFamily="34" charset="-120"/>
+              </a:rPr>
+              <a:t>Functional full-stack web application live at: fitness-seven-sand.vercel.app</a:t>
+            </a:r>
+            <a:endParaRPr lang="en-US" sz="1500" dirty="0"/>
+          </a:p>
+        </p:txBody>
+      </p:sp>
+      <p:sp>
+        <p:nvSpPr>
+          <p:cNvPr id="7" name="Shape 5"/>
+          <p:cNvSpPr/>
+          <p:nvPr/>
+        </p:nvSpPr>
+        <p:spPr>
+          <a:xfrm>
+            <a:off x="365760" y="1673352"/>
+            <a:ext cx="164592" cy="164592"/>
+          </a:xfrm>
+          <a:prstGeom prst="ellipse">
+            <a:avLst/>
+          </a:prstGeom>
+          <a:solidFill>
+            <a:srgbClr val="34D399"/>
+          </a:solidFill>
+          <a:ln/>
+        </p:spPr>
+      </p:sp>
+      <p:sp>
+        <p:nvSpPr>
+          <p:cNvPr id="8" name="Text 6"/>
+          <p:cNvSpPr/>
+          <p:nvPr/>
+        </p:nvSpPr>
+        <p:spPr>
+          <a:xfrm>
+            <a:off x="658368" y="1600200"/>
+            <a:ext cx="7955280" cy="548640"/>
+          </a:xfrm>
+          <a:prstGeom prst="rect">
+            <a:avLst/>
+          </a:prstGeom>
+          <a:noFill/>
+          <a:ln/>
+        </p:spPr>
+        <p:txBody>
+          <a:bodyPr wrap="square" rtlCol="0" anchor="ctr"/>
+          <a:lstStyle/>
+          <a:p>
+            <a:pPr indent="0" marL="0">
+              <a:buNone/>
+            </a:pPr>
+            <a:r>
+              <a:rPr lang="en-US" sz="1500" dirty="0">
+                <a:solidFill>
+                  <a:srgbClr val="1E293B"/>
+                </a:solidFill>
+                <a:latin typeface="Calibri" pitchFamily="34" charset="0"/>
+                <a:ea typeface="Calibri" pitchFamily="34" charset="-122"/>
+                <a:cs typeface="Calibri" pitchFamily="34" charset="-120"/>
+              </a:rPr>
+              <a:t>Successfully generates personalized workout plans (7-day weekly schedule) in under 1 second.</a:t>
+            </a:r>
+            <a:endParaRPr lang="en-US" sz="1500" dirty="0"/>
+          </a:p>
+        </p:txBody>
+      </p:sp>
+      <p:sp>
+        <p:nvSpPr>
+          <p:cNvPr id="9" name="Shape 7"/>
+          <p:cNvSpPr/>
+          <p:nvPr/>
+        </p:nvSpPr>
+        <p:spPr>
+          <a:xfrm>
+            <a:off x="365760" y="2267712"/>
+            <a:ext cx="164592" cy="164592"/>
+          </a:xfrm>
+          <a:prstGeom prst="ellipse">
+            <a:avLst/>
+          </a:prstGeom>
+          <a:solidFill>
+            <a:srgbClr val="34D399"/>
+          </a:solidFill>
+          <a:ln/>
+        </p:spPr>
+      </p:sp>
+      <p:sp>
+        <p:nvSpPr>
+          <p:cNvPr id="10" name="Text 8"/>
+          <p:cNvSpPr/>
+          <p:nvPr/>
+        </p:nvSpPr>
+        <p:spPr>
+          <a:xfrm>
+            <a:off x="658368" y="2194560"/>
+            <a:ext cx="7955280" cy="548640"/>
+          </a:xfrm>
+          <a:prstGeom prst="rect">
+            <a:avLst/>
+          </a:prstGeom>
+          <a:noFill/>
+          <a:ln/>
+        </p:spPr>
+        <p:txBody>
+          <a:bodyPr wrap="square" rtlCol="0" anchor="ctr"/>
+          <a:lstStyle/>
+          <a:p>
+            <a:pPr indent="0" marL="0">
+              <a:buNone/>
+            </a:pPr>
+            <a:r>
+              <a:rPr lang="en-US" sz="1500" dirty="0">
+                <a:solidFill>
+                  <a:srgbClr val="1E293B"/>
+                </a:solidFill>
+                <a:latin typeface="Calibri" pitchFamily="34" charset="0"/>
+                <a:ea typeface="Calibri" pitchFamily="34" charset="-122"/>
+                <a:cs typeface="Calibri" pitchFamily="34" charset="-120"/>
+              </a:rPr>
+              <a:t>Diet plans meet user's exact caloric targets with proper macro distribution per meal.</a:t>
+            </a:r>
+            <a:endParaRPr lang="en-US" sz="1500" dirty="0"/>
+          </a:p>
+        </p:txBody>
+      </p:sp>
+      <p:sp>
+        <p:nvSpPr>
+          <p:cNvPr id="11" name="Shape 9"/>
+          <p:cNvSpPr/>
+          <p:nvPr/>
+        </p:nvSpPr>
+        <p:spPr>
+          <a:xfrm>
+            <a:off x="365760" y="2862072"/>
+            <a:ext cx="164592" cy="164592"/>
+          </a:xfrm>
+          <a:prstGeom prst="ellipse">
+            <a:avLst/>
+          </a:prstGeom>
+          <a:solidFill>
+            <a:srgbClr val="34D399"/>
+          </a:solidFill>
+          <a:ln/>
+        </p:spPr>
+      </p:sp>
+      <p:sp>
+        <p:nvSpPr>
+          <p:cNvPr id="12" name="Text 10"/>
+          <p:cNvSpPr/>
+          <p:nvPr/>
+        </p:nvSpPr>
+        <p:spPr>
+          <a:xfrm>
+            <a:off x="658368" y="2788920"/>
+            <a:ext cx="7955280" cy="548640"/>
+          </a:xfrm>
+          <a:prstGeom prst="rect">
+            <a:avLst/>
+          </a:prstGeom>
+          <a:noFill/>
+          <a:ln/>
+        </p:spPr>
+        <p:txBody>
+          <a:bodyPr wrap="square" rtlCol="0" anchor="ctr"/>
+          <a:lstStyle/>
+          <a:p>
+            <a:pPr indent="0" marL="0">
+              <a:buNone/>
+            </a:pPr>
+            <a:r>
+              <a:rPr lang="en-US" sz="1500" dirty="0">
+                <a:solidFill>
+                  <a:srgbClr val="1E293B"/>
+                </a:solidFill>
+                <a:latin typeface="Calibri" pitchFamily="34" charset="0"/>
+                <a:ea typeface="Calibri" pitchFamily="34" charset="-122"/>
+                <a:cs typeface="Calibri" pitchFamily="34" charset="-120"/>
+              </a:rPr>
+              <a:t>Secure registration, login, and profile management fully operational.</a:t>
+            </a:r>
+            <a:endParaRPr lang="en-US" sz="1500" dirty="0"/>
+          </a:p>
+        </p:txBody>
+      </p:sp>
+      <p:sp>
+        <p:nvSpPr>
+          <p:cNvPr id="13" name="Shape 11"/>
+          <p:cNvSpPr/>
+          <p:nvPr/>
+        </p:nvSpPr>
+        <p:spPr>
+          <a:xfrm>
+            <a:off x="365760" y="3456432"/>
+            <a:ext cx="164592" cy="164592"/>
+          </a:xfrm>
+          <a:prstGeom prst="ellipse">
+            <a:avLst/>
+          </a:prstGeom>
+          <a:solidFill>
+            <a:srgbClr val="34D399"/>
+          </a:solidFill>
+          <a:ln/>
+        </p:spPr>
+      </p:sp>
+      <p:sp>
+        <p:nvSpPr>
+          <p:cNvPr id="14" name="Text 12"/>
+          <p:cNvSpPr/>
+          <p:nvPr/>
+        </p:nvSpPr>
+        <p:spPr>
+          <a:xfrm>
+            <a:off x="658368" y="3383280"/>
+            <a:ext cx="7955280" cy="548640"/>
+          </a:xfrm>
+          <a:prstGeom prst="rect">
+            <a:avLst/>
+          </a:prstGeom>
+          <a:noFill/>
+          <a:ln/>
+        </p:spPr>
+        <p:txBody>
+          <a:bodyPr wrap="square" rtlCol="0" anchor="ctr"/>
+          <a:lstStyle/>
+          <a:p>
+            <a:pPr indent="0" marL="0">
+              <a:buNone/>
+            </a:pPr>
+            <a:r>
+              <a:rPr lang="en-US" sz="1500" dirty="0">
+                <a:solidFill>
+                  <a:srgbClr val="1E293B"/>
+                </a:solidFill>
+                <a:latin typeface="Calibri" pitchFamily="34" charset="0"/>
+                <a:ea typeface="Calibri" pitchFamily="34" charset="-122"/>
+                <a:cs typeface="Calibri" pitchFamily="34" charset="-120"/>
+              </a:rPr>
+              <a:t>Admin panel provides platform-wide statistics and user management.</a:t>
+            </a:r>
+            <a:endParaRPr lang="en-US" sz="1500" dirty="0"/>
+          </a:p>
+        </p:txBody>
+      </p:sp>
+      <p:sp>
+        <p:nvSpPr>
+          <p:cNvPr id="15" name="Shape 13"/>
+          <p:cNvSpPr/>
+          <p:nvPr/>
+        </p:nvSpPr>
+        <p:spPr>
+          <a:xfrm>
+            <a:off x="365760" y="4050792"/>
+            <a:ext cx="164592" cy="164592"/>
+          </a:xfrm>
+          <a:prstGeom prst="ellipse">
+            <a:avLst/>
+          </a:prstGeom>
+          <a:solidFill>
+            <a:srgbClr val="34D399"/>
+          </a:solidFill>
+          <a:ln/>
+        </p:spPr>
+      </p:sp>
+      <p:sp>
+        <p:nvSpPr>
+          <p:cNvPr id="16" name="Text 14"/>
+          <p:cNvSpPr/>
+          <p:nvPr/>
+        </p:nvSpPr>
+        <p:spPr>
+          <a:xfrm>
+            <a:off x="658368" y="3977640"/>
+            <a:ext cx="7955280" cy="548640"/>
+          </a:xfrm>
+          <a:prstGeom prst="rect">
+            <a:avLst/>
+          </a:prstGeom>
+          <a:noFill/>
+          <a:ln/>
+        </p:spPr>
+        <p:txBody>
+          <a:bodyPr wrap="square" rtlCol="0" anchor="ctr"/>
+          <a:lstStyle/>
+          <a:p>
+            <a:pPr indent="0" marL="0">
+              <a:buNone/>
+            </a:pPr>
+            <a:r>
+              <a:rPr lang="en-US" sz="1500" dirty="0">
+                <a:solidFill>
+                  <a:srgbClr val="1E293B"/>
+                </a:solidFill>
+                <a:latin typeface="Calibri" pitchFamily="34" charset="0"/>
+                <a:ea typeface="Calibri" pitchFamily="34" charset="-122"/>
+                <a:cs typeface="Calibri" pitchFamily="34" charset="-120"/>
+              </a:rPr>
+              <a:t>Google Search Console verified — site indexed for public discovery.</a:t>
+            </a:r>
+            <a:endParaRPr lang="en-US" sz="1500" dirty="0"/>
+          </a:p>
+        </p:txBody>
+      </p:sp>
+    </p:spTree>
+  </p:cSld>
+  <p:clrMapOvr>
+    <a:masterClrMapping/>
+  </p:clrMapOvr>
+</p:sld>
+</file>
+
+<file path=ppt/slides/slide9.xml><?xml version="1.0" encoding="utf-8"?>
+<p:sld xmlns:a="http://schemas.openxmlformats.org/drawingml/2006/main" xmlns:r="http://schemas.openxmlformats.org/officeDocument/2006/relationships" xmlns:p="http://schemas.openxmlformats.org/presentationml/2006/main">
+  <p:cSld name="Slide 9">
+    <p:bg>
+      <p:bgPr>
+        <a:solidFill>
+          <a:srgbClr val="FFFFFF"/>
+        </a:solidFill>
+      </p:bgPr>
+    </p:bg>
+    <p:spTree>
+      <p:nvGrpSpPr>
+        <p:cNvPr id="1" name=""/>
+        <p:cNvGrpSpPr/>
+        <p:nvPr/>
+      </p:nvGrpSpPr>
+      <p:grpSpPr>
+        <a:xfrm>
+          <a:off x="0" y="0"/>
+          <a:ext cx="0" cy="0"/>
+          <a:chOff x="0" y="0"/>
+          <a:chExt cx="0" cy="0"/>
+        </a:xfrm>
+      </p:grpSpPr>
+      <p:sp>
+        <p:nvSpPr>
+          <p:cNvPr id="2" name="Shape 0"/>
+          <p:cNvSpPr/>
+          <p:nvPr/>
+        </p:nvSpPr>
+        <p:spPr>
+          <a:xfrm>
+            <a:off x="0" y="0"/>
+            <a:ext cx="9144000" cy="109728"/>
+          </a:xfrm>
+          <a:prstGeom prst="rect">
+            <a:avLst/>
+          </a:prstGeom>
+          <a:solidFill>
+            <a:srgbClr val="34D399"/>
+          </a:solidFill>
+          <a:ln/>
+        </p:spPr>
       </p:sp>
       <p:sp>
         <p:nvSpPr>
@@ -3110,8 +6979,8 @@
         </p:nvSpPr>
         <p:spPr>
           <a:xfrm>
-            <a:off x="457200" y="1371600"/>
-            <a:ext cx="8229600" cy="3200400"/>
+            <a:off x="365760" y="182880"/>
+            <a:ext cx="8229600" cy="640080"/>
           </a:xfrm>
           <a:prstGeom prst="rect">
             <a:avLst/>
@@ -3123,55 +6992,280 @@
           <a:bodyPr wrap="square" rtlCol="0" anchor="ctr"/>
           <a:lstStyle/>
           <a:p>
-            <a:pPr marL="342900" indent="-342900">
-              <a:buSzPct val="100000"/>
-              <a:buChar char="•"/>
-            </a:pPr>
-            <a:r>
-              <a:rPr lang="en-US" sz="1800" dirty="0">
-                <a:solidFill>
-                  <a:srgbClr val="000000"/>
-                </a:solidFill>
-              </a:rPr>
-              <a:t>Integration with Wearables: Syncing data with smartwatches (Apple Watch, Fitbit) for real-time calorie tracking.
-</a:t>
-            </a:r>
-            <a:pPr indent="0" marL="0">
-              <a:buNone/>
-            </a:pPr>
-            <a:r>
-              <a:rPr lang="en-US" sz="1800" dirty="0">
-                <a:solidFill>
-                  <a:srgbClr val="000000"/>
-                </a:solidFill>
-              </a:rPr>
-              <a:t>Progress Analytics: Visual graphs tracking weight change and strength improvements over months.
-</a:t>
-            </a:r>
-            <a:pPr indent="0" marL="0">
-              <a:buNone/>
-            </a:pPr>
-            <a:r>
-              <a:rPr lang="en-US" sz="1800" dirty="0">
-                <a:solidFill>
-                  <a:srgbClr val="000000"/>
-                </a:solidFill>
-              </a:rPr>
-              <a:t>Expanded Database: Adding more culturally diverse food datasets and advanced workout variations.
-</a:t>
-            </a:r>
-            <a:pPr indent="0" marL="0">
-              <a:buNone/>
-            </a:pPr>
-            <a:r>
-              <a:rPr lang="en-US" sz="1800" dirty="0">
-                <a:solidFill>
-                  <a:srgbClr val="000000"/>
-                </a:solidFill>
-              </a:rPr>
-              <a:t>Mobile App: Converting the responsive web application into native iOS and Android apps.</a:t>
-            </a:r>
-            <a:endParaRPr lang="en-US" sz="1800" dirty="0"/>
+            <a:pPr indent="0" marL="0">
+              <a:buNone/>
+            </a:pPr>
+            <a:r>
+              <a:rPr lang="en-US" sz="2600" b="1" dirty="0">
+                <a:solidFill>
+                  <a:srgbClr val="1A73E8"/>
+                </a:solidFill>
+                <a:latin typeface="Calibri" pitchFamily="34" charset="0"/>
+                <a:ea typeface="Calibri" pitchFamily="34" charset="-122"/>
+                <a:cs typeface="Calibri" pitchFamily="34" charset="-120"/>
+              </a:rPr>
+              <a:t>Conclusion</a:t>
+            </a:r>
+            <a:endParaRPr lang="en-US" sz="2600" dirty="0"/>
+          </a:p>
+        </p:txBody>
+      </p:sp>
+      <p:sp>
+        <p:nvSpPr>
+          <p:cNvPr id="4" name="Shape 2"/>
+          <p:cNvSpPr/>
+          <p:nvPr/>
+        </p:nvSpPr>
+        <p:spPr>
+          <a:xfrm>
+            <a:off x="365760" y="777240"/>
+            <a:ext cx="8229600" cy="0"/>
+          </a:xfrm>
+          <a:prstGeom prst="line">
+            <a:avLst/>
+          </a:prstGeom>
+          <a:noFill/>
+          <a:ln w="19050">
+            <a:solidFill>
+              <a:srgbClr val="34D399"/>
+            </a:solidFill>
+            <a:prstDash val="solid"/>
+          </a:ln>
+        </p:spPr>
+      </p:sp>
+      <p:sp>
+        <p:nvSpPr>
+          <p:cNvPr id="5" name="Shape 3"/>
+          <p:cNvSpPr/>
+          <p:nvPr/>
+        </p:nvSpPr>
+        <p:spPr>
+          <a:xfrm>
+            <a:off x="365760" y="1078992"/>
+            <a:ext cx="164592" cy="164592"/>
+          </a:xfrm>
+          <a:prstGeom prst="ellipse">
+            <a:avLst/>
+          </a:prstGeom>
+          <a:solidFill>
+            <a:srgbClr val="34D399"/>
+          </a:solidFill>
+          <a:ln/>
+        </p:spPr>
+      </p:sp>
+      <p:sp>
+        <p:nvSpPr>
+          <p:cNvPr id="6" name="Text 4"/>
+          <p:cNvSpPr/>
+          <p:nvPr/>
+        </p:nvSpPr>
+        <p:spPr>
+          <a:xfrm>
+            <a:off x="658368" y="1005840"/>
+            <a:ext cx="7955280" cy="548640"/>
+          </a:xfrm>
+          <a:prstGeom prst="rect">
+            <a:avLst/>
+          </a:prstGeom>
+          <a:noFill/>
+          <a:ln/>
+        </p:spPr>
+        <p:txBody>
+          <a:bodyPr wrap="square" rtlCol="0" anchor="ctr"/>
+          <a:lstStyle/>
+          <a:p>
+            <a:pPr indent="0" marL="0">
+              <a:buNone/>
+            </a:pPr>
+            <a:r>
+              <a:rPr lang="en-US" sz="1500" dirty="0">
+                <a:solidFill>
+                  <a:srgbClr val="1E293B"/>
+                </a:solidFill>
+                <a:latin typeface="Calibri" pitchFamily="34" charset="0"/>
+                <a:ea typeface="Calibri" pitchFamily="34" charset="-122"/>
+                <a:cs typeface="Calibri" pitchFamily="34" charset="-120"/>
+              </a:rPr>
+              <a:t>Fitness Planner AI successfully bridges the gap between generic fitness apps and expensive personal coaching.</a:t>
+            </a:r>
+            <a:endParaRPr lang="en-US" sz="1500" dirty="0"/>
+          </a:p>
+        </p:txBody>
+      </p:sp>
+      <p:sp>
+        <p:nvSpPr>
+          <p:cNvPr id="7" name="Shape 5"/>
+          <p:cNvSpPr/>
+          <p:nvPr/>
+        </p:nvSpPr>
+        <p:spPr>
+          <a:xfrm>
+            <a:off x="365760" y="1673352"/>
+            <a:ext cx="164592" cy="164592"/>
+          </a:xfrm>
+          <a:prstGeom prst="ellipse">
+            <a:avLst/>
+          </a:prstGeom>
+          <a:solidFill>
+            <a:srgbClr val="34D399"/>
+          </a:solidFill>
+          <a:ln/>
+        </p:spPr>
+      </p:sp>
+      <p:sp>
+        <p:nvSpPr>
+          <p:cNvPr id="8" name="Text 6"/>
+          <p:cNvSpPr/>
+          <p:nvPr/>
+        </p:nvSpPr>
+        <p:spPr>
+          <a:xfrm>
+            <a:off x="658368" y="1600200"/>
+            <a:ext cx="7955280" cy="548640"/>
+          </a:xfrm>
+          <a:prstGeom prst="rect">
+            <a:avLst/>
+          </a:prstGeom>
+          <a:noFill/>
+          <a:ln/>
+        </p:spPr>
+        <p:txBody>
+          <a:bodyPr wrap="square" rtlCol="0" anchor="ctr"/>
+          <a:lstStyle/>
+          <a:p>
+            <a:pPr indent="0" marL="0">
+              <a:buNone/>
+            </a:pPr>
+            <a:r>
+              <a:rPr lang="en-US" sz="1500" dirty="0">
+                <a:solidFill>
+                  <a:srgbClr val="1E293B"/>
+                </a:solidFill>
+                <a:latin typeface="Calibri" pitchFamily="34" charset="0"/>
+                <a:ea typeface="Calibri" pitchFamily="34" charset="-122"/>
+                <a:cs typeface="Calibri" pitchFamily="34" charset="-120"/>
+              </a:rPr>
+              <a:t>By leveraging server-side algorithmic generation, it provides scientifically sound, personalized health recommendations.</a:t>
+            </a:r>
+            <a:endParaRPr lang="en-US" sz="1500" dirty="0"/>
+          </a:p>
+        </p:txBody>
+      </p:sp>
+      <p:sp>
+        <p:nvSpPr>
+          <p:cNvPr id="9" name="Shape 7"/>
+          <p:cNvSpPr/>
+          <p:nvPr/>
+        </p:nvSpPr>
+        <p:spPr>
+          <a:xfrm>
+            <a:off x="365760" y="2267712"/>
+            <a:ext cx="164592" cy="164592"/>
+          </a:xfrm>
+          <a:prstGeom prst="ellipse">
+            <a:avLst/>
+          </a:prstGeom>
+          <a:solidFill>
+            <a:srgbClr val="34D399"/>
+          </a:solidFill>
+          <a:ln/>
+        </p:spPr>
+      </p:sp>
+      <p:sp>
+        <p:nvSpPr>
+          <p:cNvPr id="10" name="Text 8"/>
+          <p:cNvSpPr/>
+          <p:nvPr/>
+        </p:nvSpPr>
+        <p:spPr>
+          <a:xfrm>
+            <a:off x="658368" y="2194560"/>
+            <a:ext cx="7955280" cy="548640"/>
+          </a:xfrm>
+          <a:prstGeom prst="rect">
+            <a:avLst/>
+          </a:prstGeom>
+          <a:noFill/>
+          <a:ln/>
+        </p:spPr>
+        <p:txBody>
+          <a:bodyPr wrap="square" rtlCol="0" anchor="ctr"/>
+          <a:lstStyle/>
+          <a:p>
+            <a:pPr indent="0" marL="0">
+              <a:buNone/>
+            </a:pPr>
+            <a:r>
+              <a:rPr lang="en-US" sz="1500" dirty="0">
+                <a:solidFill>
+                  <a:srgbClr val="1E293B"/>
+                </a:solidFill>
+                <a:latin typeface="Calibri" pitchFamily="34" charset="0"/>
+                <a:ea typeface="Calibri" pitchFamily="34" charset="-122"/>
+                <a:cs typeface="Calibri" pitchFamily="34" charset="-120"/>
+              </a:rPr>
+              <a:t>Proves that effective, highly personalized health planning can be achieved without external AI APIs.</a:t>
+            </a:r>
+            <a:endParaRPr lang="en-US" sz="1500" dirty="0"/>
+          </a:p>
+        </p:txBody>
+      </p:sp>
+      <p:sp>
+        <p:nvSpPr>
+          <p:cNvPr id="11" name="Shape 9"/>
+          <p:cNvSpPr/>
+          <p:nvPr/>
+        </p:nvSpPr>
+        <p:spPr>
+          <a:xfrm>
+            <a:off x="365760" y="2862072"/>
+            <a:ext cx="164592" cy="164592"/>
+          </a:xfrm>
+          <a:prstGeom prst="ellipse">
+            <a:avLst/>
+          </a:prstGeom>
+          <a:solidFill>
+            <a:srgbClr val="34D399"/>
+          </a:solidFill>
+          <a:ln/>
+        </p:spPr>
+      </p:sp>
+      <p:sp>
+        <p:nvSpPr>
+          <p:cNvPr id="12" name="Text 10"/>
+          <p:cNvSpPr/>
+          <p:nvPr/>
+        </p:nvSpPr>
+        <p:spPr>
+          <a:xfrm>
+            <a:off x="658368" y="2788920"/>
+            <a:ext cx="7955280" cy="548640"/>
+          </a:xfrm>
+          <a:prstGeom prst="rect">
+            <a:avLst/>
+          </a:prstGeom>
+          <a:noFill/>
+          <a:ln/>
+        </p:spPr>
+        <p:txBody>
+          <a:bodyPr wrap="square" rtlCol="0" anchor="ctr"/>
+          <a:lstStyle/>
+          <a:p>
+            <a:pPr indent="0" marL="0">
+              <a:buNone/>
+            </a:pPr>
+            <a:r>
+              <a:rPr lang="en-US" sz="1500" dirty="0">
+                <a:solidFill>
+                  <a:srgbClr val="1E293B"/>
+                </a:solidFill>
+                <a:latin typeface="Calibri" pitchFamily="34" charset="0"/>
+                <a:ea typeface="Calibri" pitchFamily="34" charset="-122"/>
+                <a:cs typeface="Calibri" pitchFamily="34" charset="-120"/>
+              </a:rPr>
+              <a:t>The app is accessible to anyone for free, breaking the cost barrier of fitness coaching.</a:t>
+            </a:r>
+            <a:endParaRPr lang="en-US" sz="1500" dirty="0"/>
           </a:p>
         </p:txBody>
       </p:sp>
